--- a/whomakestherules/A38_H4R2026_Ch7.pptx
+++ b/whomakestherules/A38_H4R2026_Ch7.pptx
@@ -5,15 +5,15 @@
     <p:sldMasterId id="2147483648" r:id="rId4"/>
   </p:sldMasterIdLst>
   <p:sldIdLst>
-    <p:sldId id="256" r:id="rId6"/>
-    <p:sldId id="257" r:id="rId5"/>
-    <p:sldId id="258" r:id="rId11"/>
-    <p:sldId id="259" r:id="rId12"/>
-    <p:sldId id="260" r:id="rId13"/>
-    <p:sldId id="261" r:id="rId14"/>
-    <p:sldId id="262" r:id="rId15"/>
-    <p:sldId id="263" r:id="rId16"/>
-    <p:sldId id="264" r:id="rId17"/>
+    <p:sldId id="256" r:id="rId5"/>
+    <p:sldId id="257" r:id="rId6"/>
+    <p:sldId id="258" r:id="rId7"/>
+    <p:sldId id="259" r:id="rId8"/>
+    <p:sldId id="260" r:id="rId9"/>
+    <p:sldId id="261" r:id="rId10"/>
+    <p:sldId id="262" r:id="rId11"/>
+    <p:sldId id="263" r:id="rId12"/>
+    <p:sldId id="264" r:id="rId13"/>
   </p:sldIdLst>
   <p:sldSz cx="12192000" cy="6858000"/>
   <p:notesSz cx="6858000" cy="9144000"/>
@@ -3420,7 +3420,7 @@
 </file>
 
 <file path=ppt/slides/slide1.xml><?xml version="1.0" encoding="utf-8"?>
-<p:sld xmlns:a="http://schemas.openxmlformats.org/drawingml/2006/main" xmlns:p="http://schemas.openxmlformats.org/presentationml/2006/main" xmlns:r="http://schemas.openxmlformats.org/officeDocument/2006/relationships">
+<p:sld xmlns:a="http://schemas.openxmlformats.org/drawingml/2006/main" xmlns:r="http://schemas.openxmlformats.org/officeDocument/2006/relationships" xmlns:p="http://schemas.openxmlformats.org/presentationml/2006/main">
   <p:cSld>
     <p:spTree>
       <p:nvGrpSpPr>
@@ -3428,7 +3428,14 @@
         <p:cNvGrpSpPr/>
         <p:nvPr/>
       </p:nvGrpSpPr>
-      <p:grpSpPr/>
+      <p:grpSpPr>
+        <a:xfrm>
+          <a:off x="0" y="0"/>
+          <a:ext cx="0" cy="0"/>
+          <a:chOff x="0" y="0"/>
+          <a:chExt cx="0" cy="0"/>
+        </a:xfrm>
+      </p:grpSpPr>
       <p:sp>
         <p:nvSpPr>
           <p:cNvPr id="2" name="Title 1"/>
@@ -3466,11 +3473,13 @@
           <a:lstStyle/>
           <a:p>
             <a:r>
+              <a:rPr dirty="0"/>
               <a:t>Machine-Readable Railway Governance</a:t>
             </a:r>
           </a:p>
           <a:p>
             <a:r>
+              <a:rPr dirty="0"/>
               <a:t>Hack4Rail 2026 – Team A38</a:t>
             </a:r>
           </a:p>
@@ -3485,7 +3494,7 @@
 </file>
 
 <file path=ppt/slides/slide2.xml><?xml version="1.0" encoding="utf-8"?>
-<p:sld xmlns:a="http://schemas.openxmlformats.org/drawingml/2006/main" xmlns:p="http://schemas.openxmlformats.org/presentationml/2006/main" xmlns:r="http://schemas.openxmlformats.org/officeDocument/2006/relationships">
+<p:sld xmlns:a="http://schemas.openxmlformats.org/drawingml/2006/main" xmlns:r="http://schemas.openxmlformats.org/officeDocument/2006/relationships" xmlns:p="http://schemas.openxmlformats.org/presentationml/2006/main">
   <p:cSld>
     <p:spTree>
       <p:nvGrpSpPr>
@@ -3493,7 +3502,14 @@
         <p:cNvGrpSpPr/>
         <p:nvPr/>
       </p:nvGrpSpPr>
-      <p:grpSpPr/>
+      <p:grpSpPr>
+        <a:xfrm>
+          <a:off x="0" y="0"/>
+          <a:ext cx="0" cy="0"/>
+          <a:chOff x="0" y="0"/>
+          <a:chExt cx="0" cy="0"/>
+        </a:xfrm>
+      </p:grpSpPr>
       <p:sp>
         <p:nvSpPr>
           <p:cNvPr id="2" name="Title 1"/>
@@ -3527,37 +3543,97 @@
         </p:nvSpPr>
         <p:spPr/>
         <p:txBody>
-          <a:bodyPr/>
-          <a:lstStyle/>
-          <a:p>
-            <a:r>
+          <a:bodyPr>
+            <a:normAutofit fontScale="92500" lnSpcReduction="20000"/>
+          </a:bodyPr>
+          <a:lstStyle/>
+          <a:p>
+            <a:r>
+              <a:rPr dirty="0"/>
               <a:t>📦 "Here are the regulations. Read them. All of them."</a:t>
             </a:r>
-          </a:p>
-          <a:p/>
-          <a:p>
-            <a:r>
+            <a:endParaRPr lang="de-DE" dirty="0"/>
+          </a:p>
+          <a:p>
+            <a:r>
+              <a:rPr lang="de-DE" dirty="0"/>
+              <a:t>„</a:t>
+            </a:r>
+            <a:r>
+              <a:rPr lang="de-DE" dirty="0" err="1"/>
+              <a:t>Apply</a:t>
+            </a:r>
+            <a:r>
+              <a:rPr lang="de-DE" dirty="0"/>
+              <a:t> </a:t>
+            </a:r>
+            <a:r>
+              <a:rPr lang="de-DE" dirty="0" err="1"/>
+              <a:t>them</a:t>
+            </a:r>
+            <a:r>
+              <a:rPr lang="de-DE" dirty="0"/>
+              <a:t>“</a:t>
+            </a:r>
+            <a:endParaRPr dirty="0"/>
+          </a:p>
+          <a:p>
+            <a:endParaRPr dirty="0"/>
+          </a:p>
+          <a:p>
+            <a:r>
+              <a:rPr dirty="0"/>
               <a:t>📦📦 "Here's the new version. Compare it.</a:t>
             </a:r>
           </a:p>
           <a:p>
             <a:r>
+              <a:rPr dirty="0"/>
               <a:t>      Tell me what changed."</a:t>
             </a:r>
-          </a:p>
-          <a:p/>
-          <a:p>
-            <a:r>
+            <a:endParaRPr lang="de-DE" dirty="0"/>
+          </a:p>
+          <a:p>
+            <a:r>
+              <a:rPr lang="de-DE" dirty="0"/>
+              <a:t>„</a:t>
+            </a:r>
+            <a:r>
+              <a:rPr lang="de-DE" dirty="0" err="1"/>
+              <a:t>Apply</a:t>
+            </a:r>
+            <a:r>
+              <a:rPr lang="de-DE" dirty="0"/>
+              <a:t> </a:t>
+            </a:r>
+            <a:r>
+              <a:rPr lang="de-DE" dirty="0" err="1"/>
+              <a:t>them</a:t>
+            </a:r>
+            <a:r>
+              <a:rPr lang="de-DE" dirty="0"/>
+              <a:t>“</a:t>
+            </a:r>
+            <a:endParaRPr dirty="0"/>
+          </a:p>
+          <a:p>
+            <a:endParaRPr dirty="0"/>
+          </a:p>
+          <a:p>
+            <a:r>
+              <a:rPr dirty="0"/>
               <a:t>This is what railway companies do today.</a:t>
             </a:r>
           </a:p>
           <a:p>
             <a:r>
+              <a:rPr dirty="0"/>
               <a:t>Manually. For hundreds of rules.</a:t>
             </a:r>
           </a:p>
           <a:p>
             <a:r>
+              <a:rPr dirty="0"/>
               <a:t>Across multiple countries and languages.</a:t>
             </a:r>
           </a:p>
@@ -3572,7 +3648,7 @@
 </file>
 
 <file path=ppt/slides/slide3.xml><?xml version="1.0" encoding="utf-8"?>
-<p:sld xmlns:a="http://schemas.openxmlformats.org/drawingml/2006/main" xmlns:p="http://schemas.openxmlformats.org/presentationml/2006/main" xmlns:r="http://schemas.openxmlformats.org/officeDocument/2006/relationships">
+<p:sld xmlns:a="http://schemas.openxmlformats.org/drawingml/2006/main" xmlns:r="http://schemas.openxmlformats.org/officeDocument/2006/relationships" xmlns:p="http://schemas.openxmlformats.org/presentationml/2006/main">
   <p:cSld>
     <p:spTree>
       <p:nvGrpSpPr>
@@ -3580,7 +3656,14 @@
         <p:cNvGrpSpPr/>
         <p:nvPr/>
       </p:nvGrpSpPr>
-      <p:grpSpPr/>
+      <p:grpSpPr>
+        <a:xfrm>
+          <a:off x="0" y="0"/>
+          <a:ext cx="0" cy="0"/>
+          <a:chOff x="0" y="0"/>
+          <a:chExt cx="0" cy="0"/>
+        </a:xfrm>
+      </p:grpSpPr>
       <p:sp>
         <p:nvSpPr>
           <p:cNvPr id="2" name="Title 1"/>
@@ -3626,7 +3709,9 @@
               <a:t>  Word → PDF → humans extract what applies</a:t>
             </a:r>
           </a:p>
-          <a:p/>
+          <a:p>
+            <a:endParaRPr/>
+          </a:p>
           <a:p>
             <a:r>
               <a:t>OUR PROPOSAL:</a:t>
@@ -3647,7 +3732,9 @@
               <a:t>  The PDF is a generated view.</a:t>
             </a:r>
           </a:p>
-          <a:p/>
+          <a:p>
+            <a:endParaRPr/>
+          </a:p>
           <a:p>
             <a:r>
               <a:t>NIST does it (OSCAL). BSI adopted it.</a:t>
@@ -3669,7 +3756,7 @@
 </file>
 
 <file path=ppt/slides/slide4.xml><?xml version="1.0" encoding="utf-8"?>
-<p:sld xmlns:a="http://schemas.openxmlformats.org/drawingml/2006/main" xmlns:p="http://schemas.openxmlformats.org/presentationml/2006/main" xmlns:r="http://schemas.openxmlformats.org/officeDocument/2006/relationships">
+<p:sld xmlns:a="http://schemas.openxmlformats.org/drawingml/2006/main" xmlns:r="http://schemas.openxmlformats.org/officeDocument/2006/relationships" xmlns:p="http://schemas.openxmlformats.org/presentationml/2006/main">
   <p:cSld>
     <p:spTree>
       <p:nvGrpSpPr>
@@ -3677,7 +3764,14 @@
         <p:cNvGrpSpPr/>
         <p:nvPr/>
       </p:nvGrpSpPr>
-      <p:grpSpPr/>
+      <p:grpSpPr>
+        <a:xfrm>
+          <a:off x="0" y="0"/>
+          <a:ext cx="0" cy="0"/>
+          <a:chOff x="0" y="0"/>
+          <a:chExt cx="0" cy="0"/>
+        </a:xfrm>
+      </p:grpSpPr>
       <p:sp>
         <p:nvSpPr>
           <p:cNvPr id="2" name="Title 1"/>
@@ -3718,7 +3812,9 @@
               <a:t>Lightweight profile of NIST OSCAL for railway regulations</a:t>
             </a:r>
           </a:p>
-          <a:p/>
+          <a:p>
+            <a:endParaRPr/>
+          </a:p>
           <a:p>
             <a:r>
               <a:t>Catalog → Groups → Controls</a:t>
@@ -3739,7 +3835,9 @@
               <a:t>  └─ One regulation</a:t>
             </a:r>
           </a:p>
-          <a:p/>
+          <a:p>
+            <a:endParaRPr/>
+          </a:p>
           <a:p>
             <a:r>
               <a:t>Key features:</a:t>
@@ -3776,7 +3874,7 @@
 </file>
 
 <file path=ppt/slides/slide5.xml><?xml version="1.0" encoding="utf-8"?>
-<p:sld xmlns:a="http://schemas.openxmlformats.org/drawingml/2006/main" xmlns:p="http://schemas.openxmlformats.org/presentationml/2006/main" xmlns:r="http://schemas.openxmlformats.org/officeDocument/2006/relationships">
+<p:sld xmlns:a="http://schemas.openxmlformats.org/drawingml/2006/main" xmlns:r="http://schemas.openxmlformats.org/officeDocument/2006/relationships" xmlns:p="http://schemas.openxmlformats.org/presentationml/2006/main">
   <p:cSld>
     <p:spTree>
       <p:nvGrpSpPr>
@@ -3784,7 +3882,14 @@
         <p:cNvGrpSpPr/>
         <p:nvPr/>
       </p:nvGrpSpPr>
-      <p:grpSpPr/>
+      <p:grpSpPr>
+        <a:xfrm>
+          <a:off x="0" y="0"/>
+          <a:ext cx="0" cy="0"/>
+          <a:chOff x="0" y="0"/>
+          <a:chExt cx="0" cy="0"/>
+        </a:xfrm>
+      </p:grpSpPr>
       <p:sp>
         <p:nvSpPr>
           <p:cNvPr id="2" name="Title 1"/>
@@ -3830,7 +3935,9 @@
               <a:t>44 rules × 6 channels × 4 transport modes</a:t>
             </a:r>
           </a:p>
-          <a:p/>
+          <a:p>
+            <a:endParaRPr/>
+          </a:p>
           <a:p>
             <a:r>
               <a:t>What we did:</a:t>
@@ -3856,7 +3963,9 @@
               <a:t>• Validated against NIST JSON Schema ✅</a:t>
             </a:r>
           </a:p>
-          <a:p/>
+          <a:p>
+            <a:endParaRPr/>
+          </a:p>
           <a:p>
             <a:r>
               <a:t>What changed between 2024 and 2025?</a:t>
@@ -3878,7 +3987,7 @@
 </file>
 
 <file path=ppt/slides/slide6.xml><?xml version="1.0" encoding="utf-8"?>
-<p:sld xmlns:a="http://schemas.openxmlformats.org/drawingml/2006/main" xmlns:p="http://schemas.openxmlformats.org/presentationml/2006/main" xmlns:r="http://schemas.openxmlformats.org/officeDocument/2006/relationships">
+<p:sld xmlns:a="http://schemas.openxmlformats.org/drawingml/2006/main" xmlns:r="http://schemas.openxmlformats.org/officeDocument/2006/relationships" xmlns:p="http://schemas.openxmlformats.org/presentationml/2006/main">
   <p:cSld>
     <p:spTree>
       <p:nvGrpSpPr>
@@ -3886,7 +3995,14 @@
         <p:cNvGrpSpPr/>
         <p:nvPr/>
       </p:nvGrpSpPr>
-      <p:grpSpPr/>
+      <p:grpSpPr>
+        <a:xfrm>
+          <a:off x="0" y="0"/>
+          <a:ext cx="0" cy="0"/>
+          <a:chOff x="0" y="0"/>
+          <a:chExt cx="0" cy="0"/>
+        </a:xfrm>
+      </p:grpSpPr>
       <p:sp>
         <p:nvSpPr>
           <p:cNvPr id="2" name="Title 1"/>
@@ -3927,7 +4043,9 @@
               <a:t>Because it's in Git:</a:t>
             </a:r>
           </a:p>
-          <a:p/>
+          <a:p>
+            <a:endParaRPr/>
+          </a:p>
           <a:p>
             <a:r>
               <a:t>• Full version history of every rule</a:t>
@@ -3948,7 +4066,9 @@
               <a:t>• Audit trail: who approved what</a:t>
             </a:r>
           </a:p>
-          <a:p/>
+          <a:p>
+            <a:endParaRPr/>
+          </a:p>
           <a:p>
             <a:r>
               <a:t>No more: "Which version is current?"</a:t>
@@ -3970,7 +4090,7 @@
 </file>
 
 <file path=ppt/slides/slide7.xml><?xml version="1.0" encoding="utf-8"?>
-<p:sld xmlns:a="http://schemas.openxmlformats.org/drawingml/2006/main" xmlns:p="http://schemas.openxmlformats.org/presentationml/2006/main" xmlns:r="http://schemas.openxmlformats.org/officeDocument/2006/relationships">
+<p:sld xmlns:a="http://schemas.openxmlformats.org/drawingml/2006/main" xmlns:r="http://schemas.openxmlformats.org/officeDocument/2006/relationships" xmlns:p="http://schemas.openxmlformats.org/presentationml/2006/main">
   <p:cSld>
     <p:spTree>
       <p:nvGrpSpPr>
@@ -3978,7 +4098,14 @@
         <p:cNvGrpSpPr/>
         <p:nvPr/>
       </p:nvGrpSpPr>
-      <p:grpSpPr/>
+      <p:grpSpPr>
+        <a:xfrm>
+          <a:off x="0" y="0"/>
+          <a:ext cx="0" cy="0"/>
+          <a:chOff x="0" y="0"/>
+          <a:chExt cx="0" cy="0"/>
+        </a:xfrm>
+      </p:grpSpPr>
       <p:sp>
         <p:nvSpPr>
           <p:cNvPr id="2" name="Title 1"/>
@@ -4024,7 +4151,9 @@
               <a:t>   (already structured, digital-native)</a:t>
             </a:r>
           </a:p>
-          <a:p/>
+          <a:p>
+            <a:endParaRPr/>
+          </a:p>
           <a:p>
             <a:r>
               <a:t>2. Web editor that behaves like Word</a:t>
@@ -4035,7 +4164,9 @@
               <a:t>   (low learning curve for governance owners)</a:t>
             </a:r>
           </a:p>
-          <a:p/>
+          <a:p>
+            <a:endParaRPr/>
+          </a:p>
           <a:p>
             <a:r>
               <a:t>3. Import existing governance documents</a:t>
@@ -4046,7 +4177,9 @@
               <a:t>   → validate → publish as OSCAL</a:t>
             </a:r>
           </a:p>
-          <a:p/>
+          <a:p>
+            <a:endParaRPr/>
+          </a:p>
           <a:p>
             <a:r>
               <a:t>4. Expand: safety regulations, cross-border (TSI),</a:t>
@@ -4057,7 +4190,9 @@
               <a:t>   operational rules</a:t>
             </a:r>
           </a:p>
-          <a:p/>
+          <a:p>
+            <a:endParaRPr/>
+          </a:p>
           <a:p>
             <a:r>
               <a:t>Little change in workflow. Massive gain in usability.</a:t>
@@ -4074,7 +4209,7 @@
 </file>
 
 <file path=ppt/slides/slide8.xml><?xml version="1.0" encoding="utf-8"?>
-<p:sld xmlns:a="http://schemas.openxmlformats.org/drawingml/2006/main" xmlns:p="http://schemas.openxmlformats.org/presentationml/2006/main" xmlns:r="http://schemas.openxmlformats.org/officeDocument/2006/relationships">
+<p:sld xmlns:a="http://schemas.openxmlformats.org/drawingml/2006/main" xmlns:r="http://schemas.openxmlformats.org/officeDocument/2006/relationships" xmlns:p="http://schemas.openxmlformats.org/presentationml/2006/main">
   <p:cSld>
     <p:spTree>
       <p:nvGrpSpPr>
@@ -4082,7 +4217,14 @@
         <p:cNvGrpSpPr/>
         <p:nvPr/>
       </p:nvGrpSpPr>
-      <p:grpSpPr/>
+      <p:grpSpPr>
+        <a:xfrm>
+          <a:off x="0" y="0"/>
+          <a:ext cx="0" cy="0"/>
+          <a:chOff x="0" y="0"/>
+          <a:chExt cx="0" cy="0"/>
+        </a:xfrm>
+      </p:grpSpPr>
       <p:sp>
         <p:nvSpPr>
           <p:cNvPr id="2" name="Title 1"/>
@@ -4143,7 +4285,9 @@
               <a:t>└──────────────┘     └─────────────┘     └──────────────┘</a:t>
             </a:r>
           </a:p>
-          <a:p/>
+          <a:p>
+            <a:endParaRPr/>
+          </a:p>
           <a:p>
             <a:r>
               <a:t>Governance owners keep writing like they always have.</a:t>
@@ -4154,7 +4298,9 @@
               <a:t>But the output is structured, versioned, machine-readable.</a:t>
             </a:r>
           </a:p>
-          <a:p/>
+          <a:p>
+            <a:endParaRPr/>
+          </a:p>
           <a:p>
             <a:r>
               <a:t>→ Cross-railway interoperability (DB / SBB / ÖBB)</a:t>
@@ -4181,7 +4327,7 @@
 </file>
 
 <file path=ppt/slides/slide9.xml><?xml version="1.0" encoding="utf-8"?>
-<p:sld xmlns:a="http://schemas.openxmlformats.org/drawingml/2006/main" xmlns:p="http://schemas.openxmlformats.org/presentationml/2006/main" xmlns:r="http://schemas.openxmlformats.org/officeDocument/2006/relationships">
+<p:sld xmlns:a="http://schemas.openxmlformats.org/drawingml/2006/main" xmlns:r="http://schemas.openxmlformats.org/officeDocument/2006/relationships" xmlns:p="http://schemas.openxmlformats.org/presentationml/2006/main">
   <p:cSld>
     <p:spTree>
       <p:nvGrpSpPr>
@@ -4189,7 +4335,14 @@
         <p:cNvGrpSpPr/>
         <p:nvPr/>
       </p:nvGrpSpPr>
-      <p:grpSpPr/>
+      <p:grpSpPr>
+        <a:xfrm>
+          <a:off x="0" y="0"/>
+          <a:ext cx="0" cy="0"/>
+          <a:chOff x="0" y="0"/>
+          <a:chExt cx="0" cy="0"/>
+        </a:xfrm>
+      </p:grpSpPr>
       <p:sp>
         <p:nvSpPr>
           <p:cNvPr id="2" name="Title 1"/>
@@ -4206,6 +4359,7 @@
           <a:lstStyle/>
           <a:p>
             <a:r>
+              <a:rPr dirty="0"/>
               <a:t>OSCAL4Rail</a:t>
             </a:r>
           </a:p>
@@ -4227,28 +4381,37 @@
           <a:lstStyle/>
           <a:p>
             <a:r>
+              <a:rPr dirty="0"/>
               <a:t>Machine-readable governance for railways.</a:t>
             </a:r>
           </a:p>
-          <a:p/>
-          <a:p>
-            <a:r>
+          <a:p>
+            <a:endParaRPr dirty="0"/>
+          </a:p>
+          <a:p>
+            <a:r>
+              <a:rPr dirty="0"/>
               <a:t>Who makes the rules? Humans.</a:t>
             </a:r>
           </a:p>
           <a:p>
             <a:r>
+              <a:rPr dirty="0"/>
               <a:t>How we publish, version, and compare them?</a:t>
             </a:r>
           </a:p>
           <a:p>
             <a:r>
+              <a:rPr dirty="0"/>
               <a:t>That's a machine's job.</a:t>
             </a:r>
           </a:p>
-          <a:p/>
-          <a:p>
-            <a:r>
+          <a:p>
+            <a:endParaRPr dirty="0"/>
+          </a:p>
+          <a:p>
+            <a:r>
+              <a:rPr dirty="0"/>
               <a:t>Starting today.</a:t>
             </a:r>
           </a:p>
@@ -4578,18 +4741,6 @@
 </file>
 
 <file path=customXml/item1.xml><?xml version="1.0" encoding="utf-8"?>
-<p:properties xmlns:p="http://schemas.microsoft.com/office/2006/metadata/properties" xmlns:xsi="http://www.w3.org/2001/XMLSchema-instance" xmlns:pc="http://schemas.microsoft.com/office/infopath/2007/PartnerControls">
-  <documentManagement>
-    <Copyright xmlns="b106c448-c3d1-41cc-8fd9-3acb307364b4" xsi:nil="true"/>
-    <lcf76f155ced4ddcb4097134ff3c332f xmlns="b106c448-c3d1-41cc-8fd9-3acb307364b4">
-      <Terms xmlns="http://schemas.microsoft.com/office/infopath/2007/PartnerControls"/>
-    </lcf76f155ced4ddcb4097134ff3c332f>
-    <TaxCatchAll xmlns="b043894e-b4c8-44d0-9690-d7947297ac19" xsi:nil="true"/>
-  </documentManagement>
-</p:properties>
-</file>
-
-<file path=customXml/item2.xml><?xml version="1.0" encoding="utf-8"?>
 <ct:contentTypeSchema xmlns:ct="http://schemas.microsoft.com/office/2006/metadata/contentType" xmlns:ma="http://schemas.microsoft.com/office/2006/metadata/properties/metaAttributes" ct:_="" ma:_="" ma:contentTypeName="Dokument" ma:contentTypeID="0x010100C5895299445B8C4DB378BBB718B1F939" ma:contentTypeVersion="18" ma:contentTypeDescription="Ein neues Dokument erstellen." ma:contentTypeScope="" ma:versionID="ca18c32604eb9eb075bdd5b520f76d7f">
   <xsd:schema xmlns:xsd="http://www.w3.org/2001/XMLSchema" xmlns:xs="http://www.w3.org/2001/XMLSchema" xmlns:p="http://schemas.microsoft.com/office/2006/metadata/properties" xmlns:ns2="b106c448-c3d1-41cc-8fd9-3acb307364b4" xmlns:ns3="b043894e-b4c8-44d0-9690-d7947297ac19" targetNamespace="http://schemas.microsoft.com/office/2006/metadata/properties" ma:root="true" ma:fieldsID="0e0a0918b2fa3636e306fde1bc5c258b" ns2:_="" ns3:_="">
     <xsd:import namespace="b106c448-c3d1-41cc-8fd9-3acb307364b4"/>
@@ -4834,6 +4985,18 @@
 </ct:contentTypeSchema>
 </file>
 
+<file path=customXml/item2.xml><?xml version="1.0" encoding="utf-8"?>
+<p:properties xmlns:p="http://schemas.microsoft.com/office/2006/metadata/properties" xmlns:xsi="http://www.w3.org/2001/XMLSchema-instance" xmlns:pc="http://schemas.microsoft.com/office/infopath/2007/PartnerControls">
+  <documentManagement>
+    <Copyright xmlns="b106c448-c3d1-41cc-8fd9-3acb307364b4" xsi:nil="true"/>
+    <lcf76f155ced4ddcb4097134ff3c332f xmlns="b106c448-c3d1-41cc-8fd9-3acb307364b4">
+      <Terms xmlns="http://schemas.microsoft.com/office/infopath/2007/PartnerControls"/>
+    </lcf76f155ced4ddcb4097134ff3c332f>
+    <TaxCatchAll xmlns="b043894e-b4c8-44d0-9690-d7947297ac19" xsi:nil="true"/>
+  </documentManagement>
+</p:properties>
+</file>
+
 <file path=customXml/item3.xml><?xml version="1.0" encoding="utf-8"?>
 <?mso-contentType ?>
 <FormTemplates xmlns="http://schemas.microsoft.com/sharepoint/v3/contenttype/forms">
@@ -4844,23 +5007,6 @@
 </file>
 
 <file path=customXml/itemProps1.xml><?xml version="1.0" encoding="utf-8"?>
-<ds:datastoreItem xmlns:ds="http://schemas.openxmlformats.org/officeDocument/2006/customXml" ds:itemID="{B6D2420F-AFAE-4394-AC5D-D74FCC39CD53}">
-  <ds:schemaRefs>
-    <ds:schemaRef ds:uri="http://schemas.microsoft.com/office/infopath/2007/PartnerControls"/>
-    <ds:schemaRef ds:uri="http://www.w3.org/XML/1998/namespace"/>
-    <ds:schemaRef ds:uri="http://schemas.microsoft.com/office/2006/metadata/properties"/>
-    <ds:schemaRef ds:uri="http://purl.org/dc/elements/1.1/"/>
-    <ds:schemaRef ds:uri="http://schemas.openxmlformats.org/package/2006/metadata/core-properties"/>
-    <ds:schemaRef ds:uri="b043894e-b4c8-44d0-9690-d7947297ac19"/>
-    <ds:schemaRef ds:uri="http://schemas.microsoft.com/office/2006/documentManagement/types"/>
-    <ds:schemaRef ds:uri="b106c448-c3d1-41cc-8fd9-3acb307364b4"/>
-    <ds:schemaRef ds:uri="http://purl.org/dc/dcmitype/"/>
-    <ds:schemaRef ds:uri="http://purl.org/dc/terms/"/>
-  </ds:schemaRefs>
-</ds:datastoreItem>
-</file>
-
-<file path=customXml/itemProps2.xml><?xml version="1.0" encoding="utf-8"?>
 <ds:datastoreItem xmlns:ds="http://schemas.openxmlformats.org/officeDocument/2006/customXml" ds:itemID="{0BED3A9D-D1E4-45EA-8B49-CB6F60C2A98A}">
   <ds:schemaRefs>
     <ds:schemaRef ds:uri="http://schemas.microsoft.com/office/2006/metadata/contentType"/>
@@ -4879,6 +5025,23 @@
 </ds:datastoreItem>
 </file>
 
+<file path=customXml/itemProps2.xml><?xml version="1.0" encoding="utf-8"?>
+<ds:datastoreItem xmlns:ds="http://schemas.openxmlformats.org/officeDocument/2006/customXml" ds:itemID="{B6D2420F-AFAE-4394-AC5D-D74FCC39CD53}">
+  <ds:schemaRefs>
+    <ds:schemaRef ds:uri="http://schemas.microsoft.com/office/infopath/2007/PartnerControls"/>
+    <ds:schemaRef ds:uri="http://www.w3.org/XML/1998/namespace"/>
+    <ds:schemaRef ds:uri="http://schemas.microsoft.com/office/2006/metadata/properties"/>
+    <ds:schemaRef ds:uri="http://purl.org/dc/elements/1.1/"/>
+    <ds:schemaRef ds:uri="http://schemas.openxmlformats.org/package/2006/metadata/core-properties"/>
+    <ds:schemaRef ds:uri="b043894e-b4c8-44d0-9690-d7947297ac19"/>
+    <ds:schemaRef ds:uri="http://schemas.microsoft.com/office/2006/documentManagement/types"/>
+    <ds:schemaRef ds:uri="b106c448-c3d1-41cc-8fd9-3acb307364b4"/>
+    <ds:schemaRef ds:uri="http://purl.org/dc/dcmitype/"/>
+    <ds:schemaRef ds:uri="http://purl.org/dc/terms/"/>
+  </ds:schemaRefs>
+</ds:datastoreItem>
+</file>
+
 <file path=customXml/itemProps3.xml><?xml version="1.0" encoding="utf-8"?>
 <ds:datastoreItem xmlns:ds="http://schemas.openxmlformats.org/officeDocument/2006/customXml" ds:itemID="{47CF5FD6-43E2-4C9A-9372-C9D60EE1772B}">
   <ds:schemaRefs>

--- a/whomakestherules/A38_H4R2026_Ch7.pptx
+++ b/whomakestherules/A38_H4R2026_Ch7.pptx
@@ -3452,6 +3452,7 @@
           <a:lstStyle/>
           <a:p>
             <a:r>
+              <a:rPr dirty="0"/>
               <a:t>Who Makes the Rules?</a:t>
             </a:r>
           </a:p>
@@ -3680,6 +3681,7 @@
           <a:lstStyle/>
           <a:p>
             <a:r>
+              <a:rPr dirty="0"/>
               <a:t>The Paradigm Shift</a:t>
             </a:r>
           </a:p>
@@ -3695,58 +3697,274 @@
             <p:ph idx="1"/>
           </p:nvPr>
         </p:nvSpPr>
-        <p:spPr/>
-        <p:txBody>
-          <a:bodyPr/>
-          <a:lstStyle/>
-          <a:p>
-            <a:r>
+        <p:spPr>
+          <a:xfrm>
+            <a:off x="689919" y="1590847"/>
+            <a:ext cx="10515600" cy="2476211"/>
+          </a:xfrm>
+        </p:spPr>
+        <p:txBody>
+          <a:bodyPr>
+            <a:normAutofit fontScale="85000" lnSpcReduction="20000"/>
+          </a:bodyPr>
+          <a:lstStyle/>
+          <a:p>
+            <a:pPr marL="0" indent="0">
+              <a:buNone/>
+            </a:pPr>
+            <a:r>
+              <a:rPr dirty="0">
+                <a:solidFill>
+                  <a:srgbClr val="FF0000"/>
+                </a:solidFill>
+              </a:rPr>
               <a:t>TODAY:</a:t>
             </a:r>
           </a:p>
           <a:p>
-            <a:r>
-              <a:t>  Word → PDF → humans extract what applies</a:t>
-            </a:r>
-          </a:p>
-          <a:p>
-            <a:endParaRPr/>
-          </a:p>
-          <a:p>
-            <a:r>
+            <a:pPr marL="0" indent="0">
+              <a:buNone/>
+            </a:pPr>
+            <a:r>
+              <a:rPr dirty="0"/>
+              <a:t>Word → PDF → humans extract</a:t>
+            </a:r>
+            <a:r>
+              <a:rPr lang="de-DE" dirty="0"/>
+              <a:t> and </a:t>
+            </a:r>
+            <a:r>
+              <a:rPr lang="de-DE" dirty="0" err="1"/>
+              <a:t>interpret</a:t>
+            </a:r>
+            <a:r>
+              <a:rPr dirty="0"/>
+              <a:t> what applies</a:t>
+            </a:r>
+          </a:p>
+          <a:p>
+            <a:endParaRPr dirty="0"/>
+          </a:p>
+          <a:p>
+            <a:pPr marL="0" indent="0">
+              <a:buNone/>
+            </a:pPr>
+            <a:r>
+              <a:rPr dirty="0">
+                <a:solidFill>
+                  <a:srgbClr val="FF0000"/>
+                </a:solidFill>
+              </a:rPr>
               <a:t>OUR PROPOSAL:</a:t>
             </a:r>
           </a:p>
           <a:p>
             <a:r>
-              <a:t>  Machine-readable FIRST, PDF second.</a:t>
-            </a:r>
-          </a:p>
-          <a:p>
-            <a:r>
-              <a:t>  The canonical source is structured data.</a:t>
-            </a:r>
-          </a:p>
-          <a:p>
-            <a:r>
-              <a:t>  The PDF is a generated view.</a:t>
-            </a:r>
-          </a:p>
-          <a:p>
-            <a:endParaRPr/>
-          </a:p>
-          <a:p>
-            <a:r>
-              <a:t>NIST does it (OSCAL). BSI adopted it.</a:t>
-            </a:r>
-          </a:p>
-          <a:p>
-            <a:r>
+              <a:rPr dirty="0"/>
+              <a:t>Machine-readable FIRST, PDF</a:t>
+            </a:r>
+            <a:r>
+              <a:rPr lang="de-DE" dirty="0"/>
+              <a:t>/</a:t>
+            </a:r>
+            <a:r>
+              <a:rPr lang="de-DE" dirty="0" err="1"/>
+              <a:t>other</a:t>
+            </a:r>
+            <a:r>
+              <a:rPr dirty="0"/>
+              <a:t> second.</a:t>
+            </a:r>
+          </a:p>
+          <a:p>
+            <a:r>
+              <a:rPr dirty="0"/>
+              <a:t>The canonical source is structured data</a:t>
+            </a:r>
+            <a:r>
+              <a:rPr lang="de-DE" dirty="0"/>
+              <a:t> als </a:t>
+            </a:r>
+            <a:r>
+              <a:rPr lang="de-DE" dirty="0" err="1"/>
+              <a:t>single</a:t>
+            </a:r>
+            <a:r>
+              <a:rPr lang="de-DE" dirty="0"/>
+              <a:t> </a:t>
+            </a:r>
+            <a:r>
+              <a:rPr lang="de-DE" dirty="0" err="1"/>
+              <a:t>point</a:t>
+            </a:r>
+            <a:r>
+              <a:rPr lang="de-DE" dirty="0"/>
+              <a:t> </a:t>
+            </a:r>
+            <a:r>
+              <a:rPr lang="de-DE" dirty="0" err="1"/>
+              <a:t>of</a:t>
+            </a:r>
+            <a:r>
+              <a:rPr lang="de-DE" dirty="0"/>
+              <a:t> </a:t>
+            </a:r>
+            <a:r>
+              <a:rPr lang="de-DE" dirty="0" err="1"/>
+              <a:t>truth</a:t>
+            </a:r>
+            <a:endParaRPr dirty="0"/>
+          </a:p>
+          <a:p>
+            <a:pPr marL="0" indent="0">
+              <a:buNone/>
+            </a:pPr>
+            <a:endParaRPr dirty="0"/>
+          </a:p>
+          <a:p>
+            <a:pPr marL="0" indent="0">
+              <a:buNone/>
+            </a:pPr>
+            <a:endParaRPr lang="en-GB" dirty="0"/>
+          </a:p>
+        </p:txBody>
+      </p:sp>
+      <p:pic>
+        <p:nvPicPr>
+          <p:cNvPr id="5" name="Picture 4">
+            <a:extLst>
+              <a:ext uri="{FF2B5EF4-FFF2-40B4-BE49-F238E27FC236}">
+                <a16:creationId xmlns:a16="http://schemas.microsoft.com/office/drawing/2014/main" id="{0AF1082A-27B6-30DC-9FE7-DD832ED10D86}"/>
+              </a:ext>
+            </a:extLst>
+          </p:cNvPr>
+          <p:cNvPicPr>
+            <a:picLocks noChangeAspect="1"/>
+          </p:cNvPicPr>
+          <p:nvPr/>
+        </p:nvPicPr>
+        <p:blipFill>
+          <a:blip r:embed="rId2"/>
+          <a:stretch>
+            <a:fillRect/>
+          </a:stretch>
+        </p:blipFill>
+        <p:spPr>
+          <a:xfrm>
+            <a:off x="436418" y="4506777"/>
+            <a:ext cx="2859228" cy="1012540"/>
+          </a:xfrm>
+          <a:prstGeom prst="rect">
+            <a:avLst/>
+          </a:prstGeom>
+        </p:spPr>
+      </p:pic>
+      <p:pic>
+        <p:nvPicPr>
+          <p:cNvPr id="6" name="Picture 5" descr="BSI - IT-Grundschutz">
+            <a:extLst>
+              <a:ext uri="{FF2B5EF4-FFF2-40B4-BE49-F238E27FC236}">
+                <a16:creationId xmlns:a16="http://schemas.microsoft.com/office/drawing/2014/main" id="{6E4CCAA5-719B-E2B5-0EE6-2842787744AF}"/>
+              </a:ext>
+            </a:extLst>
+          </p:cNvPr>
+          <p:cNvPicPr>
+            <a:picLocks noChangeAspect="1"/>
+          </p:cNvPicPr>
+          <p:nvPr/>
+        </p:nvPicPr>
+        <p:blipFill>
+          <a:blip r:embed="rId3"/>
+          <a:stretch>
+            <a:fillRect/>
+          </a:stretch>
+        </p:blipFill>
+        <p:spPr>
+          <a:xfrm>
+            <a:off x="6905272" y="4436773"/>
+            <a:ext cx="1624822" cy="977535"/>
+          </a:xfrm>
+          <a:prstGeom prst="rect">
+            <a:avLst/>
+          </a:prstGeom>
+        </p:spPr>
+      </p:pic>
+      <p:sp>
+        <p:nvSpPr>
+          <p:cNvPr id="4" name="TextBox 3">
+            <a:extLst>
+              <a:ext uri="{FF2B5EF4-FFF2-40B4-BE49-F238E27FC236}">
+                <a16:creationId xmlns:a16="http://schemas.microsoft.com/office/drawing/2014/main" id="{DE226D47-646A-89B6-0FB8-F581EAA66638}"/>
+              </a:ext>
+            </a:extLst>
+          </p:cNvPr>
+          <p:cNvSpPr txBox="1"/>
+          <p:nvPr/>
+        </p:nvSpPr>
+        <p:spPr>
+          <a:xfrm>
+            <a:off x="1274618" y="4673030"/>
+            <a:ext cx="10079182" cy="1938992"/>
+          </a:xfrm>
+          <a:prstGeom prst="rect">
+            <a:avLst/>
+          </a:prstGeom>
+          <a:noFill/>
+        </p:spPr>
+        <p:txBody>
+          <a:bodyPr wrap="square" rtlCol="0">
+            <a:spAutoFit/>
+          </a:bodyPr>
+          <a:lstStyle/>
+          <a:p>
+            <a:r>
+              <a:rPr lang="en-GB" sz="4000" dirty="0"/>
+              <a:t>          	 does it (OSCAL).                  adopted it.</a:t>
+            </a:r>
+          </a:p>
+          <a:p>
+            <a:endParaRPr lang="en-GB" sz="4000" dirty="0"/>
+          </a:p>
+          <a:p>
+            <a:pPr algn="ctr"/>
+            <a:r>
+              <a:rPr lang="en-GB" sz="4000" dirty="0"/>
               <a:t>We bring it to rail: OSCAL4Rail.</a:t>
             </a:r>
-          </a:p>
-        </p:txBody>
-      </p:sp>
+            <a:endParaRPr lang="de-DE" sz="4000" dirty="0"/>
+          </a:p>
+        </p:txBody>
+      </p:sp>
+      <p:pic>
+        <p:nvPicPr>
+          <p:cNvPr id="7" name="Picture 6" descr="UIC and its members begin work on the OpenRail Foundation ...">
+            <a:extLst>
+              <a:ext uri="{FF2B5EF4-FFF2-40B4-BE49-F238E27FC236}">
+                <a16:creationId xmlns:a16="http://schemas.microsoft.com/office/drawing/2014/main" id="{A13D5640-F600-AA2F-159A-C28A748D1C48}"/>
+              </a:ext>
+            </a:extLst>
+          </p:cNvPr>
+          <p:cNvPicPr>
+            <a:picLocks noChangeAspect="1"/>
+          </p:cNvPicPr>
+          <p:nvPr/>
+        </p:nvPicPr>
+        <p:blipFill>
+          <a:blip r:embed="rId4"/>
+          <a:stretch>
+            <a:fillRect/>
+          </a:stretch>
+        </p:blipFill>
+        <p:spPr>
+          <a:xfrm>
+            <a:off x="1526059" y="5672222"/>
+            <a:ext cx="1371600" cy="939800"/>
+          </a:xfrm>
+          <a:prstGeom prst="rect">
+            <a:avLst/>
+          </a:prstGeom>
+        </p:spPr>
+      </p:pic>
     </p:spTree>
   </p:cSld>
   <p:clrMapOvr>
@@ -3788,6 +4006,27 @@
           <a:lstStyle/>
           <a:p>
             <a:r>
+              <a:rPr lang="de-DE" dirty="0"/>
+              <a:t>Idea </a:t>
+            </a:r>
+            <a:r>
+              <a:rPr lang="de-DE" dirty="0" err="1"/>
+              <a:t>for</a:t>
+            </a:r>
+            <a:r>
+              <a:rPr lang="de-DE" dirty="0"/>
+              <a:t> </a:t>
+            </a:r>
+            <a:r>
+              <a:rPr lang="de-DE" dirty="0" err="1"/>
+              <a:t>Standardization</a:t>
+            </a:r>
+            <a:r>
+              <a:rPr lang="de-DE" dirty="0"/>
+              <a:t>: </a:t>
+            </a:r>
+            <a:r>
+              <a:rPr dirty="0"/>
               <a:t>OSCAL4Rail</a:t>
             </a:r>
           </a:p>
@@ -3805,63 +4044,260 @@
         </p:nvSpPr>
         <p:spPr/>
         <p:txBody>
-          <a:bodyPr/>
-          <a:lstStyle/>
-          <a:p>
-            <a:r>
+          <a:bodyPr>
+            <a:normAutofit/>
+          </a:bodyPr>
+          <a:lstStyle/>
+          <a:p>
+            <a:pPr marL="0" indent="0">
+              <a:buNone/>
+            </a:pPr>
+            <a:r>
+              <a:rPr dirty="0"/>
               <a:t>Lightweight profile of NIST OSCAL for railway regulations</a:t>
             </a:r>
           </a:p>
           <a:p>
-            <a:endParaRPr/>
-          </a:p>
-          <a:p>
-            <a:r>
-              <a:t>Catalog → Groups → Controls</a:t>
-            </a:r>
-          </a:p>
-          <a:p>
-            <a:r>
-              <a:t>  │         │        └─ One rule (verbatim text)</a:t>
-            </a:r>
-          </a:p>
-          <a:p>
-            <a:r>
-              <a:t>  │         └─ One chapter</a:t>
-            </a:r>
-          </a:p>
-          <a:p>
-            <a:r>
-              <a:t>  └─ One regulation</a:t>
-            </a:r>
-          </a:p>
-          <a:p>
-            <a:endParaRPr/>
-          </a:p>
-          <a:p>
-            <a:r>
-              <a:t>Key features:</a:t>
-            </a:r>
-          </a:p>
-          <a:p>
-            <a:r>
-              <a:t>• Validated against official NIST JSON Schema</a:t>
-            </a:r>
-          </a:p>
-          <a:p>
-            <a:r>
-              <a:t>• Verbatim rule text (no interpretation)</a:t>
-            </a:r>
-          </a:p>
-          <a:p>
-            <a:r>
-              <a:t>• Applicability matrix (channel × transport mode)</a:t>
-            </a:r>
-          </a:p>
-          <a:p>
-            <a:r>
-              <a:t>• Versioned in Git → changelog for free</a:t>
-            </a:r>
+            <a:endParaRPr dirty="0"/>
+          </a:p>
+          <a:p>
+            <a:pPr marL="0" indent="0">
+              <a:buNone/>
+            </a:pPr>
+            <a:r>
+              <a:rPr dirty="0"/>
+              <a:t>Catalog </a:t>
+            </a:r>
+            <a:r>
+              <a:rPr lang="de-DE" dirty="0"/>
+              <a:t>		</a:t>
+            </a:r>
+            <a:r>
+              <a:rPr dirty="0"/>
+              <a:t> </a:t>
+            </a:r>
+            <a:r>
+              <a:rPr lang="de-DE" dirty="0"/>
+              <a:t>	</a:t>
+            </a:r>
+            <a:r>
+              <a:rPr dirty="0"/>
+              <a:t>Groups </a:t>
+            </a:r>
+            <a:r>
+              <a:rPr lang="de-DE" dirty="0"/>
+              <a:t>				</a:t>
+            </a:r>
+            <a:r>
+              <a:rPr dirty="0"/>
+              <a:t>Controls</a:t>
+            </a:r>
+          </a:p>
+          <a:p>
+            <a:pPr marL="0" indent="0">
+              <a:buNone/>
+            </a:pPr>
+            <a:endParaRPr lang="de-DE" dirty="0"/>
+          </a:p>
+          <a:p>
+            <a:pPr marL="0" indent="0">
+              <a:buNone/>
+            </a:pPr>
+            <a:r>
+              <a:rPr dirty="0"/>
+              <a:t>                  </a:t>
+            </a:r>
+            <a:r>
+              <a:rPr lang="de-DE" dirty="0"/>
+              <a:t>							</a:t>
+            </a:r>
+            <a:r>
+              <a:rPr dirty="0"/>
+              <a:t>One rule (verbatim text)</a:t>
+            </a:r>
+          </a:p>
+          <a:p>
+            <a:pPr marL="0" indent="0">
+              <a:buNone/>
+            </a:pPr>
+            <a:r>
+              <a:rPr dirty="0"/>
+              <a:t>          </a:t>
+            </a:r>
+            <a:r>
+              <a:rPr lang="de-DE" dirty="0"/>
+              <a:t>	</a:t>
+            </a:r>
+            <a:r>
+              <a:rPr dirty="0"/>
+              <a:t> </a:t>
+            </a:r>
+            <a:r>
+              <a:rPr lang="de-DE" dirty="0"/>
+              <a:t>				</a:t>
+            </a:r>
+            <a:r>
+              <a:rPr dirty="0"/>
+              <a:t>One chapter</a:t>
+            </a:r>
+          </a:p>
+          <a:p>
+            <a:pPr marL="0" indent="0">
+              <a:buNone/>
+            </a:pPr>
+            <a:r>
+              <a:rPr dirty="0"/>
+              <a:t> </a:t>
+            </a:r>
+            <a:r>
+              <a:rPr lang="de-DE" dirty="0"/>
+              <a:t>		</a:t>
+            </a:r>
+            <a:r>
+              <a:rPr dirty="0"/>
+              <a:t>One regulation</a:t>
+            </a:r>
+          </a:p>
+          <a:p>
+            <a:endParaRPr dirty="0"/>
+          </a:p>
+        </p:txBody>
+      </p:sp>
+      <p:sp>
+        <p:nvSpPr>
+          <p:cNvPr id="6" name="Bent Up Arrow 5">
+            <a:extLst>
+              <a:ext uri="{FF2B5EF4-FFF2-40B4-BE49-F238E27FC236}">
+                <a16:creationId xmlns:a16="http://schemas.microsoft.com/office/drawing/2014/main" id="{C9A8700C-4511-6B02-6C20-FEE56495E247}"/>
+              </a:ext>
+            </a:extLst>
+          </p:cNvPr>
+          <p:cNvSpPr/>
+          <p:nvPr/>
+        </p:nvSpPr>
+        <p:spPr>
+          <a:xfrm rot="5400000">
+            <a:off x="1072978" y="4816841"/>
+            <a:ext cx="951471" cy="914400"/>
+          </a:xfrm>
+          <a:prstGeom prst="bentUpArrow">
+            <a:avLst/>
+          </a:prstGeom>
+        </p:spPr>
+        <p:style>
+          <a:lnRef idx="2">
+            <a:schemeClr val="accent1">
+              <a:shade val="15000"/>
+            </a:schemeClr>
+          </a:lnRef>
+          <a:fillRef idx="1">
+            <a:schemeClr val="accent1"/>
+          </a:fillRef>
+          <a:effectRef idx="0">
+            <a:schemeClr val="accent1"/>
+          </a:effectRef>
+          <a:fontRef idx="minor">
+            <a:schemeClr val="lt1"/>
+          </a:fontRef>
+        </p:style>
+        <p:txBody>
+          <a:bodyPr rtlCol="0" anchor="ctr"/>
+          <a:lstStyle/>
+          <a:p>
+            <a:pPr algn="ctr"/>
+            <a:endParaRPr lang="de-DE" dirty="0"/>
+          </a:p>
+        </p:txBody>
+      </p:sp>
+      <p:sp>
+        <p:nvSpPr>
+          <p:cNvPr id="7" name="Bent Up Arrow 6">
+            <a:extLst>
+              <a:ext uri="{FF2B5EF4-FFF2-40B4-BE49-F238E27FC236}">
+                <a16:creationId xmlns:a16="http://schemas.microsoft.com/office/drawing/2014/main" id="{7B313AC3-B649-BEE5-6F2B-B5EDD2283236}"/>
+              </a:ext>
+            </a:extLst>
+          </p:cNvPr>
+          <p:cNvSpPr/>
+          <p:nvPr/>
+        </p:nvSpPr>
+        <p:spPr>
+          <a:xfrm rot="5400000">
+            <a:off x="4333100" y="4103063"/>
+            <a:ext cx="951472" cy="1089454"/>
+          </a:xfrm>
+          <a:prstGeom prst="bentUpArrow">
+            <a:avLst/>
+          </a:prstGeom>
+        </p:spPr>
+        <p:style>
+          <a:lnRef idx="2">
+            <a:schemeClr val="accent1">
+              <a:shade val="15000"/>
+            </a:schemeClr>
+          </a:lnRef>
+          <a:fillRef idx="1">
+            <a:schemeClr val="accent1"/>
+          </a:fillRef>
+          <a:effectRef idx="0">
+            <a:schemeClr val="accent1"/>
+          </a:effectRef>
+          <a:fontRef idx="minor">
+            <a:schemeClr val="lt1"/>
+          </a:fontRef>
+        </p:style>
+        <p:txBody>
+          <a:bodyPr rtlCol="0" anchor="ctr"/>
+          <a:lstStyle/>
+          <a:p>
+            <a:pPr algn="ctr"/>
+            <a:endParaRPr lang="de-DE" dirty="0"/>
+          </a:p>
+        </p:txBody>
+      </p:sp>
+      <p:sp>
+        <p:nvSpPr>
+          <p:cNvPr id="8" name="Bent Up Arrow 7">
+            <a:extLst>
+              <a:ext uri="{FF2B5EF4-FFF2-40B4-BE49-F238E27FC236}">
+                <a16:creationId xmlns:a16="http://schemas.microsoft.com/office/drawing/2014/main" id="{C6C33A61-1A79-E04A-E3DB-152CB9AA07C4}"/>
+              </a:ext>
+            </a:extLst>
+          </p:cNvPr>
+          <p:cNvSpPr/>
+          <p:nvPr/>
+        </p:nvSpPr>
+        <p:spPr>
+          <a:xfrm rot="5400000">
+            <a:off x="7592651" y="3667146"/>
+            <a:ext cx="432607" cy="668295"/>
+          </a:xfrm>
+          <a:prstGeom prst="bentUpArrow">
+            <a:avLst/>
+          </a:prstGeom>
+        </p:spPr>
+        <p:style>
+          <a:lnRef idx="2">
+            <a:schemeClr val="accent1">
+              <a:shade val="15000"/>
+            </a:schemeClr>
+          </a:lnRef>
+          <a:fillRef idx="1">
+            <a:schemeClr val="accent1"/>
+          </a:fillRef>
+          <a:effectRef idx="0">
+            <a:schemeClr val="accent1"/>
+          </a:effectRef>
+          <a:fontRef idx="minor">
+            <a:schemeClr val="lt1"/>
+          </a:fontRef>
+        </p:style>
+        <p:txBody>
+          <a:bodyPr rtlCol="0" anchor="ctr"/>
+          <a:lstStyle/>
+          <a:p>
+            <a:pPr algn="ctr"/>
+            <a:endParaRPr lang="de-DE" dirty="0"/>
           </a:p>
         </p:txBody>
       </p:sp>
@@ -3906,6 +4342,7 @@
           <a:lstStyle/>
           <a:p>
             <a:r>
+              <a:rPr dirty="0"/>
               <a:t>Proof of Concept: BS-KI (Switzerland)</a:t>
             </a:r>
           </a:p>
@@ -3923,56 +4360,90 @@
         </p:nvSpPr>
         <p:spPr/>
         <p:txBody>
-          <a:bodyPr/>
-          <a:lstStyle/>
-          <a:p>
-            <a:r>
-              <a:t>Branchenstandard Kundeninformation</a:t>
-            </a:r>
-          </a:p>
-          <a:p>
-            <a:r>
+          <a:bodyPr>
+            <a:normAutofit fontScale="85000" lnSpcReduction="20000"/>
+          </a:bodyPr>
+          <a:lstStyle/>
+          <a:p>
+            <a:pPr marL="0" indent="0">
+              <a:buNone/>
+            </a:pPr>
+            <a:r>
+              <a:rPr dirty="0" err="1"/>
+              <a:t>Branchenstandard</a:t>
+            </a:r>
+            <a:r>
+              <a:rPr dirty="0"/>
+              <a:t> </a:t>
+            </a:r>
+            <a:r>
+              <a:rPr dirty="0" err="1"/>
+              <a:t>Kundeninformation</a:t>
+            </a:r>
+            <a:endParaRPr dirty="0"/>
+          </a:p>
+          <a:p>
+            <a:r>
+              <a:rPr dirty="0"/>
               <a:t>44 rules × 6 channels × 4 transport modes</a:t>
             </a:r>
-          </a:p>
-          <a:p>
-            <a:endParaRPr/>
-          </a:p>
-          <a:p>
-            <a:r>
+            <a:endParaRPr lang="de-DE" dirty="0"/>
+          </a:p>
+          <a:p>
+            <a:endParaRPr dirty="0"/>
+          </a:p>
+          <a:p>
+            <a:pPr marL="0" indent="0">
+              <a:buNone/>
+            </a:pPr>
+            <a:r>
+              <a:rPr dirty="0"/>
               <a:t>What we did:</a:t>
             </a:r>
-          </a:p>
-          <a:p>
-            <a:r>
-              <a:t>• Excel matrix → parsed deterministically</a:t>
-            </a:r>
-          </a:p>
-          <a:p>
-            <a:r>
-              <a:t>• PDF (64 pages) → chapter-level text extraction</a:t>
-            </a:r>
-          </a:p>
-          <a:p>
-            <a:r>
-              <a:t>• Combined → one OSCAL Catalog YAML</a:t>
-            </a:r>
-          </a:p>
-          <a:p>
-            <a:r>
-              <a:t>• Validated against NIST JSON Schema ✅</a:t>
-            </a:r>
-          </a:p>
-          <a:p>
-            <a:endParaRPr/>
-          </a:p>
-          <a:p>
-            <a:r>
+            <a:endParaRPr lang="de-DE" dirty="0"/>
+          </a:p>
+          <a:p>
+            <a:r>
+              <a:rPr dirty="0"/>
+              <a:t>Excel matrix → parsed deterministically</a:t>
+            </a:r>
+          </a:p>
+          <a:p>
+            <a:r>
+              <a:rPr dirty="0"/>
+              <a:t>PDF (64 pages) → chapter-level text extraction</a:t>
+            </a:r>
+          </a:p>
+          <a:p>
+            <a:r>
+              <a:rPr dirty="0"/>
+              <a:t>Combined → one OSCAL Catalog YAML</a:t>
+            </a:r>
+          </a:p>
+          <a:p>
+            <a:r>
+              <a:rPr dirty="0"/>
+              <a:t>Validated against NIST JSON Schema ✅</a:t>
+            </a:r>
+          </a:p>
+          <a:p>
+            <a:endParaRPr dirty="0"/>
+          </a:p>
+          <a:p>
+            <a:pPr marL="0" indent="0">
+              <a:buNone/>
+            </a:pPr>
+            <a:r>
+              <a:rPr dirty="0"/>
               <a:t>What changed between 2024 and 2025?</a:t>
             </a:r>
           </a:p>
           <a:p>
-            <a:r>
+            <a:pPr marL="0" indent="0">
+              <a:buNone/>
+            </a:pPr>
+            <a:r>
+              <a:rPr dirty="0"/>
               <a:t>→ git diff. Done.</a:t>
             </a:r>
           </a:p>
@@ -4019,6 +4490,7 @@
           <a:lstStyle/>
           <a:p>
             <a:r>
+              <a:rPr dirty="0"/>
               <a:t>Versioning &amp; History</a:t>
             </a:r>
           </a:p>
@@ -4036,47 +4508,113 @@
         </p:nvSpPr>
         <p:spPr/>
         <p:txBody>
-          <a:bodyPr/>
-          <a:lstStyle/>
-          <a:p>
-            <a:r>
-              <a:t>Because it's in Git:</a:t>
-            </a:r>
-          </a:p>
-          <a:p>
-            <a:endParaRPr/>
-          </a:p>
-          <a:p>
-            <a:r>
-              <a:t>• Full version history of every rule</a:t>
-            </a:r>
-          </a:p>
-          <a:p>
-            <a:r>
-              <a:t>• Diff: what changed, when, by whom</a:t>
-            </a:r>
-          </a:p>
-          <a:p>
-            <a:r>
-              <a:t>• Rollback: revert to any previous state</a:t>
-            </a:r>
-          </a:p>
-          <a:p>
-            <a:r>
-              <a:t>• Audit trail: who approved what</a:t>
-            </a:r>
-          </a:p>
-          <a:p>
-            <a:endParaRPr/>
-          </a:p>
-          <a:p>
-            <a:r>
+          <a:bodyPr>
+            <a:normAutofit lnSpcReduction="10000"/>
+          </a:bodyPr>
+          <a:lstStyle/>
+          <a:p>
+            <a:r>
+              <a:rPr dirty="0"/>
+              <a:t>Because it's in Git</a:t>
+            </a:r>
+            <a:r>
+              <a:rPr lang="de-DE" dirty="0"/>
+              <a:t> and </a:t>
+            </a:r>
+            <a:r>
+              <a:rPr lang="de-DE" dirty="0" err="1"/>
+              <a:t>Json</a:t>
+            </a:r>
+            <a:r>
+              <a:rPr lang="de-DE" dirty="0"/>
+              <a:t>/Schema</a:t>
+            </a:r>
+            <a:r>
+              <a:rPr dirty="0"/>
+              <a:t>:</a:t>
+            </a:r>
+          </a:p>
+          <a:p>
+            <a:endParaRPr dirty="0"/>
+          </a:p>
+          <a:p>
+            <a:r>
+              <a:rPr dirty="0"/>
+              <a:t>Full version history of every rule</a:t>
+            </a:r>
+          </a:p>
+          <a:p>
+            <a:r>
+              <a:rPr dirty="0"/>
+              <a:t>Diff: what changed, when, by whom</a:t>
+            </a:r>
+          </a:p>
+          <a:p>
+            <a:r>
+              <a:rPr dirty="0"/>
+              <a:t>Rollback: revert to any previous state</a:t>
+            </a:r>
+          </a:p>
+          <a:p>
+            <a:r>
+              <a:rPr dirty="0"/>
+              <a:t>Audit trail: who approved what</a:t>
+            </a:r>
+          </a:p>
+          <a:p>
+            <a:endParaRPr dirty="0"/>
+          </a:p>
+          <a:p>
+            <a:pPr marL="0" indent="0">
+              <a:buNone/>
+            </a:pPr>
+            <a:r>
+              <a:rPr dirty="0"/>
               <a:t>No more: "Which version is current?"</a:t>
             </a:r>
           </a:p>
           <a:p>
-            <a:r>
+            <a:pPr marL="0" indent="0">
+              <a:buNone/>
+            </a:pPr>
+            <a:r>
+              <a:rPr dirty="0"/>
               <a:t>No more: "What exactly changed in §4.2?"</a:t>
+            </a:r>
+          </a:p>
+        </p:txBody>
+      </p:sp>
+      <p:sp>
+        <p:nvSpPr>
+          <p:cNvPr id="4" name="TextBox 3">
+            <a:extLst>
+              <a:ext uri="{FF2B5EF4-FFF2-40B4-BE49-F238E27FC236}">
+                <a16:creationId xmlns:a16="http://schemas.microsoft.com/office/drawing/2014/main" id="{3B27477D-692D-FE66-949F-8A575977F1B0}"/>
+              </a:ext>
+            </a:extLst>
+          </p:cNvPr>
+          <p:cNvSpPr txBox="1"/>
+          <p:nvPr/>
+        </p:nvSpPr>
+        <p:spPr>
+          <a:xfrm>
+            <a:off x="8530936" y="4073236"/>
+            <a:ext cx="1662546" cy="1477328"/>
+          </a:xfrm>
+          <a:prstGeom prst="rect">
+            <a:avLst/>
+          </a:prstGeom>
+          <a:noFill/>
+        </p:spPr>
+        <p:txBody>
+          <a:bodyPr wrap="square" rtlCol="0">
+            <a:spAutoFit/>
+          </a:bodyPr>
+          <a:lstStyle/>
+          <a:p>
+            <a:r>
+              <a:rPr lang="de-DE" dirty="0"/>
+              <a:t>Mensch mit Fragezeichen auf Kopf und Paragrafenzeichen</a:t>
             </a:r>
           </a:p>
         </p:txBody>
@@ -4137,65 +4675,241 @@
             <p:ph idx="1"/>
           </p:nvPr>
         </p:nvSpPr>
-        <p:spPr/>
-        <p:txBody>
-          <a:bodyPr/>
-          <a:lstStyle/>
-          <a:p>
-            <a:r>
+        <p:spPr>
+          <a:xfrm>
+            <a:off x="838200" y="1825625"/>
+            <a:ext cx="10515600" cy="3611348"/>
+          </a:xfrm>
+        </p:spPr>
+        <p:txBody>
+          <a:bodyPr>
+            <a:normAutofit fontScale="77500" lnSpcReduction="20000"/>
+          </a:bodyPr>
+          <a:lstStyle/>
+          <a:p>
+            <a:pPr marL="0" indent="0">
+              <a:buNone/>
+            </a:pPr>
+            <a:r>
+              <a:rPr dirty="0"/>
               <a:t>1. Start with IT/ITS regulations</a:t>
             </a:r>
-          </a:p>
-          <a:p>
-            <a:r>
-              <a:t>   (already structured, digital-native)</a:t>
-            </a:r>
-          </a:p>
-          <a:p>
-            <a:endParaRPr/>
-          </a:p>
-          <a:p>
-            <a:r>
+            <a:r>
+              <a:rPr lang="de-DE" dirty="0"/>
+              <a:t> </a:t>
+            </a:r>
+            <a:r>
+              <a:rPr dirty="0"/>
+              <a:t>(already structured, digital-native)</a:t>
+            </a:r>
+            <a:endParaRPr lang="de-DE" dirty="0"/>
+          </a:p>
+          <a:p>
+            <a:pPr marL="0" indent="0">
+              <a:buNone/>
+            </a:pPr>
+            <a:r>
+              <a:rPr lang="de-DE" dirty="0"/>
+              <a:t>	- </a:t>
+            </a:r>
+            <a:r>
+              <a:rPr lang="de-DE" dirty="0" err="1"/>
+              <a:t>Verify</a:t>
+            </a:r>
+            <a:r>
+              <a:rPr lang="de-DE" dirty="0"/>
+              <a:t> </a:t>
+            </a:r>
+            <a:r>
+              <a:rPr lang="de-DE" dirty="0" err="1"/>
+              <a:t>automated</a:t>
+            </a:r>
+            <a:r>
+              <a:rPr lang="de-DE" dirty="0"/>
+              <a:t> </a:t>
+            </a:r>
+            <a:r>
+              <a:rPr lang="de-DE" dirty="0" err="1"/>
+              <a:t>creation</a:t>
+            </a:r>
+            <a:r>
+              <a:rPr lang="de-DE" dirty="0"/>
+              <a:t> </a:t>
+            </a:r>
+            <a:r>
+              <a:rPr lang="de-DE" dirty="0" err="1"/>
+              <a:t>of</a:t>
+            </a:r>
+            <a:r>
+              <a:rPr lang="de-DE" dirty="0"/>
+              <a:t> </a:t>
+            </a:r>
+            <a:r>
+              <a:rPr lang="de-DE" dirty="0" err="1"/>
+              <a:t>schemata</a:t>
+            </a:r>
+            <a:r>
+              <a:rPr lang="de-DE" dirty="0"/>
+              <a:t> </a:t>
+            </a:r>
+            <a:r>
+              <a:rPr lang="de-DE" dirty="0" err="1"/>
+              <a:t>with</a:t>
+            </a:r>
+            <a:r>
+              <a:rPr lang="de-DE" dirty="0"/>
+              <a:t> </a:t>
+            </a:r>
+            <a:r>
+              <a:rPr lang="de-DE" dirty="0" err="1"/>
+              <a:t>governance</a:t>
+            </a:r>
+            <a:r>
+              <a:rPr lang="de-DE" dirty="0"/>
+              <a:t> </a:t>
+            </a:r>
+            <a:r>
+              <a:rPr lang="de-DE" dirty="0" err="1"/>
+              <a:t>owners</a:t>
+            </a:r>
+            <a:endParaRPr dirty="0"/>
+          </a:p>
+          <a:p>
+            <a:endParaRPr dirty="0"/>
+          </a:p>
+          <a:p>
+            <a:pPr marL="0" indent="0">
+              <a:buNone/>
+            </a:pPr>
+            <a:r>
+              <a:rPr dirty="0"/>
               <a:t>2. Web editor that behaves like Word</a:t>
             </a:r>
-          </a:p>
-          <a:p>
-            <a:r>
-              <a:t>   (low learning curve for governance owners)</a:t>
-            </a:r>
-          </a:p>
-          <a:p>
-            <a:endParaRPr/>
-          </a:p>
-          <a:p>
-            <a:r>
-              <a:t>3. Import existing governance documents</a:t>
-            </a:r>
-          </a:p>
-          <a:p>
-            <a:r>
-              <a:t>   → validate → publish as OSCAL</a:t>
-            </a:r>
-          </a:p>
-          <a:p>
-            <a:endParaRPr/>
-          </a:p>
-          <a:p>
-            <a:r>
+            <a:r>
+              <a:rPr lang="de-DE" dirty="0"/>
+              <a:t> </a:t>
+            </a:r>
+            <a:r>
+              <a:rPr dirty="0"/>
+              <a:t>(low learning curve for </a:t>
+            </a:r>
+            <a:r>
+              <a:rPr lang="de-DE" dirty="0"/>
+              <a:t>non </a:t>
+            </a:r>
+            <a:r>
+              <a:rPr lang="de-DE" dirty="0" err="1"/>
+              <a:t>technical</a:t>
+            </a:r>
+            <a:r>
+              <a:rPr lang="de-DE" dirty="0"/>
+              <a:t> </a:t>
+            </a:r>
+            <a:r>
+              <a:rPr dirty="0"/>
+              <a:t>governance owners)</a:t>
+            </a:r>
+          </a:p>
+          <a:p>
+            <a:endParaRPr dirty="0"/>
+          </a:p>
+          <a:p>
+            <a:pPr marL="0" indent="0">
+              <a:buNone/>
+            </a:pPr>
+            <a:r>
+              <a:rPr lang="de-DE" dirty="0"/>
+              <a:t>3.</a:t>
+            </a:r>
+            <a:r>
+              <a:rPr dirty="0"/>
+              <a:t> Import existing governance documents</a:t>
+            </a:r>
+            <a:endParaRPr lang="de-DE" dirty="0"/>
+          </a:p>
+          <a:p>
+            <a:pPr marL="0" indent="0">
+              <a:buNone/>
+            </a:pPr>
+            <a:r>
+              <a:rPr lang="de-DE" dirty="0"/>
+              <a:t>	</a:t>
+            </a:r>
+            <a:r>
+              <a:rPr dirty="0"/>
+              <a:t>→ validate → publish as OSCAL</a:t>
+            </a:r>
+          </a:p>
+          <a:p>
+            <a:endParaRPr dirty="0"/>
+          </a:p>
+          <a:p>
+            <a:pPr marL="0" indent="0">
+              <a:buNone/>
+            </a:pPr>
+            <a:r>
+              <a:rPr dirty="0"/>
               <a:t>4. Expand: safety regulations, cross-border (TSI),</a:t>
             </a:r>
-          </a:p>
-          <a:p>
-            <a:r>
-              <a:t>   operational rules</a:t>
-            </a:r>
-          </a:p>
-          <a:p>
-            <a:endParaRPr/>
-          </a:p>
-          <a:p>
-            <a:r>
+            <a:r>
+              <a:rPr lang="de-DE" dirty="0"/>
+              <a:t> </a:t>
+            </a:r>
+            <a:r>
+              <a:rPr dirty="0"/>
+              <a:t>operational rules</a:t>
+            </a:r>
+          </a:p>
+          <a:p>
+            <a:endParaRPr dirty="0"/>
+          </a:p>
+          <a:p>
+            <a:pPr marL="0" indent="0" algn="ctr">
+              <a:buNone/>
+            </a:pPr>
+            <a:endParaRPr sz="3600" dirty="0"/>
+          </a:p>
+        </p:txBody>
+      </p:sp>
+      <p:sp>
+        <p:nvSpPr>
+          <p:cNvPr id="4" name="TextBox 3">
+            <a:extLst>
+              <a:ext uri="{FF2B5EF4-FFF2-40B4-BE49-F238E27FC236}">
+                <a16:creationId xmlns:a16="http://schemas.microsoft.com/office/drawing/2014/main" id="{646D0452-0439-E6B7-5E7E-A087D02FF2EA}"/>
+              </a:ext>
+            </a:extLst>
+          </p:cNvPr>
+          <p:cNvSpPr txBox="1"/>
+          <p:nvPr/>
+        </p:nvSpPr>
+        <p:spPr>
+          <a:xfrm>
+            <a:off x="976184" y="5436973"/>
+            <a:ext cx="9848335" cy="954107"/>
+          </a:xfrm>
+          <a:prstGeom prst="rect">
+            <a:avLst/>
+          </a:prstGeom>
+          <a:noFill/>
+        </p:spPr>
+        <p:txBody>
+          <a:bodyPr wrap="square" rtlCol="0">
+            <a:spAutoFit/>
+          </a:bodyPr>
+          <a:lstStyle/>
+          <a:p>
+            <a:pPr algn="ctr"/>
+            <a:r>
+              <a:rPr lang="en-GB" sz="2800" dirty="0"/>
               <a:t>Little change in workflow. Massive gain in usability.</a:t>
+            </a:r>
+          </a:p>
+          <a:p>
+            <a:pPr algn="ctr"/>
+            <a:r>
+              <a:rPr lang="en-GB" sz="2800" dirty="0"/>
+              <a:t>→ Cross-railway interoperability (DB / SBB / ÖBB / SCNF / …)</a:t>
             </a:r>
           </a:p>
         </p:txBody>
@@ -4209,7 +4923,7 @@
 </file>
 
 <file path=ppt/slides/slide8.xml><?xml version="1.0" encoding="utf-8"?>
-<p:sld xmlns:a="http://schemas.openxmlformats.org/drawingml/2006/main" xmlns:r="http://schemas.openxmlformats.org/officeDocument/2006/relationships" xmlns:p="http://schemas.openxmlformats.org/presentationml/2006/main">
+<p:sld xmlns:a="http://schemas.openxmlformats.org/drawingml/2006/main" xmlns:r="http://schemas.openxmlformats.org/officeDocument/2006/relationships" xmlns:p="http://schemas.openxmlformats.org/presentationml/2006/main" show="0">
   <p:cSld>
     <p:spTree>
       <p:nvGrpSpPr>
@@ -4258,61 +4972,67 @@
         </p:nvSpPr>
         <p:spPr/>
         <p:txBody>
-          <a:bodyPr/>
-          <a:lstStyle/>
-          <a:p>
-            <a:r>
+          <a:bodyPr>
+            <a:normAutofit fontScale="85000" lnSpcReduction="20000"/>
+          </a:bodyPr>
+          <a:lstStyle/>
+          <a:p>
+            <a:r>
+              <a:rPr dirty="0"/>
               <a:t>┌──────────────┐     ┌─────────────┐     ┌──────────────┐</a:t>
             </a:r>
           </a:p>
           <a:p>
             <a:r>
+              <a:rPr dirty="0"/>
               <a:t>│ Web Editor   │ ──► │ OSCAL4Rail  │ ──► │ PDF (view)   │</a:t>
             </a:r>
           </a:p>
           <a:p>
             <a:r>
+              <a:rPr dirty="0"/>
               <a:t>│ (looks like  │     │ (canonical  │     │ API (machine)│</a:t>
             </a:r>
           </a:p>
           <a:p>
             <a:r>
+              <a:rPr dirty="0"/>
               <a:t>│  Word)       │     │  source)    │     │ Diff/Change  │</a:t>
             </a:r>
           </a:p>
           <a:p>
             <a:r>
+              <a:rPr dirty="0"/>
               <a:t>└──────────────┘     └─────────────┘     └──────────────┘</a:t>
             </a:r>
           </a:p>
           <a:p>
-            <a:endParaRPr/>
-          </a:p>
-          <a:p>
-            <a:r>
+            <a:endParaRPr dirty="0"/>
+          </a:p>
+          <a:p>
+            <a:r>
+              <a:rPr dirty="0"/>
               <a:t>Governance owners keep writing like they always have.</a:t>
             </a:r>
           </a:p>
           <a:p>
             <a:r>
+              <a:rPr dirty="0"/>
               <a:t>But the output is structured, versioned, machine-readable.</a:t>
             </a:r>
           </a:p>
           <a:p>
-            <a:endParaRPr/>
-          </a:p>
-          <a:p>
-            <a:r>
-              <a:t>→ Cross-railway interoperability (DB / SBB / ÖBB)</a:t>
-            </a:r>
-          </a:p>
-          <a:p>
-            <a:r>
+            <a:endParaRPr dirty="0"/>
+          </a:p>
+          <a:p>
+            <a:r>
+              <a:rPr dirty="0"/>
               <a:t>→ Automated compliance checks</a:t>
             </a:r>
           </a:p>
           <a:p>
             <a:r>
+              <a:rPr dirty="0"/>
               <a:t>→ Bridge to ACA: contracts validated against regulations</a:t>
             </a:r>
           </a:p>
@@ -4355,7 +5075,7 @@
         </p:nvSpPr>
         <p:spPr/>
         <p:txBody>
-          <a:bodyPr/>
+          <a:bodyPr anchor="t"/>
           <a:lstStyle/>
           <a:p>
             <a:r>
@@ -4375,9 +5095,16 @@
             <p:ph type="subTitle" idx="1"/>
           </p:nvPr>
         </p:nvSpPr>
-        <p:spPr/>
-        <p:txBody>
-          <a:bodyPr/>
+        <p:spPr>
+          <a:xfrm>
+            <a:off x="1731818" y="2601119"/>
+            <a:ext cx="9144000" cy="3134518"/>
+          </a:xfrm>
+        </p:spPr>
+        <p:txBody>
+          <a:bodyPr>
+            <a:normAutofit lnSpcReduction="10000"/>
+          </a:bodyPr>
           <a:lstStyle/>
           <a:p>
             <a:r>
@@ -4741,6 +5468,27 @@
 </file>
 
 <file path=customXml/item1.xml><?xml version="1.0" encoding="utf-8"?>
+<?mso-contentType ?>
+<FormTemplates xmlns="http://schemas.microsoft.com/sharepoint/v3/contenttype/forms">
+  <Display>DocumentLibraryForm</Display>
+  <Edit>DocumentLibraryForm</Edit>
+  <New>DocumentLibraryForm</New>
+</FormTemplates>
+</file>
+
+<file path=customXml/item2.xml><?xml version="1.0" encoding="utf-8"?>
+<p:properties xmlns:p="http://schemas.microsoft.com/office/2006/metadata/properties" xmlns:xsi="http://www.w3.org/2001/XMLSchema-instance" xmlns:pc="http://schemas.microsoft.com/office/infopath/2007/PartnerControls">
+  <documentManagement>
+    <Copyright xmlns="b106c448-c3d1-41cc-8fd9-3acb307364b4" xsi:nil="true"/>
+    <lcf76f155ced4ddcb4097134ff3c332f xmlns="b106c448-c3d1-41cc-8fd9-3acb307364b4">
+      <Terms xmlns="http://schemas.microsoft.com/office/infopath/2007/PartnerControls"/>
+    </lcf76f155ced4ddcb4097134ff3c332f>
+    <TaxCatchAll xmlns="b043894e-b4c8-44d0-9690-d7947297ac19" xsi:nil="true"/>
+  </documentManagement>
+</p:properties>
+</file>
+
+<file path=customXml/item3.xml><?xml version="1.0" encoding="utf-8"?>
 <ct:contentTypeSchema xmlns:ct="http://schemas.microsoft.com/office/2006/metadata/contentType" xmlns:ma="http://schemas.microsoft.com/office/2006/metadata/properties/metaAttributes" ct:_="" ma:_="" ma:contentTypeName="Dokument" ma:contentTypeID="0x010100C5895299445B8C4DB378BBB718B1F939" ma:contentTypeVersion="18" ma:contentTypeDescription="Ein neues Dokument erstellen." ma:contentTypeScope="" ma:versionID="ca18c32604eb9eb075bdd5b520f76d7f">
   <xsd:schema xmlns:xsd="http://www.w3.org/2001/XMLSchema" xmlns:xs="http://www.w3.org/2001/XMLSchema" xmlns:p="http://schemas.microsoft.com/office/2006/metadata/properties" xmlns:ns2="b106c448-c3d1-41cc-8fd9-3acb307364b4" xmlns:ns3="b043894e-b4c8-44d0-9690-d7947297ac19" targetNamespace="http://schemas.microsoft.com/office/2006/metadata/properties" ma:root="true" ma:fieldsID="0e0a0918b2fa3636e306fde1bc5c258b" ns2:_="" ns3:_="">
     <xsd:import namespace="b106c448-c3d1-41cc-8fd9-3acb307364b4"/>
@@ -4985,42 +5733,10 @@
 </ct:contentTypeSchema>
 </file>
 
-<file path=customXml/item2.xml><?xml version="1.0" encoding="utf-8"?>
-<p:properties xmlns:p="http://schemas.microsoft.com/office/2006/metadata/properties" xmlns:xsi="http://www.w3.org/2001/XMLSchema-instance" xmlns:pc="http://schemas.microsoft.com/office/infopath/2007/PartnerControls">
-  <documentManagement>
-    <Copyright xmlns="b106c448-c3d1-41cc-8fd9-3acb307364b4" xsi:nil="true"/>
-    <lcf76f155ced4ddcb4097134ff3c332f xmlns="b106c448-c3d1-41cc-8fd9-3acb307364b4">
-      <Terms xmlns="http://schemas.microsoft.com/office/infopath/2007/PartnerControls"/>
-    </lcf76f155ced4ddcb4097134ff3c332f>
-    <TaxCatchAll xmlns="b043894e-b4c8-44d0-9690-d7947297ac19" xsi:nil="true"/>
-  </documentManagement>
-</p:properties>
-</file>
-
-<file path=customXml/item3.xml><?xml version="1.0" encoding="utf-8"?>
-<?mso-contentType ?>
-<FormTemplates xmlns="http://schemas.microsoft.com/sharepoint/v3/contenttype/forms">
-  <Display>DocumentLibraryForm</Display>
-  <Edit>DocumentLibraryForm</Edit>
-  <New>DocumentLibraryForm</New>
-</FormTemplates>
-</file>
-
 <file path=customXml/itemProps1.xml><?xml version="1.0" encoding="utf-8"?>
-<ds:datastoreItem xmlns:ds="http://schemas.openxmlformats.org/officeDocument/2006/customXml" ds:itemID="{0BED3A9D-D1E4-45EA-8B49-CB6F60C2A98A}">
+<ds:datastoreItem xmlns:ds="http://schemas.openxmlformats.org/officeDocument/2006/customXml" ds:itemID="{47CF5FD6-43E2-4C9A-9372-C9D60EE1772B}">
   <ds:schemaRefs>
-    <ds:schemaRef ds:uri="http://schemas.microsoft.com/office/2006/metadata/contentType"/>
-    <ds:schemaRef ds:uri="http://schemas.microsoft.com/office/2006/metadata/properties/metaAttributes"/>
-    <ds:schemaRef ds:uri="http://www.w3.org/2001/XMLSchema"/>
-    <ds:schemaRef ds:uri="http://schemas.microsoft.com/office/2006/metadata/properties"/>
-    <ds:schemaRef ds:uri="b106c448-c3d1-41cc-8fd9-3acb307364b4"/>
-    <ds:schemaRef ds:uri="b043894e-b4c8-44d0-9690-d7947297ac19"/>
-    <ds:schemaRef ds:uri="http://schemas.microsoft.com/office/2006/documentManagement/types"/>
-    <ds:schemaRef ds:uri="http://schemas.microsoft.com/office/infopath/2007/PartnerControls"/>
-    <ds:schemaRef ds:uri="http://schemas.openxmlformats.org/package/2006/metadata/core-properties"/>
-    <ds:schemaRef ds:uri="http://purl.org/dc/elements/1.1/"/>
-    <ds:schemaRef ds:uri="http://purl.org/dc/terms/"/>
-    <ds:schemaRef ds:uri="http://schemas.microsoft.com/internal/obd"/>
+    <ds:schemaRef ds:uri="http://schemas.microsoft.com/sharepoint/v3/contenttype/forms"/>
   </ds:schemaRefs>
 </ds:datastoreItem>
 </file>
@@ -5043,9 +5759,20 @@
 </file>
 
 <file path=customXml/itemProps3.xml><?xml version="1.0" encoding="utf-8"?>
-<ds:datastoreItem xmlns:ds="http://schemas.openxmlformats.org/officeDocument/2006/customXml" ds:itemID="{47CF5FD6-43E2-4C9A-9372-C9D60EE1772B}">
+<ds:datastoreItem xmlns:ds="http://schemas.openxmlformats.org/officeDocument/2006/customXml" ds:itemID="{0BED3A9D-D1E4-45EA-8B49-CB6F60C2A98A}">
   <ds:schemaRefs>
-    <ds:schemaRef ds:uri="http://schemas.microsoft.com/sharepoint/v3/contenttype/forms"/>
+    <ds:schemaRef ds:uri="http://schemas.microsoft.com/office/2006/metadata/contentType"/>
+    <ds:schemaRef ds:uri="http://schemas.microsoft.com/office/2006/metadata/properties/metaAttributes"/>
+    <ds:schemaRef ds:uri="http://www.w3.org/2001/XMLSchema"/>
+    <ds:schemaRef ds:uri="http://schemas.microsoft.com/office/2006/metadata/properties"/>
+    <ds:schemaRef ds:uri="b106c448-c3d1-41cc-8fd9-3acb307364b4"/>
+    <ds:schemaRef ds:uri="b043894e-b4c8-44d0-9690-d7947297ac19"/>
+    <ds:schemaRef ds:uri="http://schemas.microsoft.com/office/2006/documentManagement/types"/>
+    <ds:schemaRef ds:uri="http://schemas.microsoft.com/office/infopath/2007/PartnerControls"/>
+    <ds:schemaRef ds:uri="http://schemas.openxmlformats.org/package/2006/metadata/core-properties"/>
+    <ds:schemaRef ds:uri="http://purl.org/dc/elements/1.1/"/>
+    <ds:schemaRef ds:uri="http://purl.org/dc/terms/"/>
+    <ds:schemaRef ds:uri="http://schemas.microsoft.com/internal/obd"/>
   </ds:schemaRefs>
 </ds:datastoreItem>
 </file>

--- a/whomakestherules/A38_H4R2026_Ch7.pptx
+++ b/whomakestherules/A38_H4R2026_Ch7.pptx
@@ -323,7 +323,7 @@
           <a:p>
             <a:fld id="{47371D93-8784-4C02-8B2C-86355AB378F9}" type="slidenum">
               <a:rPr lang="de-DE" smtClean="0"/>
-              <a:t>‹#›</a:t>
+              <a:t>‹Nr.›</a:t>
             </a:fld>
             <a:endParaRPr lang="de-DE"/>
           </a:p>
@@ -523,7 +523,7 @@
           <a:p>
             <a:fld id="{47371D93-8784-4C02-8B2C-86355AB378F9}" type="slidenum">
               <a:rPr lang="de-DE" smtClean="0"/>
-              <a:t>‹#›</a:t>
+              <a:t>‹Nr.›</a:t>
             </a:fld>
             <a:endParaRPr lang="de-DE"/>
           </a:p>
@@ -733,7 +733,7 @@
           <a:p>
             <a:fld id="{47371D93-8784-4C02-8B2C-86355AB378F9}" type="slidenum">
               <a:rPr lang="de-DE" smtClean="0"/>
-              <a:t>‹#›</a:t>
+              <a:t>‹Nr.›</a:t>
             </a:fld>
             <a:endParaRPr lang="de-DE"/>
           </a:p>
@@ -933,7 +933,7 @@
           <a:p>
             <a:fld id="{47371D93-8784-4C02-8B2C-86355AB378F9}" type="slidenum">
               <a:rPr lang="de-DE" smtClean="0"/>
-              <a:t>‹#›</a:t>
+              <a:t>‹Nr.›</a:t>
             </a:fld>
             <a:endParaRPr lang="de-DE"/>
           </a:p>
@@ -1209,7 +1209,7 @@
           <a:p>
             <a:fld id="{47371D93-8784-4C02-8B2C-86355AB378F9}" type="slidenum">
               <a:rPr lang="de-DE" smtClean="0"/>
-              <a:t>‹#›</a:t>
+              <a:t>‹Nr.›</a:t>
             </a:fld>
             <a:endParaRPr lang="de-DE"/>
           </a:p>
@@ -1477,7 +1477,7 @@
           <a:p>
             <a:fld id="{47371D93-8784-4C02-8B2C-86355AB378F9}" type="slidenum">
               <a:rPr lang="de-DE" smtClean="0"/>
-              <a:t>‹#›</a:t>
+              <a:t>‹Nr.›</a:t>
             </a:fld>
             <a:endParaRPr lang="de-DE"/>
           </a:p>
@@ -1892,7 +1892,7 @@
           <a:p>
             <a:fld id="{47371D93-8784-4C02-8B2C-86355AB378F9}" type="slidenum">
               <a:rPr lang="de-DE" smtClean="0"/>
-              <a:t>‹#›</a:t>
+              <a:t>‹Nr.›</a:t>
             </a:fld>
             <a:endParaRPr lang="de-DE"/>
           </a:p>
@@ -2034,7 +2034,7 @@
           <a:p>
             <a:fld id="{47371D93-8784-4C02-8B2C-86355AB378F9}" type="slidenum">
               <a:rPr lang="de-DE" smtClean="0"/>
-              <a:t>‹#›</a:t>
+              <a:t>‹Nr.›</a:t>
             </a:fld>
             <a:endParaRPr lang="de-DE"/>
           </a:p>
@@ -2147,7 +2147,7 @@
           <a:p>
             <a:fld id="{47371D93-8784-4C02-8B2C-86355AB378F9}" type="slidenum">
               <a:rPr lang="de-DE" smtClean="0"/>
-              <a:t>‹#›</a:t>
+              <a:t>‹Nr.›</a:t>
             </a:fld>
             <a:endParaRPr lang="de-DE"/>
           </a:p>
@@ -2460,7 +2460,7 @@
           <a:p>
             <a:fld id="{47371D93-8784-4C02-8B2C-86355AB378F9}" type="slidenum">
               <a:rPr lang="de-DE" smtClean="0"/>
-              <a:t>‹#›</a:t>
+              <a:t>‹Nr.›</a:t>
             </a:fld>
             <a:endParaRPr lang="de-DE"/>
           </a:p>
@@ -2753,7 +2753,7 @@
           <a:p>
             <a:fld id="{47371D93-8784-4C02-8B2C-86355AB378F9}" type="slidenum">
               <a:rPr lang="de-DE" smtClean="0"/>
-              <a:t>‹#›</a:t>
+              <a:t>‹Nr.›</a:t>
             </a:fld>
             <a:endParaRPr lang="de-DE"/>
           </a:p>
@@ -3030,58 +3030,9 @@
           <a:p>
             <a:fld id="{47371D93-8784-4C02-8B2C-86355AB378F9}" type="slidenum">
               <a:rPr lang="de-DE" smtClean="0"/>
-              <a:t>‹#›</a:t>
+              <a:t>‹Nr.›</a:t>
             </a:fld>
             <a:endParaRPr lang="de-DE"/>
-          </a:p>
-        </p:txBody>
-      </p:sp>
-      <p:sp>
-        <p:nvSpPr>
-          <p:cNvPr id="9" name="Textfeld 8">
-            <a:extLst>
-              <a:ext uri="{FF2B5EF4-FFF2-40B4-BE49-F238E27FC236}">
-                <a16:creationId xmlns:a16="http://schemas.microsoft.com/office/drawing/2014/main" id="{3D258550-D773-9960-BD4F-07D9A5241D57}"/>
-              </a:ext>
-            </a:extLst>
-          </p:cNvPr>
-          <p:cNvSpPr txBox="1"/>
-          <p:nvPr userDrawn="1">
-            <p:extLst>
-              <p:ext uri="{1162E1C5-73C7-4A58-AE30-91384D911F3F}">
-                <p184:classification xmlns:p184="http://schemas.microsoft.com/office/powerpoint/2018/4/main" val="ftr"/>
-              </p:ext>
-            </p:extLst>
-          </p:nvPr>
-        </p:nvSpPr>
-        <p:spPr>
-          <a:xfrm>
-            <a:off x="63500" y="6642100"/>
-            <a:ext cx="1384300" cy="152400"/>
-          </a:xfrm>
-          <a:prstGeom prst="rect">
-            <a:avLst/>
-          </a:prstGeom>
-        </p:spPr>
-        <p:txBody>
-          <a:bodyPr horzOverflow="overflow" lIns="0" tIns="0" rIns="0" bIns="0">
-            <a:spAutoFit/>
-          </a:bodyPr>
-          <a:lstStyle/>
-          <a:p>
-            <a:pPr algn="l"/>
-            <a:r>
-              <a:rPr lang="de-DE" sz="1000">
-                <a:solidFill>
-                  <a:srgbClr val="FFC000">
-                    <a:alpha val="50000"/>
-                  </a:srgbClr>
-                </a:solidFill>
-                <a:latin typeface="Calibri" panose="020F0502020204030204" pitchFamily="34" charset="0"/>
-                <a:cs typeface="Calibri" panose="020F0502020204030204" pitchFamily="34" charset="0"/>
-              </a:rPr>
-              <a:t>TLP gelb (Adressatenkreis)</a:t>
-            </a:r>
           </a:p>
         </p:txBody>
       </p:sp>
@@ -3452,9 +3403,10 @@
           <a:lstStyle/>
           <a:p>
             <a:r>
-              <a:rPr dirty="0"/>
-              <a:t>Who Makes the Rules?</a:t>
-            </a:r>
+              <a:rPr lang="de-CH" dirty="0"/>
+              <a:t>A 38</a:t>
+            </a:r>
+            <a:endParaRPr dirty="0"/>
           </a:p>
         </p:txBody>
       </p:sp>
@@ -3481,8 +3433,29 @@
           <a:p>
             <a:r>
               <a:rPr dirty="0"/>
-              <a:t>Hack4Rail 2026 – Team A38</a:t>
-            </a:r>
+              <a:t>Hack4Rail 2026 – </a:t>
+            </a:r>
+            <a:r>
+              <a:rPr lang="de-CH" dirty="0"/>
+              <a:t>Who </a:t>
+            </a:r>
+            <a:r>
+              <a:rPr lang="de-CH" dirty="0" err="1"/>
+              <a:t>Makes</a:t>
+            </a:r>
+            <a:r>
+              <a:rPr lang="de-CH" dirty="0"/>
+              <a:t> </a:t>
+            </a:r>
+            <a:r>
+              <a:rPr lang="de-CH" dirty="0" err="1"/>
+              <a:t>the</a:t>
+            </a:r>
+            <a:r>
+              <a:rPr lang="de-CH" dirty="0"/>
+              <a:t> Rules?</a:t>
+            </a:r>
+            <a:endParaRPr dirty="0"/>
           </a:p>
         </p:txBody>
       </p:sp>
@@ -3545,10 +3518,13 @@
         <p:spPr/>
         <p:txBody>
           <a:bodyPr>
-            <a:normAutofit fontScale="92500" lnSpcReduction="20000"/>
+            <a:normAutofit lnSpcReduction="10000"/>
           </a:bodyPr>
           <a:lstStyle/>
           <a:p>
+            <a:pPr marL="0" indent="0">
+              <a:buNone/>
+            </a:pPr>
             <a:r>
               <a:rPr dirty="0"/>
               <a:t>📦 "Here are the regulations. Read them. All of them."</a:t>
@@ -3556,6 +3532,9 @@
             <a:endParaRPr lang="de-DE" dirty="0"/>
           </a:p>
           <a:p>
+            <a:pPr marL="0" indent="0">
+              <a:buNone/>
+            </a:pPr>
             <a:r>
               <a:rPr lang="de-DE" dirty="0"/>
               <a:t>„</a:t>
@@ -3579,22 +3558,33 @@
             <a:endParaRPr dirty="0"/>
           </a:p>
           <a:p>
+            <a:pPr marL="0" indent="0">
+              <a:buNone/>
+            </a:pPr>
             <a:endParaRPr dirty="0"/>
           </a:p>
           <a:p>
+            <a:pPr marL="0" indent="0">
+              <a:buNone/>
+            </a:pPr>
             <a:r>
               <a:rPr dirty="0"/>
               <a:t>📦📦 "Here's the new version. Compare it.</a:t>
             </a:r>
-          </a:p>
-          <a:p>
-            <a:r>
-              <a:rPr dirty="0"/>
-              <a:t>      Tell me what changed."</a:t>
-            </a:r>
-            <a:endParaRPr lang="de-DE" dirty="0"/>
-          </a:p>
-          <a:p>
+            <a:r>
+              <a:rPr lang="de-CH" dirty="0"/>
+              <a:t> </a:t>
+            </a:r>
+            <a:r>
+              <a:rPr dirty="0"/>
+              <a:t>Tell me what changed."</a:t>
+            </a:r>
+            <a:endParaRPr lang="de-CH" dirty="0"/>
+          </a:p>
+          <a:p>
+            <a:pPr marL="0" indent="0">
+              <a:buNone/>
+            </a:pPr>
             <a:r>
               <a:rPr lang="de-DE" dirty="0"/>
               <a:t>„</a:t>
@@ -3618,21 +3608,38 @@
             <a:endParaRPr dirty="0"/>
           </a:p>
           <a:p>
+            <a:pPr marL="0" indent="0">
+              <a:buNone/>
+            </a:pPr>
             <a:endParaRPr dirty="0"/>
           </a:p>
           <a:p>
+            <a:pPr marL="0" indent="0">
+              <a:buNone/>
+            </a:pPr>
             <a:r>
               <a:rPr dirty="0"/>
               <a:t>This is what railway companies do today.</a:t>
             </a:r>
           </a:p>
           <a:p>
-            <a:r>
-              <a:rPr dirty="0"/>
-              <a:t>Manually. For hundreds of rules.</a:t>
-            </a:r>
-          </a:p>
-          <a:p>
+            <a:pPr marL="0" indent="0">
+              <a:buNone/>
+            </a:pPr>
+            <a:r>
+              <a:rPr dirty="0"/>
+              <a:t>Manually. For hundreds of rules</a:t>
+            </a:r>
+            <a:r>
+              <a:rPr lang="de-CH" dirty="0"/>
+              <a:t>…</a:t>
+            </a:r>
+            <a:endParaRPr dirty="0"/>
+          </a:p>
+          <a:p>
+            <a:pPr marL="0" indent="0">
+              <a:buNone/>
+            </a:pPr>
             <a:r>
               <a:rPr dirty="0"/>
               <a:t>Across multiple countries and languages.</a:t>
@@ -4042,7 +4049,12 @@
             <p:ph idx="1"/>
           </p:nvPr>
         </p:nvSpPr>
-        <p:spPr/>
+        <p:spPr>
+          <a:xfrm>
+            <a:off x="838200" y="1825625"/>
+            <a:ext cx="10998200" cy="4351338"/>
+          </a:xfrm>
+        </p:spPr>
         <p:txBody>
           <a:bodyPr>
             <a:normAutofit/>
@@ -4113,7 +4125,15 @@
             </a:r>
             <a:r>
               <a:rPr dirty="0"/>
-              <a:t>One rule (verbatim text)</a:t>
+              <a:t>One rule (verbatim</a:t>
+            </a:r>
+            <a:r>
+              <a:rPr lang="de-CH" dirty="0"/>
+              <a:t> </a:t>
+            </a:r>
+            <a:r>
+              <a:rPr dirty="0"/>
+              <a:t>text)</a:t>
             </a:r>
           </a:p>
           <a:p>
@@ -4177,7 +4197,7 @@
         </p:nvSpPr>
         <p:spPr>
           <a:xfrm rot="5400000">
-            <a:off x="1072978" y="4816841"/>
+            <a:off x="1638539" y="4420602"/>
             <a:ext cx="951471" cy="914400"/>
           </a:xfrm>
           <a:prstGeom prst="bentUpArrow">
@@ -4223,7 +4243,7 @@
         </p:nvSpPr>
         <p:spPr>
           <a:xfrm rot="5400000">
-            <a:off x="4333100" y="4103063"/>
+            <a:off x="4373740" y="3828642"/>
             <a:ext cx="951472" cy="1089454"/>
           </a:xfrm>
           <a:prstGeom prst="bentUpArrow">
@@ -4584,41 +4604,42 @@
           </a:p>
         </p:txBody>
       </p:sp>
-      <p:sp>
-        <p:nvSpPr>
-          <p:cNvPr id="4" name="TextBox 3">
-            <a:extLst>
-              <a:ext uri="{FF2B5EF4-FFF2-40B4-BE49-F238E27FC236}">
-                <a16:creationId xmlns:a16="http://schemas.microsoft.com/office/drawing/2014/main" id="{3B27477D-692D-FE66-949F-8A575977F1B0}"/>
-              </a:ext>
-            </a:extLst>
-          </p:cNvPr>
-          <p:cNvSpPr txBox="1"/>
+      <p:pic>
+        <p:nvPicPr>
+          <p:cNvPr id="6" name="Grafik 5">
+            <a:extLst>
+              <a:ext uri="{FF2B5EF4-FFF2-40B4-BE49-F238E27FC236}">
+                <a16:creationId xmlns:a16="http://schemas.microsoft.com/office/drawing/2014/main" id="{34EF61CF-21D7-3ADA-7DD3-32153FADE9AD}"/>
+              </a:ext>
+            </a:extLst>
+          </p:cNvPr>
+          <p:cNvPicPr>
+            <a:picLocks noChangeAspect="1"/>
+          </p:cNvPicPr>
           <p:nvPr/>
-        </p:nvSpPr>
+        </p:nvPicPr>
+        <p:blipFill>
+          <a:blip r:embed="rId2">
+            <a:extLst>
+              <a:ext uri="{28A0092B-C50C-407E-A947-70E740481C1C}">
+                <a14:useLocalDpi xmlns:a14="http://schemas.microsoft.com/office/drawing/2010/main" val="0"/>
+              </a:ext>
+            </a:extLst>
+          </a:blip>
+          <a:stretch>
+            <a:fillRect/>
+          </a:stretch>
+        </p:blipFill>
         <p:spPr>
           <a:xfrm>
-            <a:off x="8530936" y="4073236"/>
-            <a:ext cx="1662546" cy="1477328"/>
+            <a:off x="7133908" y="1555751"/>
+            <a:ext cx="4621212" cy="4621212"/>
           </a:xfrm>
           <a:prstGeom prst="rect">
             <a:avLst/>
           </a:prstGeom>
-          <a:noFill/>
         </p:spPr>
-        <p:txBody>
-          <a:bodyPr wrap="square" rtlCol="0">
-            <a:spAutoFit/>
-          </a:bodyPr>
-          <a:lstStyle/>
-          <a:p>
-            <a:r>
-              <a:rPr lang="de-DE" dirty="0"/>
-              <a:t>Mensch mit Fragezeichen auf Kopf und Paragrafenzeichen</a:t>
-            </a:r>
-          </a:p>
-        </p:txBody>
-      </p:sp>
+      </p:pic>
     </p:spTree>
   </p:cSld>
   <p:clrMapOvr>
@@ -5468,27 +5489,6 @@
 </file>
 
 <file path=customXml/item1.xml><?xml version="1.0" encoding="utf-8"?>
-<?mso-contentType ?>
-<FormTemplates xmlns="http://schemas.microsoft.com/sharepoint/v3/contenttype/forms">
-  <Display>DocumentLibraryForm</Display>
-  <Edit>DocumentLibraryForm</Edit>
-  <New>DocumentLibraryForm</New>
-</FormTemplates>
-</file>
-
-<file path=customXml/item2.xml><?xml version="1.0" encoding="utf-8"?>
-<p:properties xmlns:p="http://schemas.microsoft.com/office/2006/metadata/properties" xmlns:xsi="http://www.w3.org/2001/XMLSchema-instance" xmlns:pc="http://schemas.microsoft.com/office/infopath/2007/PartnerControls">
-  <documentManagement>
-    <Copyright xmlns="b106c448-c3d1-41cc-8fd9-3acb307364b4" xsi:nil="true"/>
-    <lcf76f155ced4ddcb4097134ff3c332f xmlns="b106c448-c3d1-41cc-8fd9-3acb307364b4">
-      <Terms xmlns="http://schemas.microsoft.com/office/infopath/2007/PartnerControls"/>
-    </lcf76f155ced4ddcb4097134ff3c332f>
-    <TaxCatchAll xmlns="b043894e-b4c8-44d0-9690-d7947297ac19" xsi:nil="true"/>
-  </documentManagement>
-</p:properties>
-</file>
-
-<file path=customXml/item3.xml><?xml version="1.0" encoding="utf-8"?>
 <ct:contentTypeSchema xmlns:ct="http://schemas.microsoft.com/office/2006/metadata/contentType" xmlns:ma="http://schemas.microsoft.com/office/2006/metadata/properties/metaAttributes" ct:_="" ma:_="" ma:contentTypeName="Dokument" ma:contentTypeID="0x010100C5895299445B8C4DB378BBB718B1F939" ma:contentTypeVersion="18" ma:contentTypeDescription="Ein neues Dokument erstellen." ma:contentTypeScope="" ma:versionID="ca18c32604eb9eb075bdd5b520f76d7f">
   <xsd:schema xmlns:xsd="http://www.w3.org/2001/XMLSchema" xmlns:xs="http://www.w3.org/2001/XMLSchema" xmlns:p="http://schemas.microsoft.com/office/2006/metadata/properties" xmlns:ns2="b106c448-c3d1-41cc-8fd9-3acb307364b4" xmlns:ns3="b043894e-b4c8-44d0-9690-d7947297ac19" targetNamespace="http://schemas.microsoft.com/office/2006/metadata/properties" ma:root="true" ma:fieldsID="0e0a0918b2fa3636e306fde1bc5c258b" ns2:_="" ns3:_="">
     <xsd:import namespace="b106c448-c3d1-41cc-8fd9-3acb307364b4"/>
@@ -5733,10 +5733,42 @@
 </ct:contentTypeSchema>
 </file>
 
+<file path=customXml/item2.xml><?xml version="1.0" encoding="utf-8"?>
+<p:properties xmlns:p="http://schemas.microsoft.com/office/2006/metadata/properties" xmlns:xsi="http://www.w3.org/2001/XMLSchema-instance" xmlns:pc="http://schemas.microsoft.com/office/infopath/2007/PartnerControls">
+  <documentManagement>
+    <Copyright xmlns="b106c448-c3d1-41cc-8fd9-3acb307364b4" xsi:nil="true"/>
+    <lcf76f155ced4ddcb4097134ff3c332f xmlns="b106c448-c3d1-41cc-8fd9-3acb307364b4">
+      <Terms xmlns="http://schemas.microsoft.com/office/infopath/2007/PartnerControls"/>
+    </lcf76f155ced4ddcb4097134ff3c332f>
+    <TaxCatchAll xmlns="b043894e-b4c8-44d0-9690-d7947297ac19" xsi:nil="true"/>
+  </documentManagement>
+</p:properties>
+</file>
+
+<file path=customXml/item3.xml><?xml version="1.0" encoding="utf-8"?>
+<?mso-contentType ?>
+<FormTemplates xmlns="http://schemas.microsoft.com/sharepoint/v3/contenttype/forms">
+  <Display>DocumentLibraryForm</Display>
+  <Edit>DocumentLibraryForm</Edit>
+  <New>DocumentLibraryForm</New>
+</FormTemplates>
+</file>
+
 <file path=customXml/itemProps1.xml><?xml version="1.0" encoding="utf-8"?>
-<ds:datastoreItem xmlns:ds="http://schemas.openxmlformats.org/officeDocument/2006/customXml" ds:itemID="{47CF5FD6-43E2-4C9A-9372-C9D60EE1772B}">
+<ds:datastoreItem xmlns:ds="http://schemas.openxmlformats.org/officeDocument/2006/customXml" ds:itemID="{0BED3A9D-D1E4-45EA-8B49-CB6F60C2A98A}">
   <ds:schemaRefs>
-    <ds:schemaRef ds:uri="http://schemas.microsoft.com/sharepoint/v3/contenttype/forms"/>
+    <ds:schemaRef ds:uri="http://schemas.microsoft.com/office/2006/metadata/contentType"/>
+    <ds:schemaRef ds:uri="http://schemas.microsoft.com/office/2006/metadata/properties/metaAttributes"/>
+    <ds:schemaRef ds:uri="http://www.w3.org/2001/XMLSchema"/>
+    <ds:schemaRef ds:uri="http://schemas.microsoft.com/office/2006/metadata/properties"/>
+    <ds:schemaRef ds:uri="b106c448-c3d1-41cc-8fd9-3acb307364b4"/>
+    <ds:schemaRef ds:uri="b043894e-b4c8-44d0-9690-d7947297ac19"/>
+    <ds:schemaRef ds:uri="http://schemas.microsoft.com/office/2006/documentManagement/types"/>
+    <ds:schemaRef ds:uri="http://schemas.microsoft.com/office/infopath/2007/PartnerControls"/>
+    <ds:schemaRef ds:uri="http://schemas.openxmlformats.org/package/2006/metadata/core-properties"/>
+    <ds:schemaRef ds:uri="http://purl.org/dc/elements/1.1/"/>
+    <ds:schemaRef ds:uri="http://purl.org/dc/terms/"/>
+    <ds:schemaRef ds:uri="http://schemas.microsoft.com/internal/obd"/>
   </ds:schemaRefs>
 </ds:datastoreItem>
 </file>
@@ -5759,20 +5791,9 @@
 </file>
 
 <file path=customXml/itemProps3.xml><?xml version="1.0" encoding="utf-8"?>
-<ds:datastoreItem xmlns:ds="http://schemas.openxmlformats.org/officeDocument/2006/customXml" ds:itemID="{0BED3A9D-D1E4-45EA-8B49-CB6F60C2A98A}">
+<ds:datastoreItem xmlns:ds="http://schemas.openxmlformats.org/officeDocument/2006/customXml" ds:itemID="{47CF5FD6-43E2-4C9A-9372-C9D60EE1772B}">
   <ds:schemaRefs>
-    <ds:schemaRef ds:uri="http://schemas.microsoft.com/office/2006/metadata/contentType"/>
-    <ds:schemaRef ds:uri="http://schemas.microsoft.com/office/2006/metadata/properties/metaAttributes"/>
-    <ds:schemaRef ds:uri="http://www.w3.org/2001/XMLSchema"/>
-    <ds:schemaRef ds:uri="http://schemas.microsoft.com/office/2006/metadata/properties"/>
-    <ds:schemaRef ds:uri="b106c448-c3d1-41cc-8fd9-3acb307364b4"/>
-    <ds:schemaRef ds:uri="b043894e-b4c8-44d0-9690-d7947297ac19"/>
-    <ds:schemaRef ds:uri="http://schemas.microsoft.com/office/2006/documentManagement/types"/>
-    <ds:schemaRef ds:uri="http://schemas.microsoft.com/office/infopath/2007/PartnerControls"/>
-    <ds:schemaRef ds:uri="http://schemas.openxmlformats.org/package/2006/metadata/core-properties"/>
-    <ds:schemaRef ds:uri="http://purl.org/dc/elements/1.1/"/>
-    <ds:schemaRef ds:uri="http://purl.org/dc/terms/"/>
-    <ds:schemaRef ds:uri="http://schemas.microsoft.com/internal/obd"/>
+    <ds:schemaRef ds:uri="http://schemas.microsoft.com/sharepoint/v3/contenttype/forms"/>
   </ds:schemaRefs>
 </ds:datastoreItem>
 </file>

--- a/whomakestherules/A38_H4R2026_Ch7.pptx
+++ b/whomakestherules/A38_H4R2026_Ch7.pptx
@@ -8,12 +8,14 @@
     <p:sldId id="256" r:id="rId5"/>
     <p:sldId id="257" r:id="rId6"/>
     <p:sldId id="258" r:id="rId7"/>
-    <p:sldId id="259" r:id="rId8"/>
-    <p:sldId id="260" r:id="rId9"/>
-    <p:sldId id="261" r:id="rId10"/>
-    <p:sldId id="262" r:id="rId11"/>
-    <p:sldId id="263" r:id="rId12"/>
-    <p:sldId id="264" r:id="rId13"/>
+    <p:sldId id="265" r:id="rId8"/>
+    <p:sldId id="259" r:id="rId9"/>
+    <p:sldId id="260" r:id="rId10"/>
+    <p:sldId id="266" r:id="rId11"/>
+    <p:sldId id="261" r:id="rId12"/>
+    <p:sldId id="262" r:id="rId13"/>
+    <p:sldId id="263" r:id="rId14"/>
+    <p:sldId id="264" r:id="rId15"/>
   </p:sldIdLst>
   <p:sldSz cx="12192000" cy="6858000"/>
   <p:notesSz cx="6858000" cy="9144000"/>
@@ -269,7 +271,7 @@
           <a:p>
             <a:fld id="{73E09B6B-B446-416C-B509-27F8143F0A75}" type="datetimeFigureOut">
               <a:rPr lang="de-DE" smtClean="0"/>
-              <a:t>23.06.26</a:t>
+              <a:t>24.06.26</a:t>
             </a:fld>
             <a:endParaRPr lang="de-DE"/>
           </a:p>
@@ -323,7 +325,7 @@
           <a:p>
             <a:fld id="{47371D93-8784-4C02-8B2C-86355AB378F9}" type="slidenum">
               <a:rPr lang="de-DE" smtClean="0"/>
-              <a:t>‹Nr.›</a:t>
+              <a:t>‹#›</a:t>
             </a:fld>
             <a:endParaRPr lang="de-DE"/>
           </a:p>
@@ -469,7 +471,7 @@
           <a:p>
             <a:fld id="{73E09B6B-B446-416C-B509-27F8143F0A75}" type="datetimeFigureOut">
               <a:rPr lang="de-DE" smtClean="0"/>
-              <a:t>23.06.26</a:t>
+              <a:t>24.06.26</a:t>
             </a:fld>
             <a:endParaRPr lang="de-DE"/>
           </a:p>
@@ -523,7 +525,7 @@
           <a:p>
             <a:fld id="{47371D93-8784-4C02-8B2C-86355AB378F9}" type="slidenum">
               <a:rPr lang="de-DE" smtClean="0"/>
-              <a:t>‹Nr.›</a:t>
+              <a:t>‹#›</a:t>
             </a:fld>
             <a:endParaRPr lang="de-DE"/>
           </a:p>
@@ -679,7 +681,7 @@
           <a:p>
             <a:fld id="{73E09B6B-B446-416C-B509-27F8143F0A75}" type="datetimeFigureOut">
               <a:rPr lang="de-DE" smtClean="0"/>
-              <a:t>23.06.26</a:t>
+              <a:t>24.06.26</a:t>
             </a:fld>
             <a:endParaRPr lang="de-DE"/>
           </a:p>
@@ -733,7 +735,7 @@
           <a:p>
             <a:fld id="{47371D93-8784-4C02-8B2C-86355AB378F9}" type="slidenum">
               <a:rPr lang="de-DE" smtClean="0"/>
-              <a:t>‹Nr.›</a:t>
+              <a:t>‹#›</a:t>
             </a:fld>
             <a:endParaRPr lang="de-DE"/>
           </a:p>
@@ -879,7 +881,7 @@
           <a:p>
             <a:fld id="{73E09B6B-B446-416C-B509-27F8143F0A75}" type="datetimeFigureOut">
               <a:rPr lang="de-DE" smtClean="0"/>
-              <a:t>23.06.26</a:t>
+              <a:t>24.06.26</a:t>
             </a:fld>
             <a:endParaRPr lang="de-DE"/>
           </a:p>
@@ -933,7 +935,7 @@
           <a:p>
             <a:fld id="{47371D93-8784-4C02-8B2C-86355AB378F9}" type="slidenum">
               <a:rPr lang="de-DE" smtClean="0"/>
-              <a:t>‹Nr.›</a:t>
+              <a:t>‹#›</a:t>
             </a:fld>
             <a:endParaRPr lang="de-DE"/>
           </a:p>
@@ -1155,7 +1157,7 @@
           <a:p>
             <a:fld id="{73E09B6B-B446-416C-B509-27F8143F0A75}" type="datetimeFigureOut">
               <a:rPr lang="de-DE" smtClean="0"/>
-              <a:t>23.06.26</a:t>
+              <a:t>24.06.26</a:t>
             </a:fld>
             <a:endParaRPr lang="de-DE"/>
           </a:p>
@@ -1209,7 +1211,7 @@
           <a:p>
             <a:fld id="{47371D93-8784-4C02-8B2C-86355AB378F9}" type="slidenum">
               <a:rPr lang="de-DE" smtClean="0"/>
-              <a:t>‹Nr.›</a:t>
+              <a:t>‹#›</a:t>
             </a:fld>
             <a:endParaRPr lang="de-DE"/>
           </a:p>
@@ -1423,7 +1425,7 @@
           <a:p>
             <a:fld id="{73E09B6B-B446-416C-B509-27F8143F0A75}" type="datetimeFigureOut">
               <a:rPr lang="de-DE" smtClean="0"/>
-              <a:t>23.06.26</a:t>
+              <a:t>24.06.26</a:t>
             </a:fld>
             <a:endParaRPr lang="de-DE"/>
           </a:p>
@@ -1477,7 +1479,7 @@
           <a:p>
             <a:fld id="{47371D93-8784-4C02-8B2C-86355AB378F9}" type="slidenum">
               <a:rPr lang="de-DE" smtClean="0"/>
-              <a:t>‹Nr.›</a:t>
+              <a:t>‹#›</a:t>
             </a:fld>
             <a:endParaRPr lang="de-DE"/>
           </a:p>
@@ -1838,7 +1840,7 @@
           <a:p>
             <a:fld id="{73E09B6B-B446-416C-B509-27F8143F0A75}" type="datetimeFigureOut">
               <a:rPr lang="de-DE" smtClean="0"/>
-              <a:t>23.06.26</a:t>
+              <a:t>24.06.26</a:t>
             </a:fld>
             <a:endParaRPr lang="de-DE"/>
           </a:p>
@@ -1892,7 +1894,7 @@
           <a:p>
             <a:fld id="{47371D93-8784-4C02-8B2C-86355AB378F9}" type="slidenum">
               <a:rPr lang="de-DE" smtClean="0"/>
-              <a:t>‹Nr.›</a:t>
+              <a:t>‹#›</a:t>
             </a:fld>
             <a:endParaRPr lang="de-DE"/>
           </a:p>
@@ -1980,7 +1982,7 @@
           <a:p>
             <a:fld id="{73E09B6B-B446-416C-B509-27F8143F0A75}" type="datetimeFigureOut">
               <a:rPr lang="de-DE" smtClean="0"/>
-              <a:t>23.06.26</a:t>
+              <a:t>24.06.26</a:t>
             </a:fld>
             <a:endParaRPr lang="de-DE"/>
           </a:p>
@@ -2034,7 +2036,7 @@
           <a:p>
             <a:fld id="{47371D93-8784-4C02-8B2C-86355AB378F9}" type="slidenum">
               <a:rPr lang="de-DE" smtClean="0"/>
-              <a:t>‹Nr.›</a:t>
+              <a:t>‹#›</a:t>
             </a:fld>
             <a:endParaRPr lang="de-DE"/>
           </a:p>
@@ -2093,7 +2095,7 @@
           <a:p>
             <a:fld id="{73E09B6B-B446-416C-B509-27F8143F0A75}" type="datetimeFigureOut">
               <a:rPr lang="de-DE" smtClean="0"/>
-              <a:t>23.06.26</a:t>
+              <a:t>24.06.26</a:t>
             </a:fld>
             <a:endParaRPr lang="de-DE"/>
           </a:p>
@@ -2147,7 +2149,7 @@
           <a:p>
             <a:fld id="{47371D93-8784-4C02-8B2C-86355AB378F9}" type="slidenum">
               <a:rPr lang="de-DE" smtClean="0"/>
-              <a:t>‹Nr.›</a:t>
+              <a:t>‹#›</a:t>
             </a:fld>
             <a:endParaRPr lang="de-DE"/>
           </a:p>
@@ -2406,7 +2408,7 @@
           <a:p>
             <a:fld id="{73E09B6B-B446-416C-B509-27F8143F0A75}" type="datetimeFigureOut">
               <a:rPr lang="de-DE" smtClean="0"/>
-              <a:t>23.06.26</a:t>
+              <a:t>24.06.26</a:t>
             </a:fld>
             <a:endParaRPr lang="de-DE"/>
           </a:p>
@@ -2460,7 +2462,7 @@
           <a:p>
             <a:fld id="{47371D93-8784-4C02-8B2C-86355AB378F9}" type="slidenum">
               <a:rPr lang="de-DE" smtClean="0"/>
-              <a:t>‹Nr.›</a:t>
+              <a:t>‹#›</a:t>
             </a:fld>
             <a:endParaRPr lang="de-DE"/>
           </a:p>
@@ -2699,7 +2701,7 @@
           <a:p>
             <a:fld id="{73E09B6B-B446-416C-B509-27F8143F0A75}" type="datetimeFigureOut">
               <a:rPr lang="de-DE" smtClean="0"/>
-              <a:t>23.06.26</a:t>
+              <a:t>24.06.26</a:t>
             </a:fld>
             <a:endParaRPr lang="de-DE"/>
           </a:p>
@@ -2753,7 +2755,7 @@
           <a:p>
             <a:fld id="{47371D93-8784-4C02-8B2C-86355AB378F9}" type="slidenum">
               <a:rPr lang="de-DE" smtClean="0"/>
-              <a:t>‹Nr.›</a:t>
+              <a:t>‹#›</a:t>
             </a:fld>
             <a:endParaRPr lang="de-DE"/>
           </a:p>
@@ -2940,7 +2942,7 @@
           <a:p>
             <a:fld id="{73E09B6B-B446-416C-B509-27F8143F0A75}" type="datetimeFigureOut">
               <a:rPr lang="de-DE" smtClean="0"/>
-              <a:t>23.06.26</a:t>
+              <a:t>24.06.26</a:t>
             </a:fld>
             <a:endParaRPr lang="de-DE"/>
           </a:p>
@@ -3030,7 +3032,7 @@
           <a:p>
             <a:fld id="{47371D93-8784-4C02-8B2C-86355AB378F9}" type="slidenum">
               <a:rPr lang="de-DE" smtClean="0"/>
-              <a:t>‹Nr.›</a:t>
+              <a:t>‹#›</a:t>
             </a:fld>
             <a:endParaRPr lang="de-DE"/>
           </a:p>
@@ -3420,10 +3422,21 @@
             <p:ph type="subTitle" idx="1"/>
           </p:nvPr>
         </p:nvSpPr>
-        <p:spPr/>
+        <p:spPr>
+          <a:xfrm>
+            <a:off x="1524000" y="4973641"/>
+            <a:ext cx="9144000" cy="1655762"/>
+          </a:xfrm>
+        </p:spPr>
         <p:txBody>
           <a:bodyPr/>
           <a:lstStyle/>
+          <a:p>
+            <a:r>
+              <a:rPr lang="de-DE" dirty="0"/>
+              <a:t>Team A38</a:t>
+            </a:r>
+          </a:p>
           <a:p>
             <a:r>
               <a:rPr dirty="0"/>
@@ -3459,6 +3472,36 @@
           </a:p>
         </p:txBody>
       </p:sp>
+      <p:pic>
+        <p:nvPicPr>
+          <p:cNvPr id="4" name="Picture 3" descr="Permit A38: the dilemma of artificial intelligence">
+            <a:extLst>
+              <a:ext uri="{FF2B5EF4-FFF2-40B4-BE49-F238E27FC236}">
+                <a16:creationId xmlns:a16="http://schemas.microsoft.com/office/drawing/2014/main" id="{6808EE80-BE05-4466-4F9C-4D832469533F}"/>
+              </a:ext>
+            </a:extLst>
+          </p:cNvPr>
+          <p:cNvPicPr>
+            <a:picLocks noChangeAspect="1"/>
+          </p:cNvPicPr>
+          <p:nvPr/>
+        </p:nvPicPr>
+        <p:blipFill>
+          <a:blip r:embed="rId2"/>
+          <a:stretch>
+            <a:fillRect/>
+          </a:stretch>
+        </p:blipFill>
+        <p:spPr>
+          <a:xfrm>
+            <a:off x="2073689" y="389238"/>
+            <a:ext cx="7772400" cy="4378816"/>
+          </a:xfrm>
+          <a:prstGeom prst="rect">
+            <a:avLst/>
+          </a:prstGeom>
+        </p:spPr>
+      </p:pic>
     </p:spTree>
   </p:cSld>
   <p:clrMapOvr>
@@ -3467,7 +3510,131 @@
 </p:sld>
 </file>
 
-<file path=ppt/slides/slide2.xml><?xml version="1.0" encoding="utf-8"?>
+<file path=ppt/slides/slide10.xml><?xml version="1.0" encoding="utf-8"?>
+<p:sld xmlns:a="http://schemas.openxmlformats.org/drawingml/2006/main" xmlns:r="http://schemas.openxmlformats.org/officeDocument/2006/relationships" xmlns:p="http://schemas.openxmlformats.org/presentationml/2006/main" show="0">
+  <p:cSld>
+    <p:spTree>
+      <p:nvGrpSpPr>
+        <p:cNvPr id="1" name=""/>
+        <p:cNvGrpSpPr/>
+        <p:nvPr/>
+      </p:nvGrpSpPr>
+      <p:grpSpPr>
+        <a:xfrm>
+          <a:off x="0" y="0"/>
+          <a:ext cx="0" cy="0"/>
+          <a:chOff x="0" y="0"/>
+          <a:chExt cx="0" cy="0"/>
+        </a:xfrm>
+      </p:grpSpPr>
+      <p:sp>
+        <p:nvSpPr>
+          <p:cNvPr id="2" name="Title 1"/>
+          <p:cNvSpPr>
+            <a:spLocks noGrp="1"/>
+          </p:cNvSpPr>
+          <p:nvPr>
+            <p:ph type="title"/>
+          </p:nvPr>
+        </p:nvSpPr>
+        <p:spPr/>
+        <p:txBody>
+          <a:bodyPr/>
+          <a:lstStyle/>
+          <a:p>
+            <a:r>
+              <a:t>The Vision</a:t>
+            </a:r>
+          </a:p>
+        </p:txBody>
+      </p:sp>
+      <p:sp>
+        <p:nvSpPr>
+          <p:cNvPr id="3" name="Content Placeholder 2"/>
+          <p:cNvSpPr>
+            <a:spLocks noGrp="1"/>
+          </p:cNvSpPr>
+          <p:nvPr>
+            <p:ph idx="1"/>
+          </p:nvPr>
+        </p:nvSpPr>
+        <p:spPr/>
+        <p:txBody>
+          <a:bodyPr>
+            <a:normAutofit fontScale="85000" lnSpcReduction="20000"/>
+          </a:bodyPr>
+          <a:lstStyle/>
+          <a:p>
+            <a:r>
+              <a:rPr dirty="0"/>
+              <a:t>┌──────────────┐     ┌─────────────┐     ┌──────────────┐</a:t>
+            </a:r>
+          </a:p>
+          <a:p>
+            <a:r>
+              <a:rPr dirty="0"/>
+              <a:t>│ Web Editor   │ ──► │ OSCAL4Rail  │ ──► │ PDF (view)   │</a:t>
+            </a:r>
+          </a:p>
+          <a:p>
+            <a:r>
+              <a:rPr dirty="0"/>
+              <a:t>│ (looks like  │     │ (canonical  │     │ API (machine)│</a:t>
+            </a:r>
+          </a:p>
+          <a:p>
+            <a:r>
+              <a:rPr dirty="0"/>
+              <a:t>│  Word)       │     │  source)    │     │ Diff/Change  │</a:t>
+            </a:r>
+          </a:p>
+          <a:p>
+            <a:r>
+              <a:rPr dirty="0"/>
+              <a:t>└──────────────┘     └─────────────┘     └──────────────┘</a:t>
+            </a:r>
+          </a:p>
+          <a:p>
+            <a:endParaRPr dirty="0"/>
+          </a:p>
+          <a:p>
+            <a:r>
+              <a:rPr dirty="0"/>
+              <a:t>Governance owners keep writing like they always have.</a:t>
+            </a:r>
+          </a:p>
+          <a:p>
+            <a:r>
+              <a:rPr dirty="0"/>
+              <a:t>But the output is structured, versioned, machine-readable.</a:t>
+            </a:r>
+          </a:p>
+          <a:p>
+            <a:endParaRPr dirty="0"/>
+          </a:p>
+          <a:p>
+            <a:r>
+              <a:rPr dirty="0"/>
+              <a:t>→ Automated compliance checks</a:t>
+            </a:r>
+          </a:p>
+          <a:p>
+            <a:r>
+              <a:rPr dirty="0"/>
+              <a:t>→ Bridge to ACA: contracts validated against regulations</a:t>
+            </a:r>
+          </a:p>
+        </p:txBody>
+      </p:sp>
+    </p:spTree>
+  </p:cSld>
+  <p:clrMapOvr>
+    <a:masterClrMapping/>
+  </p:clrMapOvr>
+</p:sld>
+</file>
+
+<file path=ppt/slides/slide11.xml><?xml version="1.0" encoding="utf-8"?>
 <p:sld xmlns:a="http://schemas.openxmlformats.org/drawingml/2006/main" xmlns:r="http://schemas.openxmlformats.org/officeDocument/2006/relationships" xmlns:p="http://schemas.openxmlformats.org/presentationml/2006/main">
   <p:cSld>
     <p:spTree>
@@ -3491,158 +3658,315 @@
             <a:spLocks noGrp="1"/>
           </p:cNvSpPr>
           <p:nvPr>
-            <p:ph type="title"/>
+            <p:ph type="ctrTitle"/>
           </p:nvPr>
         </p:nvSpPr>
         <p:spPr/>
         <p:txBody>
-          <a:bodyPr/>
-          <a:lstStyle/>
-          <a:p>
-            <a:r>
-              <a:t>The Problem</a:t>
-            </a:r>
-          </a:p>
-        </p:txBody>
-      </p:sp>
-      <p:sp>
-        <p:nvSpPr>
-          <p:cNvPr id="3" name="Content Placeholder 2"/>
-          <p:cNvSpPr>
-            <a:spLocks noGrp="1"/>
-          </p:cNvSpPr>
-          <p:nvPr>
-            <p:ph idx="1"/>
-          </p:nvPr>
-        </p:nvSpPr>
-        <p:spPr/>
+          <a:bodyPr anchor="t"/>
+          <a:lstStyle/>
+          <a:p>
+            <a:r>
+              <a:rPr dirty="0"/>
+              <a:t>OSCAL4Rail</a:t>
+            </a:r>
+          </a:p>
+        </p:txBody>
+      </p:sp>
+      <p:sp>
+        <p:nvSpPr>
+          <p:cNvPr id="3" name="Subtitle 2"/>
+          <p:cNvSpPr>
+            <a:spLocks noGrp="1"/>
+          </p:cNvSpPr>
+          <p:nvPr>
+            <p:ph type="subTitle" idx="1"/>
+          </p:nvPr>
+        </p:nvSpPr>
+        <p:spPr>
+          <a:xfrm>
+            <a:off x="1731818" y="2601119"/>
+            <a:ext cx="9144000" cy="3134518"/>
+          </a:xfrm>
+        </p:spPr>
         <p:txBody>
           <a:bodyPr>
             <a:normAutofit lnSpcReduction="10000"/>
           </a:bodyPr>
           <a:lstStyle/>
           <a:p>
-            <a:pPr marL="0" indent="0">
-              <a:buNone/>
-            </a:pPr>
             <a:r>
               <a:rPr dirty="0"/>
-              <a:t>📦 "Here are the regulations. Read them. All of them."</a:t>
-            </a:r>
-            <a:endParaRPr lang="de-DE" dirty="0"/>
-          </a:p>
-          <a:p>
-            <a:pPr marL="0" indent="0">
-              <a:buNone/>
-            </a:pPr>
-            <a:r>
-              <a:rPr lang="de-DE" dirty="0"/>
-              <a:t>„</a:t>
-            </a:r>
-            <a:r>
-              <a:rPr lang="de-DE" dirty="0" err="1"/>
-              <a:t>Apply</a:t>
-            </a:r>
-            <a:r>
-              <a:rPr lang="de-DE" dirty="0"/>
-              <a:t> </a:t>
-            </a:r>
-            <a:r>
-              <a:rPr lang="de-DE" dirty="0" err="1"/>
-              <a:t>them</a:t>
-            </a:r>
-            <a:r>
-              <a:rPr lang="de-DE" dirty="0"/>
-              <a:t>“</a:t>
-            </a:r>
+              <a:t>Machine-readable governance for railways.</a:t>
+            </a:r>
+          </a:p>
+          <a:p>
             <a:endParaRPr dirty="0"/>
           </a:p>
           <a:p>
-            <a:pPr marL="0" indent="0">
-              <a:buNone/>
-            </a:pPr>
+            <a:r>
+              <a:rPr dirty="0"/>
+              <a:t>Who makes the rules? Humans.</a:t>
+            </a:r>
+          </a:p>
+          <a:p>
+            <a:r>
+              <a:rPr dirty="0"/>
+              <a:t>How we publish, version, and compare them?</a:t>
+            </a:r>
+          </a:p>
+          <a:p>
+            <a:r>
+              <a:rPr dirty="0"/>
+              <a:t>That's a machine's job.</a:t>
+            </a:r>
+          </a:p>
+          <a:p>
             <a:endParaRPr dirty="0"/>
           </a:p>
           <a:p>
-            <a:pPr marL="0" indent="0">
-              <a:buNone/>
-            </a:pPr>
             <a:r>
               <a:rPr dirty="0"/>
-              <a:t>📦📦 "Here's the new version. Compare it.</a:t>
-            </a:r>
-            <a:r>
-              <a:rPr lang="de-CH" dirty="0"/>
-              <a:t> </a:t>
-            </a:r>
-            <a:r>
-              <a:rPr dirty="0"/>
-              <a:t>Tell me what changed."</a:t>
-            </a:r>
-            <a:endParaRPr lang="de-CH" dirty="0"/>
-          </a:p>
-          <a:p>
-            <a:pPr marL="0" indent="0">
-              <a:buNone/>
-            </a:pPr>
-            <a:r>
-              <a:rPr lang="de-DE" dirty="0"/>
-              <a:t>„</a:t>
-            </a:r>
-            <a:r>
-              <a:rPr lang="de-DE" dirty="0" err="1"/>
-              <a:t>Apply</a:t>
-            </a:r>
-            <a:r>
-              <a:rPr lang="de-DE" dirty="0"/>
-              <a:t> </a:t>
-            </a:r>
-            <a:r>
-              <a:rPr lang="de-DE" dirty="0" err="1"/>
-              <a:t>them</a:t>
-            </a:r>
-            <a:r>
-              <a:rPr lang="de-DE" dirty="0"/>
-              <a:t>“</a:t>
-            </a:r>
-            <a:endParaRPr dirty="0"/>
-          </a:p>
-          <a:p>
-            <a:pPr marL="0" indent="0">
-              <a:buNone/>
-            </a:pPr>
-            <a:endParaRPr dirty="0"/>
-          </a:p>
-          <a:p>
-            <a:pPr marL="0" indent="0">
-              <a:buNone/>
-            </a:pPr>
-            <a:r>
-              <a:rPr dirty="0"/>
-              <a:t>This is what railway companies do today.</a:t>
-            </a:r>
-          </a:p>
-          <a:p>
-            <a:pPr marL="0" indent="0">
-              <a:buNone/>
-            </a:pPr>
-            <a:r>
-              <a:rPr dirty="0"/>
-              <a:t>Manually. For hundreds of rules</a:t>
-            </a:r>
-            <a:r>
-              <a:rPr lang="de-CH" dirty="0"/>
-              <a:t>…</a:t>
-            </a:r>
-            <a:endParaRPr dirty="0"/>
-          </a:p>
-          <a:p>
-            <a:pPr marL="0" indent="0">
-              <a:buNone/>
-            </a:pPr>
-            <a:r>
-              <a:rPr dirty="0"/>
-              <a:t>Across multiple countries and languages.</a:t>
+              <a:t>Starting today.</a:t>
+            </a:r>
+          </a:p>
+        </p:txBody>
+      </p:sp>
+    </p:spTree>
+  </p:cSld>
+  <p:clrMapOvr>
+    <a:masterClrMapping/>
+  </p:clrMapOvr>
+</p:sld>
+</file>
+
+<file path=ppt/slides/slide2.xml><?xml version="1.0" encoding="utf-8"?>
+<p:sld xmlns:a="http://schemas.openxmlformats.org/drawingml/2006/main" xmlns:r="http://schemas.openxmlformats.org/officeDocument/2006/relationships" xmlns:p="http://schemas.openxmlformats.org/presentationml/2006/main">
+  <p:cSld>
+    <p:bg>
+      <p:bgPr>
+        <a:solidFill>
+          <a:schemeClr val="bg1"/>
+        </a:solidFill>
+        <a:effectLst/>
+      </p:bgPr>
+    </p:bg>
+    <p:spTree>
+      <p:nvGrpSpPr>
+        <p:cNvPr id="1" name=""/>
+        <p:cNvGrpSpPr/>
+        <p:nvPr/>
+      </p:nvGrpSpPr>
+      <p:grpSpPr>
+        <a:xfrm>
+          <a:off x="0" y="0"/>
+          <a:ext cx="0" cy="0"/>
+          <a:chOff x="0" y="0"/>
+          <a:chExt cx="0" cy="0"/>
+        </a:xfrm>
+      </p:grpSpPr>
+      <p:sp useBgFill="1">
+        <p:nvSpPr>
+          <p:cNvPr id="13" name="Rectangle 12">
+            <a:extLst>
+              <a:ext uri="{FF2B5EF4-FFF2-40B4-BE49-F238E27FC236}">
+                <a16:creationId xmlns:a16="http://schemas.microsoft.com/office/drawing/2014/main" id="{04812C46-200A-4DEB-A05E-3ED6C68C2387}"/>
+              </a:ext>
+              <a:ext uri="{C183D7F6-B498-43B3-948B-1728B52AA6E4}">
+                <adec:decorative xmlns:adec="http://schemas.microsoft.com/office/drawing/2017/decorative" val="1"/>
+              </a:ext>
+            </a:extLst>
+          </p:cNvPr>
+          <p:cNvSpPr>
+            <a:spLocks noGrp="1" noRot="1" noChangeAspect="1" noMove="1" noResize="1" noEditPoints="1" noAdjustHandles="1" noChangeArrowheads="1" noChangeShapeType="1" noTextEdit="1"/>
+          </p:cNvSpPr>
+          <p:nvPr>
+            <p:extLst>
+              <p:ext uri="{386F3935-93C4-4BCD-93E2-E3B085C9AB24}">
+                <p16:designElem xmlns:p16="http://schemas.microsoft.com/office/powerpoint/2015/main" val="1"/>
+              </p:ext>
+            </p:extLst>
+          </p:nvPr>
+        </p:nvSpPr>
+        <p:spPr>
+          <a:xfrm>
+            <a:off x="-1" y="0"/>
+            <a:ext cx="12188952" cy="6858000"/>
+          </a:xfrm>
+          <a:prstGeom prst="rect">
+            <a:avLst/>
+          </a:prstGeom>
+          <a:ln>
+            <a:noFill/>
+          </a:ln>
+        </p:spPr>
+        <p:style>
+          <a:lnRef idx="2">
+            <a:schemeClr val="accent1">
+              <a:shade val="50000"/>
+            </a:schemeClr>
+          </a:lnRef>
+          <a:fillRef idx="1">
+            <a:schemeClr val="accent1"/>
+          </a:fillRef>
+          <a:effectRef idx="0">
+            <a:schemeClr val="accent1"/>
+          </a:effectRef>
+          <a:fontRef idx="minor">
+            <a:schemeClr val="lt1"/>
+          </a:fontRef>
+        </p:style>
+        <p:txBody>
+          <a:bodyPr rtlCol="0" anchor="ctr"/>
+          <a:lstStyle/>
+          <a:p>
+            <a:pPr algn="ctr"/>
+            <a:endParaRPr lang="en-US"/>
+          </a:p>
+        </p:txBody>
+      </p:sp>
+      <p:pic>
+        <p:nvPicPr>
+          <p:cNvPr id="4" name="Picture 3" descr="15.224 Stock-Fotos und hochauflösende Bilder zu Papier ...">
+            <a:extLst>
+              <a:ext uri="{FF2B5EF4-FFF2-40B4-BE49-F238E27FC236}">
+                <a16:creationId xmlns:a16="http://schemas.microsoft.com/office/drawing/2014/main" id="{DC659071-9294-E92E-AFC0-36B134A84B78}"/>
+              </a:ext>
+            </a:extLst>
+          </p:cNvPr>
+          <p:cNvPicPr>
+            <a:picLocks noChangeAspect="1"/>
+          </p:cNvPicPr>
+          <p:nvPr/>
+        </p:nvPicPr>
+        <p:blipFill>
+          <a:blip r:embed="rId2"/>
+          <a:srcRect l="5884" r="-1" b="-1"/>
+          <a:stretch>
+            <a:fillRect/>
+          </a:stretch>
+        </p:blipFill>
+        <p:spPr>
+          <a:xfrm>
+            <a:off x="432956" y="0"/>
+            <a:ext cx="11658600" cy="8268617"/>
+          </a:xfrm>
+          <a:prstGeom prst="rect">
+            <a:avLst/>
+          </a:prstGeom>
+        </p:spPr>
+      </p:pic>
+      <p:sp>
+        <p:nvSpPr>
+          <p:cNvPr id="14" name="Rectangle 13">
+            <a:extLst>
+              <a:ext uri="{FF2B5EF4-FFF2-40B4-BE49-F238E27FC236}">
+                <a16:creationId xmlns:a16="http://schemas.microsoft.com/office/drawing/2014/main" id="{D1EA859B-E555-4109-94F3-6700E046E008}"/>
+              </a:ext>
+              <a:ext uri="{C183D7F6-B498-43B3-948B-1728B52AA6E4}">
+                <adec:decorative xmlns:adec="http://schemas.microsoft.com/office/drawing/2017/decorative" val="1"/>
+              </a:ext>
+            </a:extLst>
+          </p:cNvPr>
+          <p:cNvSpPr>
+            <a:spLocks noGrp="1" noRot="1" noChangeAspect="1" noMove="1" noResize="1" noEditPoints="1" noAdjustHandles="1" noChangeArrowheads="1" noChangeShapeType="1" noTextEdit="1"/>
+          </p:cNvSpPr>
+          <p:nvPr>
+            <p:extLst>
+              <p:ext uri="{386F3935-93C4-4BCD-93E2-E3B085C9AB24}">
+                <p16:designElem xmlns:p16="http://schemas.microsoft.com/office/powerpoint/2015/main" val="1"/>
+              </p:ext>
+            </p:extLst>
+          </p:nvPr>
+        </p:nvSpPr>
+        <p:spPr>
+          <a:xfrm flipH="1">
+            <a:off x="5125019" y="0"/>
+            <a:ext cx="7066978" cy="6858000"/>
+          </a:xfrm>
+          <a:prstGeom prst="rect">
+            <a:avLst/>
+          </a:prstGeom>
+          <a:gradFill>
+            <a:gsLst>
+              <a:gs pos="48000">
+                <a:schemeClr val="bg1"/>
+              </a:gs>
+              <a:gs pos="35000">
+                <a:schemeClr val="bg1">
+                  <a:alpha val="77000"/>
+                </a:schemeClr>
+              </a:gs>
+              <a:gs pos="19000">
+                <a:schemeClr val="bg1">
+                  <a:alpha val="38000"/>
+                </a:schemeClr>
+              </a:gs>
+              <a:gs pos="0">
+                <a:schemeClr val="bg1">
+                  <a:alpha val="0"/>
+                </a:schemeClr>
+              </a:gs>
+              <a:gs pos="100000">
+                <a:schemeClr val="bg1"/>
+              </a:gs>
+            </a:gsLst>
+            <a:lin ang="10800000" scaled="0"/>
+          </a:gradFill>
+          <a:ln>
+            <a:noFill/>
+          </a:ln>
+        </p:spPr>
+        <p:style>
+          <a:lnRef idx="2">
+            <a:schemeClr val="accent1">
+              <a:shade val="50000"/>
+            </a:schemeClr>
+          </a:lnRef>
+          <a:fillRef idx="1">
+            <a:schemeClr val="accent1"/>
+          </a:fillRef>
+          <a:effectRef idx="0">
+            <a:schemeClr val="accent1"/>
+          </a:effectRef>
+          <a:fontRef idx="minor">
+            <a:schemeClr val="lt1"/>
+          </a:fontRef>
+        </p:style>
+        <p:txBody>
+          <a:bodyPr rtlCol="0" anchor="ctr"/>
+          <a:lstStyle/>
+          <a:p>
+            <a:pPr algn="ctr"/>
+            <a:endParaRPr lang="en-US" dirty="0"/>
+          </a:p>
+        </p:txBody>
+      </p:sp>
+      <p:sp>
+        <p:nvSpPr>
+          <p:cNvPr id="2" name="Title 1"/>
+          <p:cNvSpPr>
+            <a:spLocks noGrp="1"/>
+          </p:cNvSpPr>
+          <p:nvPr>
+            <p:ph type="title"/>
+          </p:nvPr>
+        </p:nvSpPr>
+        <p:spPr>
+          <a:xfrm>
+            <a:off x="7531610" y="365125"/>
+            <a:ext cx="3822189" cy="1899912"/>
+          </a:xfrm>
+        </p:spPr>
+        <p:txBody>
+          <a:bodyPr>
+            <a:normAutofit/>
+          </a:bodyPr>
+          <a:lstStyle/>
+          <a:p>
+            <a:r>
+              <a:rPr lang="en-GB" sz="4000" dirty="0"/>
+              <a:t>The Problem</a:t>
             </a:r>
           </a:p>
         </p:txBody>
@@ -3656,7 +3980,7 @@
 </file>
 
 <file path=ppt/slides/slide3.xml><?xml version="1.0" encoding="utf-8"?>
-<p:sld xmlns:a="http://schemas.openxmlformats.org/drawingml/2006/main" xmlns:r="http://schemas.openxmlformats.org/officeDocument/2006/relationships" xmlns:p="http://schemas.openxmlformats.org/presentationml/2006/main">
+<p:sld xmlns:a="http://schemas.openxmlformats.org/drawingml/2006/main" xmlns:r="http://schemas.openxmlformats.org/officeDocument/2006/relationships" xmlns:p="http://schemas.openxmlformats.org/presentationml/2006/main" show="0">
   <p:cSld>
     <p:spTree>
       <p:nvGrpSpPr>
@@ -3687,6 +4011,10 @@
           <a:bodyPr/>
           <a:lstStyle/>
           <a:p>
+            <a:r>
+              <a:rPr lang="de-DE" dirty="0"/>
+              <a:t>The Solution = </a:t>
+            </a:r>
             <a:r>
               <a:rPr dirty="0"/>
               <a:t>The Paradigm Shift</a:t>
@@ -3985,7 +4313,13 @@
   <p:cSld>
     <p:spTree>
       <p:nvGrpSpPr>
-        <p:cNvPr id="1" name=""/>
+        <p:cNvPr id="1" name="">
+          <a:extLst>
+            <a:ext uri="{FF2B5EF4-FFF2-40B4-BE49-F238E27FC236}">
+              <a16:creationId xmlns:a16="http://schemas.microsoft.com/office/drawing/2014/main" id="{186E6287-8659-7C15-D37F-9C66AB86EEF9}"/>
+            </a:ext>
+          </a:extLst>
+        </p:cNvPr>
         <p:cNvGrpSpPr/>
         <p:nvPr/>
       </p:nvGrpSpPr>
@@ -3999,7 +4333,13 @@
       </p:grpSpPr>
       <p:sp>
         <p:nvSpPr>
-          <p:cNvPr id="2" name="Title 1"/>
+          <p:cNvPr id="2" name="Title 1">
+            <a:extLst>
+              <a:ext uri="{FF2B5EF4-FFF2-40B4-BE49-F238E27FC236}">
+                <a16:creationId xmlns:a16="http://schemas.microsoft.com/office/drawing/2014/main" id="{6CC1D5CA-BCB5-926E-66CC-7B0673AA3807}"/>
+              </a:ext>
+            </a:extLst>
+          </p:cNvPr>
           <p:cNvSpPr>
             <a:spLocks noGrp="1"/>
           </p:cNvSpPr>
@@ -4014,314 +4354,250 @@
           <a:p>
             <a:r>
               <a:rPr lang="de-DE" dirty="0"/>
-              <a:t>Idea </a:t>
-            </a:r>
-            <a:r>
-              <a:rPr lang="de-DE" dirty="0" err="1"/>
-              <a:t>for</a:t>
-            </a:r>
-            <a:r>
-              <a:rPr lang="de-DE" dirty="0"/>
-              <a:t> </a:t>
-            </a:r>
-            <a:r>
-              <a:rPr lang="de-DE" dirty="0" err="1"/>
-              <a:t>Standardization</a:t>
-            </a:r>
-            <a:r>
-              <a:rPr lang="de-DE" dirty="0"/>
-              <a:t>: </a:t>
+              <a:t>The Solution = </a:t>
             </a:r>
             <a:r>
               <a:rPr dirty="0"/>
-              <a:t>OSCAL4Rail</a:t>
-            </a:r>
-          </a:p>
-        </p:txBody>
-      </p:sp>
-      <p:sp>
-        <p:nvSpPr>
-          <p:cNvPr id="3" name="Content Placeholder 2"/>
-          <p:cNvSpPr>
-            <a:spLocks noGrp="1"/>
-          </p:cNvSpPr>
-          <p:nvPr>
-            <p:ph idx="1"/>
-          </p:nvPr>
-        </p:nvSpPr>
+              <a:t>The Paradigm Shift</a:t>
+            </a:r>
+          </a:p>
+        </p:txBody>
+      </p:sp>
+      <p:pic>
+        <p:nvPicPr>
+          <p:cNvPr id="5" name="Picture 4">
+            <a:extLst>
+              <a:ext uri="{FF2B5EF4-FFF2-40B4-BE49-F238E27FC236}">
+                <a16:creationId xmlns:a16="http://schemas.microsoft.com/office/drawing/2014/main" id="{A8C322CB-DFCD-E17A-C237-60C627187291}"/>
+              </a:ext>
+            </a:extLst>
+          </p:cNvPr>
+          <p:cNvPicPr>
+            <a:picLocks noChangeAspect="1"/>
+          </p:cNvPicPr>
+          <p:nvPr/>
+        </p:nvPicPr>
+        <p:blipFill>
+          <a:blip r:embed="rId2"/>
+          <a:stretch>
+            <a:fillRect/>
+          </a:stretch>
+        </p:blipFill>
         <p:spPr>
           <a:xfrm>
-            <a:off x="838200" y="1825625"/>
-            <a:ext cx="10998200" cy="4351338"/>
+            <a:off x="559985" y="1663049"/>
+            <a:ext cx="2859228" cy="1012540"/>
           </a:xfrm>
-        </p:spPr>
-        <p:txBody>
-          <a:bodyPr>
-            <a:normAutofit/>
-          </a:bodyPr>
-          <a:lstStyle/>
-          <a:p>
-            <a:pPr marL="0" indent="0">
-              <a:buNone/>
-            </a:pPr>
-            <a:r>
-              <a:rPr dirty="0"/>
-              <a:t>Lightweight profile of NIST OSCAL for railway regulations</a:t>
-            </a:r>
-          </a:p>
-          <a:p>
-            <a:endParaRPr dirty="0"/>
-          </a:p>
-          <a:p>
-            <a:pPr marL="0" indent="0">
-              <a:buNone/>
-            </a:pPr>
-            <a:r>
-              <a:rPr dirty="0"/>
-              <a:t>Catalog </a:t>
-            </a:r>
-            <a:r>
-              <a:rPr lang="de-DE" dirty="0"/>
-              <a:t>		</a:t>
-            </a:r>
-            <a:r>
-              <a:rPr dirty="0"/>
-              <a:t> </a:t>
-            </a:r>
-            <a:r>
-              <a:rPr lang="de-DE" dirty="0"/>
-              <a:t>	</a:t>
-            </a:r>
-            <a:r>
-              <a:rPr dirty="0"/>
-              <a:t>Groups </a:t>
-            </a:r>
-            <a:r>
-              <a:rPr lang="de-DE" dirty="0"/>
-              <a:t>				</a:t>
-            </a:r>
-            <a:r>
-              <a:rPr dirty="0"/>
-              <a:t>Controls</a:t>
-            </a:r>
-          </a:p>
-          <a:p>
-            <a:pPr marL="0" indent="0">
-              <a:buNone/>
-            </a:pPr>
-            <a:endParaRPr lang="de-DE" dirty="0"/>
-          </a:p>
-          <a:p>
-            <a:pPr marL="0" indent="0">
-              <a:buNone/>
-            </a:pPr>
-            <a:r>
-              <a:rPr dirty="0"/>
-              <a:t>                  </a:t>
-            </a:r>
-            <a:r>
-              <a:rPr lang="de-DE" dirty="0"/>
-              <a:t>							</a:t>
-            </a:r>
-            <a:r>
-              <a:rPr dirty="0"/>
-              <a:t>One rule (verbatim</a:t>
-            </a:r>
-            <a:r>
-              <a:rPr lang="de-CH" dirty="0"/>
-              <a:t> </a:t>
-            </a:r>
-            <a:r>
-              <a:rPr dirty="0"/>
-              <a:t>text)</a:t>
-            </a:r>
-          </a:p>
-          <a:p>
-            <a:pPr marL="0" indent="0">
-              <a:buNone/>
-            </a:pPr>
-            <a:r>
-              <a:rPr dirty="0"/>
-              <a:t>          </a:t>
-            </a:r>
-            <a:r>
-              <a:rPr lang="de-DE" dirty="0"/>
-              <a:t>	</a:t>
-            </a:r>
-            <a:r>
-              <a:rPr dirty="0"/>
-              <a:t> </a:t>
-            </a:r>
-            <a:r>
-              <a:rPr lang="de-DE" dirty="0"/>
-              <a:t>				</a:t>
-            </a:r>
-            <a:r>
-              <a:rPr dirty="0"/>
-              <a:t>One chapter</a:t>
-            </a:r>
-          </a:p>
-          <a:p>
-            <a:pPr marL="0" indent="0">
-              <a:buNone/>
-            </a:pPr>
-            <a:r>
-              <a:rPr dirty="0"/>
-              <a:t> </a:t>
-            </a:r>
-            <a:r>
-              <a:rPr lang="de-DE" dirty="0"/>
-              <a:t>		</a:t>
-            </a:r>
-            <a:r>
-              <a:rPr dirty="0"/>
-              <a:t>One regulation</a:t>
-            </a:r>
-          </a:p>
-          <a:p>
-            <a:endParaRPr dirty="0"/>
-          </a:p>
-        </p:txBody>
-      </p:sp>
-      <p:sp>
-        <p:nvSpPr>
-          <p:cNvPr id="6" name="Bent Up Arrow 5">
-            <a:extLst>
-              <a:ext uri="{FF2B5EF4-FFF2-40B4-BE49-F238E27FC236}">
-                <a16:creationId xmlns:a16="http://schemas.microsoft.com/office/drawing/2014/main" id="{C9A8700C-4511-6B02-6C20-FEE56495E247}"/>
-              </a:ext>
-            </a:extLst>
-          </p:cNvPr>
-          <p:cNvSpPr/>
-          <p:nvPr/>
-        </p:nvSpPr>
-        <p:spPr>
-          <a:xfrm rot="5400000">
-            <a:off x="1638539" y="4420602"/>
-            <a:ext cx="951471" cy="914400"/>
-          </a:xfrm>
-          <a:prstGeom prst="bentUpArrow">
+          <a:prstGeom prst="rect">
             <a:avLst/>
           </a:prstGeom>
         </p:spPr>
-        <p:style>
-          <a:lnRef idx="2">
-            <a:schemeClr val="accent1">
-              <a:shade val="15000"/>
-            </a:schemeClr>
-          </a:lnRef>
-          <a:fillRef idx="1">
-            <a:schemeClr val="accent1"/>
-          </a:fillRef>
-          <a:effectRef idx="0">
-            <a:schemeClr val="accent1"/>
-          </a:effectRef>
-          <a:fontRef idx="minor">
-            <a:schemeClr val="lt1"/>
-          </a:fontRef>
-        </p:style>
-        <p:txBody>
-          <a:bodyPr rtlCol="0" anchor="ctr"/>
-          <a:lstStyle/>
-          <a:p>
-            <a:pPr algn="ctr"/>
-            <a:endParaRPr lang="de-DE" dirty="0"/>
-          </a:p>
-        </p:txBody>
-      </p:sp>
-      <p:sp>
-        <p:nvSpPr>
-          <p:cNvPr id="7" name="Bent Up Arrow 6">
-            <a:extLst>
-              <a:ext uri="{FF2B5EF4-FFF2-40B4-BE49-F238E27FC236}">
-                <a16:creationId xmlns:a16="http://schemas.microsoft.com/office/drawing/2014/main" id="{7B313AC3-B649-BEE5-6F2B-B5EDD2283236}"/>
-              </a:ext>
-            </a:extLst>
-          </p:cNvPr>
-          <p:cNvSpPr/>
+      </p:pic>
+      <p:pic>
+        <p:nvPicPr>
+          <p:cNvPr id="6" name="Picture 5" descr="BSI - IT-Grundschutz">
+            <a:extLst>
+              <a:ext uri="{FF2B5EF4-FFF2-40B4-BE49-F238E27FC236}">
+                <a16:creationId xmlns:a16="http://schemas.microsoft.com/office/drawing/2014/main" id="{3AC0DE79-2640-A765-0E0E-E3D994EBE159}"/>
+              </a:ext>
+            </a:extLst>
+          </p:cNvPr>
+          <p:cNvPicPr>
+            <a:picLocks noChangeAspect="1"/>
+          </p:cNvPicPr>
           <p:nvPr/>
-        </p:nvSpPr>
+        </p:nvPicPr>
+        <p:blipFill>
+          <a:blip r:embed="rId3"/>
+          <a:stretch>
+            <a:fillRect/>
+          </a:stretch>
+        </p:blipFill>
         <p:spPr>
-          <a:xfrm rot="5400000">
-            <a:off x="4373740" y="3828642"/>
-            <a:ext cx="951472" cy="1089454"/>
+          <a:xfrm>
+            <a:off x="5574861" y="2765725"/>
+            <a:ext cx="1624822" cy="977535"/>
           </a:xfrm>
-          <a:prstGeom prst="bentUpArrow">
+          <a:prstGeom prst="rect">
             <a:avLst/>
           </a:prstGeom>
         </p:spPr>
-        <p:style>
-          <a:lnRef idx="2">
-            <a:schemeClr val="accent1">
-              <a:shade val="15000"/>
-            </a:schemeClr>
-          </a:lnRef>
-          <a:fillRef idx="1">
-            <a:schemeClr val="accent1"/>
-          </a:fillRef>
-          <a:effectRef idx="0">
-            <a:schemeClr val="accent1"/>
-          </a:effectRef>
-          <a:fontRef idx="minor">
-            <a:schemeClr val="lt1"/>
-          </a:fontRef>
-        </p:style>
-        <p:txBody>
-          <a:bodyPr rtlCol="0" anchor="ctr"/>
-          <a:lstStyle/>
-          <a:p>
-            <a:pPr algn="ctr"/>
-            <a:endParaRPr lang="de-DE" dirty="0"/>
-          </a:p>
-        </p:txBody>
-      </p:sp>
-      <p:sp>
-        <p:nvSpPr>
-          <p:cNvPr id="8" name="Bent Up Arrow 7">
-            <a:extLst>
-              <a:ext uri="{FF2B5EF4-FFF2-40B4-BE49-F238E27FC236}">
-                <a16:creationId xmlns:a16="http://schemas.microsoft.com/office/drawing/2014/main" id="{C6C33A61-1A79-E04A-E3DB-152CB9AA07C4}"/>
-              </a:ext>
-            </a:extLst>
-          </p:cNvPr>
-          <p:cNvSpPr/>
+      </p:pic>
+      <p:pic>
+        <p:nvPicPr>
+          <p:cNvPr id="7" name="Picture 6" descr="UIC and its members begin work on the OpenRail Foundation ...">
+            <a:extLst>
+              <a:ext uri="{FF2B5EF4-FFF2-40B4-BE49-F238E27FC236}">
+                <a16:creationId xmlns:a16="http://schemas.microsoft.com/office/drawing/2014/main" id="{1C43864A-07E3-7720-1847-0980898D137E}"/>
+              </a:ext>
+            </a:extLst>
+          </p:cNvPr>
+          <p:cNvPicPr>
+            <a:picLocks noChangeAspect="1"/>
+          </p:cNvPicPr>
           <p:nvPr/>
-        </p:nvSpPr>
+        </p:nvPicPr>
+        <p:blipFill>
+          <a:blip r:embed="rId4"/>
+          <a:stretch>
+            <a:fillRect/>
+          </a:stretch>
+        </p:blipFill>
         <p:spPr>
-          <a:xfrm rot="5400000">
-            <a:off x="7592651" y="3667146"/>
-            <a:ext cx="432607" cy="668295"/>
+          <a:xfrm>
+            <a:off x="4724400" y="4076136"/>
+            <a:ext cx="1371600" cy="939800"/>
           </a:xfrm>
-          <a:prstGeom prst="bentUpArrow">
+          <a:prstGeom prst="rect">
             <a:avLst/>
           </a:prstGeom>
         </p:spPr>
-        <p:style>
-          <a:lnRef idx="2">
-            <a:schemeClr val="accent1">
-              <a:shade val="15000"/>
-            </a:schemeClr>
-          </a:lnRef>
-          <a:fillRef idx="1">
-            <a:schemeClr val="accent1"/>
-          </a:fillRef>
-          <a:effectRef idx="0">
-            <a:schemeClr val="accent1"/>
-          </a:effectRef>
-          <a:fontRef idx="minor">
-            <a:schemeClr val="lt1"/>
-          </a:fontRef>
-        </p:style>
-        <p:txBody>
-          <a:bodyPr rtlCol="0" anchor="ctr"/>
-          <a:lstStyle/>
-          <a:p>
-            <a:pPr algn="ctr"/>
-            <a:endParaRPr lang="de-DE" dirty="0"/>
+      </p:pic>
+      <p:sp>
+        <p:nvSpPr>
+          <p:cNvPr id="10" name="TextBox 9">
+            <a:extLst>
+              <a:ext uri="{FF2B5EF4-FFF2-40B4-BE49-F238E27FC236}">
+                <a16:creationId xmlns:a16="http://schemas.microsoft.com/office/drawing/2014/main" id="{67E40DA4-615D-A1C3-3EE2-2407F5616E79}"/>
+              </a:ext>
+            </a:extLst>
+          </p:cNvPr>
+          <p:cNvSpPr txBox="1"/>
+          <p:nvPr/>
+        </p:nvSpPr>
+        <p:spPr>
+          <a:xfrm>
+            <a:off x="3521676" y="1594022"/>
+            <a:ext cx="4732638" cy="923330"/>
+          </a:xfrm>
+          <a:prstGeom prst="rect">
+            <a:avLst/>
+          </a:prstGeom>
+          <a:noFill/>
+        </p:spPr>
+        <p:txBody>
+          <a:bodyPr wrap="square" rtlCol="0">
+            <a:spAutoFit/>
+          </a:bodyPr>
+          <a:lstStyle/>
+          <a:p>
+            <a:r>
+              <a:rPr lang="de-DE" sz="5400" dirty="0"/>
+              <a:t>Does </a:t>
+            </a:r>
+            <a:r>
+              <a:rPr lang="de-DE" sz="5400" dirty="0" err="1"/>
+              <a:t>it</a:t>
+            </a:r>
+            <a:endParaRPr lang="de-DE" sz="5400" dirty="0"/>
+          </a:p>
+        </p:txBody>
+      </p:sp>
+      <p:sp>
+        <p:nvSpPr>
+          <p:cNvPr id="11" name="TextBox 10">
+            <a:extLst>
+              <a:ext uri="{FF2B5EF4-FFF2-40B4-BE49-F238E27FC236}">
+                <a16:creationId xmlns:a16="http://schemas.microsoft.com/office/drawing/2014/main" id="{5894633E-81FA-116C-2333-9EF4790A89FA}"/>
+              </a:ext>
+            </a:extLst>
+          </p:cNvPr>
+          <p:cNvSpPr txBox="1"/>
+          <p:nvPr/>
+        </p:nvSpPr>
+        <p:spPr>
+          <a:xfrm>
+            <a:off x="7459362" y="2675589"/>
+            <a:ext cx="4732638" cy="923330"/>
+          </a:xfrm>
+          <a:prstGeom prst="rect">
+            <a:avLst/>
+          </a:prstGeom>
+          <a:noFill/>
+        </p:spPr>
+        <p:txBody>
+          <a:bodyPr wrap="square" rtlCol="0">
+            <a:spAutoFit/>
+          </a:bodyPr>
+          <a:lstStyle/>
+          <a:p>
+            <a:r>
+              <a:rPr lang="de-DE" sz="5400" dirty="0" err="1"/>
+              <a:t>Adopted</a:t>
+            </a:r>
+            <a:r>
+              <a:rPr lang="de-DE" sz="5400" dirty="0"/>
+              <a:t> </a:t>
+            </a:r>
+            <a:r>
+              <a:rPr lang="de-DE" sz="5400" dirty="0" err="1"/>
+              <a:t>it</a:t>
+            </a:r>
+            <a:endParaRPr lang="de-DE" sz="5400" dirty="0"/>
+          </a:p>
+        </p:txBody>
+      </p:sp>
+      <p:sp>
+        <p:nvSpPr>
+          <p:cNvPr id="12" name="TextBox 11">
+            <a:extLst>
+              <a:ext uri="{FF2B5EF4-FFF2-40B4-BE49-F238E27FC236}">
+                <a16:creationId xmlns:a16="http://schemas.microsoft.com/office/drawing/2014/main" id="{D723C0C1-AB04-7301-57E6-4894BE3752E0}"/>
+              </a:ext>
+            </a:extLst>
+          </p:cNvPr>
+          <p:cNvSpPr txBox="1"/>
+          <p:nvPr/>
+        </p:nvSpPr>
+        <p:spPr>
+          <a:xfrm>
+            <a:off x="838200" y="5194951"/>
+            <a:ext cx="10515600" cy="923330"/>
+          </a:xfrm>
+          <a:prstGeom prst="rect">
+            <a:avLst/>
+          </a:prstGeom>
+          <a:noFill/>
+        </p:spPr>
+        <p:txBody>
+          <a:bodyPr wrap="square" rtlCol="0">
+            <a:spAutoFit/>
+          </a:bodyPr>
+          <a:lstStyle/>
+          <a:p>
+            <a:r>
+              <a:rPr lang="de-DE" sz="5400" dirty="0" err="1"/>
+              <a:t>We</a:t>
+            </a:r>
+            <a:r>
+              <a:rPr lang="de-DE" sz="5400" dirty="0"/>
+              <a:t> bring </a:t>
+            </a:r>
+            <a:r>
+              <a:rPr lang="de-DE" sz="5400" dirty="0" err="1"/>
+              <a:t>it</a:t>
+            </a:r>
+            <a:r>
+              <a:rPr lang="de-DE" sz="5400" dirty="0"/>
+              <a:t> </a:t>
+            </a:r>
+            <a:r>
+              <a:rPr lang="de-DE" sz="5400" dirty="0" err="1"/>
+              <a:t>to</a:t>
+            </a:r>
+            <a:r>
+              <a:rPr lang="de-DE" sz="5400" dirty="0"/>
+              <a:t> Rail – OSCAL4Rail</a:t>
+            </a:r>
           </a:p>
         </p:txBody>
       </p:sp>
     </p:spTree>
+    <p:extLst>
+      <p:ext uri="{BB962C8B-B14F-4D97-AF65-F5344CB8AC3E}">
+        <p14:creationId xmlns:p14="http://schemas.microsoft.com/office/powerpoint/2010/main" val="1930883339"/>
+      </p:ext>
+    </p:extLst>
   </p:cSld>
   <p:clrMapOvr>
     <a:masterClrMapping/>
@@ -4362,8 +4638,28 @@
           <a:lstStyle/>
           <a:p>
             <a:r>
+              <a:rPr lang="de-DE" dirty="0"/>
+              <a:t>Idea </a:t>
+            </a:r>
+            <a:r>
+              <a:rPr lang="de-DE" dirty="0" err="1"/>
+              <a:t>for</a:t>
+            </a:r>
+            <a:r>
+              <a:rPr lang="de-DE" dirty="0"/>
+              <a:t> </a:t>
+            </a:r>
+            <a:r>
+              <a:rPr lang="de-DE" dirty="0" err="1"/>
+              <a:t>Standardization</a:t>
+            </a:r>
+            <a:r>
+              <a:rPr lang="de-DE" dirty="0"/>
+              <a:t>: </a:t>
+            </a:r>
+            <a:r>
               <a:rPr dirty="0"/>
-              <a:t>Proof of Concept: BS-KI (Switzerland)</a:t>
+              <a:t>OSCAL4Rail</a:t>
             </a:r>
           </a:p>
         </p:txBody>
@@ -4378,10 +4674,15 @@
             <p:ph idx="1"/>
           </p:nvPr>
         </p:nvSpPr>
-        <p:spPr/>
+        <p:spPr>
+          <a:xfrm>
+            <a:off x="838200" y="1825625"/>
+            <a:ext cx="10998200" cy="4351338"/>
+          </a:xfrm>
+        </p:spPr>
         <p:txBody>
           <a:bodyPr>
-            <a:normAutofit fontScale="85000" lnSpcReduction="20000"/>
+            <a:normAutofit/>
           </a:bodyPr>
           <a:lstStyle/>
           <a:p>
@@ -4389,86 +4690,292 @@
               <a:buNone/>
             </a:pPr>
             <a:r>
-              <a:rPr dirty="0" err="1"/>
-              <a:t>Branchenstandard</a:t>
-            </a:r>
-            <a:r>
               <a:rPr dirty="0"/>
-              <a:t> </a:t>
-            </a:r>
-            <a:r>
-              <a:rPr dirty="0" err="1"/>
-              <a:t>Kundeninformation</a:t>
-            </a:r>
+              <a:t>Lightweight profile of NIST OSCAL</a:t>
+            </a:r>
+            <a:r>
+              <a:rPr lang="de-DE" dirty="0"/>
+              <a:t> (</a:t>
+            </a:r>
+            <a:r>
+              <a:rPr lang="en-DE" dirty="0"/>
+              <a:t>Open Security Controls Assessment Language)</a:t>
+            </a:r>
+            <a:r>
+              <a:rPr dirty="0"/>
+              <a:t> for railway regulations</a:t>
+            </a:r>
+          </a:p>
+          <a:p>
             <a:endParaRPr dirty="0"/>
           </a:p>
           <a:p>
-            <a:r>
-              <a:rPr dirty="0"/>
-              <a:t>44 rules × 6 channels × 4 transport modes</a:t>
+            <a:pPr marL="0" indent="0">
+              <a:buNone/>
+            </a:pPr>
+            <a:endParaRPr dirty="0"/>
+          </a:p>
+        </p:txBody>
+      </p:sp>
+      <p:sp>
+        <p:nvSpPr>
+          <p:cNvPr id="4" name="Rectangle 3">
+            <a:extLst>
+              <a:ext uri="{FF2B5EF4-FFF2-40B4-BE49-F238E27FC236}">
+                <a16:creationId xmlns:a16="http://schemas.microsoft.com/office/drawing/2014/main" id="{D431E05F-1602-EF34-A6A6-7CB030B9E4B0}"/>
+              </a:ext>
+            </a:extLst>
+          </p:cNvPr>
+          <p:cNvSpPr/>
+          <p:nvPr/>
+        </p:nvSpPr>
+        <p:spPr>
+          <a:xfrm>
+            <a:off x="935180" y="2756541"/>
+            <a:ext cx="7481455" cy="852055"/>
+          </a:xfrm>
+          <a:prstGeom prst="rect">
+            <a:avLst/>
+          </a:prstGeom>
+        </p:spPr>
+        <p:style>
+          <a:lnRef idx="2">
+            <a:schemeClr val="accent1">
+              <a:shade val="15000"/>
+            </a:schemeClr>
+          </a:lnRef>
+          <a:fillRef idx="1">
+            <a:schemeClr val="accent1"/>
+          </a:fillRef>
+          <a:effectRef idx="0">
+            <a:schemeClr val="accent1"/>
+          </a:effectRef>
+          <a:fontRef idx="minor">
+            <a:schemeClr val="lt1"/>
+          </a:fontRef>
+        </p:style>
+        <p:txBody>
+          <a:bodyPr rtlCol="0" anchor="ctr"/>
+          <a:lstStyle/>
+          <a:p>
+            <a:pPr algn="ctr"/>
+            <a:r>
+              <a:rPr lang="en-GB" sz="2800" dirty="0" err="1"/>
+              <a:t>Catalog</a:t>
+            </a:r>
+            <a:r>
+              <a:rPr lang="en-GB" dirty="0"/>
+              <a:t>				One regulation</a:t>
             </a:r>
             <a:endParaRPr lang="de-DE" dirty="0"/>
           </a:p>
-          <a:p>
-            <a:endParaRPr dirty="0"/>
-          </a:p>
-          <a:p>
-            <a:pPr marL="0" indent="0">
-              <a:buNone/>
-            </a:pPr>
-            <a:r>
-              <a:rPr dirty="0"/>
-              <a:t>What we did:</a:t>
+        </p:txBody>
+      </p:sp>
+      <p:sp>
+        <p:nvSpPr>
+          <p:cNvPr id="5" name="Rectangle 4">
+            <a:extLst>
+              <a:ext uri="{FF2B5EF4-FFF2-40B4-BE49-F238E27FC236}">
+                <a16:creationId xmlns:a16="http://schemas.microsoft.com/office/drawing/2014/main" id="{BC23DA76-E8F1-4E8D-DF4A-B71F0221E08D}"/>
+              </a:ext>
+            </a:extLst>
+          </p:cNvPr>
+          <p:cNvSpPr/>
+          <p:nvPr/>
+        </p:nvSpPr>
+        <p:spPr>
+          <a:xfrm>
+            <a:off x="2355272" y="4001294"/>
+            <a:ext cx="7481455" cy="852055"/>
+          </a:xfrm>
+          <a:prstGeom prst="rect">
+            <a:avLst/>
+          </a:prstGeom>
+          <a:solidFill>
+            <a:schemeClr val="tx2">
+              <a:lumMod val="50000"/>
+              <a:lumOff val="50000"/>
+            </a:schemeClr>
+          </a:solidFill>
+        </p:spPr>
+        <p:style>
+          <a:lnRef idx="2">
+            <a:schemeClr val="accent1">
+              <a:shade val="15000"/>
+            </a:schemeClr>
+          </a:lnRef>
+          <a:fillRef idx="1">
+            <a:schemeClr val="accent1"/>
+          </a:fillRef>
+          <a:effectRef idx="0">
+            <a:schemeClr val="accent1"/>
+          </a:effectRef>
+          <a:fontRef idx="minor">
+            <a:schemeClr val="lt1"/>
+          </a:fontRef>
+        </p:style>
+        <p:txBody>
+          <a:bodyPr rtlCol="0" anchor="ctr"/>
+          <a:lstStyle/>
+          <a:p>
+            <a:pPr algn="ctr"/>
+            <a:r>
+              <a:rPr lang="en-GB" sz="2800" dirty="0"/>
+              <a:t>Groups</a:t>
+            </a:r>
+            <a:r>
+              <a:rPr lang="en-GB" dirty="0"/>
+              <a:t>				One chapter</a:t>
+            </a:r>
+          </a:p>
+        </p:txBody>
+      </p:sp>
+      <p:sp>
+        <p:nvSpPr>
+          <p:cNvPr id="9" name="Rectangle 8">
+            <a:extLst>
+              <a:ext uri="{FF2B5EF4-FFF2-40B4-BE49-F238E27FC236}">
+                <a16:creationId xmlns:a16="http://schemas.microsoft.com/office/drawing/2014/main" id="{9F7F1051-31FC-7502-A717-2C2C9DA88C1D}"/>
+              </a:ext>
+            </a:extLst>
+          </p:cNvPr>
+          <p:cNvSpPr/>
+          <p:nvPr/>
+        </p:nvSpPr>
+        <p:spPr>
+          <a:xfrm>
+            <a:off x="4354945" y="5246047"/>
+            <a:ext cx="7481455" cy="852055"/>
+          </a:xfrm>
+          <a:prstGeom prst="rect">
+            <a:avLst/>
+          </a:prstGeom>
+          <a:solidFill>
+            <a:schemeClr val="accent1">
+              <a:lumMod val="40000"/>
+              <a:lumOff val="60000"/>
+            </a:schemeClr>
+          </a:solidFill>
+        </p:spPr>
+        <p:style>
+          <a:lnRef idx="2">
+            <a:schemeClr val="accent1">
+              <a:shade val="15000"/>
+            </a:schemeClr>
+          </a:lnRef>
+          <a:fillRef idx="1">
+            <a:schemeClr val="accent1"/>
+          </a:fillRef>
+          <a:effectRef idx="0">
+            <a:schemeClr val="accent1"/>
+          </a:effectRef>
+          <a:fontRef idx="minor">
+            <a:schemeClr val="lt1"/>
+          </a:fontRef>
+        </p:style>
+        <p:txBody>
+          <a:bodyPr rtlCol="0" anchor="ctr"/>
+          <a:lstStyle/>
+          <a:p>
+            <a:pPr algn="ctr"/>
+            <a:r>
+              <a:rPr lang="en-GB" sz="2800" dirty="0"/>
+              <a:t>Controls</a:t>
+            </a:r>
+            <a:r>
+              <a:rPr lang="en-GB" sz="2000" dirty="0"/>
+              <a:t>	</a:t>
+            </a:r>
+            <a:r>
+              <a:rPr lang="en-GB" dirty="0"/>
+              <a:t>			One rule, verbatim text</a:t>
             </a:r>
             <a:endParaRPr lang="de-DE" dirty="0"/>
           </a:p>
-          <a:p>
-            <a:r>
-              <a:rPr dirty="0"/>
-              <a:t>Excel matrix → parsed deterministically</a:t>
-            </a:r>
-          </a:p>
-          <a:p>
-            <a:r>
-              <a:rPr dirty="0"/>
-              <a:t>PDF (64 pages) → chapter-level text extraction</a:t>
-            </a:r>
-          </a:p>
-          <a:p>
-            <a:r>
-              <a:rPr dirty="0"/>
-              <a:t>Combined → one OSCAL Catalog YAML</a:t>
-            </a:r>
-          </a:p>
-          <a:p>
-            <a:r>
-              <a:rPr dirty="0"/>
-              <a:t>Validated against NIST JSON Schema ✅</a:t>
-            </a:r>
-          </a:p>
-          <a:p>
-            <a:endParaRPr dirty="0"/>
-          </a:p>
-          <a:p>
-            <a:pPr marL="0" indent="0">
-              <a:buNone/>
-            </a:pPr>
-            <a:r>
-              <a:rPr dirty="0"/>
-              <a:t>What changed between 2024 and 2025?</a:t>
-            </a:r>
-          </a:p>
-          <a:p>
-            <a:pPr marL="0" indent="0">
-              <a:buNone/>
-            </a:pPr>
-            <a:r>
-              <a:rPr dirty="0"/>
-              <a:t>→ git diff. Done.</a:t>
-            </a:r>
-          </a:p>
-        </p:txBody>
-      </p:sp>
+        </p:txBody>
+      </p:sp>
+      <p:cxnSp>
+        <p:nvCxnSpPr>
+          <p:cNvPr id="11" name="Elbow Connector 10">
+            <a:extLst>
+              <a:ext uri="{FF2B5EF4-FFF2-40B4-BE49-F238E27FC236}">
+                <a16:creationId xmlns:a16="http://schemas.microsoft.com/office/drawing/2014/main" id="{2CBE14B5-36B3-E2B8-0BD2-06162B7F1095}"/>
+              </a:ext>
+            </a:extLst>
+          </p:cNvPr>
+          <p:cNvCxnSpPr>
+            <a:endCxn id="5" idx="1"/>
+          </p:cNvCxnSpPr>
+          <p:nvPr/>
+        </p:nvCxnSpPr>
+        <p:spPr>
+          <a:xfrm>
+            <a:off x="1402773" y="3608596"/>
+            <a:ext cx="952499" cy="818726"/>
+          </a:xfrm>
+          <a:prstGeom prst="bentConnector3">
+            <a:avLst/>
+          </a:prstGeom>
+          <a:ln>
+            <a:tailEnd type="triangle"/>
+          </a:ln>
+        </p:spPr>
+        <p:style>
+          <a:lnRef idx="2">
+            <a:schemeClr val="accent1"/>
+          </a:lnRef>
+          <a:fillRef idx="0">
+            <a:schemeClr val="accent1"/>
+          </a:fillRef>
+          <a:effectRef idx="1">
+            <a:schemeClr val="accent1"/>
+          </a:effectRef>
+          <a:fontRef idx="minor">
+            <a:schemeClr val="tx1"/>
+          </a:fontRef>
+        </p:style>
+      </p:cxnSp>
+      <p:cxnSp>
+        <p:nvCxnSpPr>
+          <p:cNvPr id="12" name="Elbow Connector 11">
+            <a:extLst>
+              <a:ext uri="{FF2B5EF4-FFF2-40B4-BE49-F238E27FC236}">
+                <a16:creationId xmlns:a16="http://schemas.microsoft.com/office/drawing/2014/main" id="{E5EFF5FC-A405-15CB-B5E9-6C93A99CF0BC}"/>
+              </a:ext>
+            </a:extLst>
+          </p:cNvPr>
+          <p:cNvCxnSpPr>
+            <a:cxnSpLocks/>
+          </p:cNvCxnSpPr>
+          <p:nvPr/>
+        </p:nvCxnSpPr>
+        <p:spPr>
+          <a:xfrm>
+            <a:off x="2729346" y="4854142"/>
+            <a:ext cx="1625599" cy="807542"/>
+          </a:xfrm>
+          <a:prstGeom prst="bentConnector3">
+            <a:avLst/>
+          </a:prstGeom>
+          <a:ln>
+            <a:tailEnd type="triangle"/>
+          </a:ln>
+        </p:spPr>
+        <p:style>
+          <a:lnRef idx="2">
+            <a:schemeClr val="accent1"/>
+          </a:lnRef>
+          <a:fillRef idx="0">
+            <a:schemeClr val="accent1"/>
+          </a:fillRef>
+          <a:effectRef idx="1">
+            <a:schemeClr val="accent1"/>
+          </a:effectRef>
+          <a:fontRef idx="minor">
+            <a:schemeClr val="tx1"/>
+          </a:fontRef>
+        </p:style>
+      </p:cxnSp>
     </p:spTree>
   </p:cSld>
   <p:clrMapOvr>
@@ -4478,6 +4985,724 @@
 </file>
 
 <file path=ppt/slides/slide6.xml><?xml version="1.0" encoding="utf-8"?>
+<p:sld xmlns:a="http://schemas.openxmlformats.org/drawingml/2006/main" xmlns:r="http://schemas.openxmlformats.org/officeDocument/2006/relationships" xmlns:p="http://schemas.openxmlformats.org/presentationml/2006/main" show="0">
+  <p:cSld>
+    <p:spTree>
+      <p:nvGrpSpPr>
+        <p:cNvPr id="1" name=""/>
+        <p:cNvGrpSpPr/>
+        <p:nvPr/>
+      </p:nvGrpSpPr>
+      <p:grpSpPr>
+        <a:xfrm>
+          <a:off x="0" y="0"/>
+          <a:ext cx="0" cy="0"/>
+          <a:chOff x="0" y="0"/>
+          <a:chExt cx="0" cy="0"/>
+        </a:xfrm>
+      </p:grpSpPr>
+      <p:sp>
+        <p:nvSpPr>
+          <p:cNvPr id="2" name="Title 1"/>
+          <p:cNvSpPr>
+            <a:spLocks noGrp="1"/>
+          </p:cNvSpPr>
+          <p:nvPr>
+            <p:ph type="title"/>
+          </p:nvPr>
+        </p:nvSpPr>
+        <p:spPr/>
+        <p:txBody>
+          <a:bodyPr/>
+          <a:lstStyle/>
+          <a:p>
+            <a:r>
+              <a:rPr dirty="0"/>
+              <a:t>Proof of Concept: BS-KI (Switzerland)</a:t>
+            </a:r>
+          </a:p>
+        </p:txBody>
+      </p:sp>
+      <p:sp>
+        <p:nvSpPr>
+          <p:cNvPr id="3" name="Content Placeholder 2"/>
+          <p:cNvSpPr>
+            <a:spLocks noGrp="1"/>
+          </p:cNvSpPr>
+          <p:nvPr>
+            <p:ph idx="1"/>
+          </p:nvPr>
+        </p:nvSpPr>
+        <p:spPr/>
+        <p:txBody>
+          <a:bodyPr>
+            <a:normAutofit fontScale="85000" lnSpcReduction="20000"/>
+          </a:bodyPr>
+          <a:lstStyle/>
+          <a:p>
+            <a:pPr marL="0" indent="0">
+              <a:buNone/>
+            </a:pPr>
+            <a:r>
+              <a:rPr dirty="0" err="1"/>
+              <a:t>Branchenstandard</a:t>
+            </a:r>
+            <a:r>
+              <a:rPr dirty="0"/>
+              <a:t> </a:t>
+            </a:r>
+            <a:r>
+              <a:rPr dirty="0" err="1"/>
+              <a:t>Kundeninformation</a:t>
+            </a:r>
+            <a:endParaRPr dirty="0"/>
+          </a:p>
+          <a:p>
+            <a:r>
+              <a:rPr dirty="0"/>
+              <a:t>44 rules × 6 channels × 4 transport modes</a:t>
+            </a:r>
+            <a:endParaRPr lang="de-DE" dirty="0"/>
+          </a:p>
+          <a:p>
+            <a:endParaRPr dirty="0"/>
+          </a:p>
+          <a:p>
+            <a:pPr marL="0" indent="0">
+              <a:buNone/>
+            </a:pPr>
+            <a:r>
+              <a:rPr dirty="0"/>
+              <a:t>What we did:</a:t>
+            </a:r>
+            <a:endParaRPr lang="de-DE" dirty="0"/>
+          </a:p>
+          <a:p>
+            <a:r>
+              <a:rPr dirty="0"/>
+              <a:t>Excel matrix → parsed deterministically</a:t>
+            </a:r>
+          </a:p>
+          <a:p>
+            <a:r>
+              <a:rPr dirty="0"/>
+              <a:t>PDF (64 pages) → chapter-level text extraction</a:t>
+            </a:r>
+          </a:p>
+          <a:p>
+            <a:r>
+              <a:rPr dirty="0"/>
+              <a:t>Combined → one OSCAL Catalog YAML</a:t>
+            </a:r>
+          </a:p>
+          <a:p>
+            <a:r>
+              <a:rPr dirty="0"/>
+              <a:t>Validated against NIST JSON Schema ✅</a:t>
+            </a:r>
+          </a:p>
+          <a:p>
+            <a:endParaRPr dirty="0"/>
+          </a:p>
+          <a:p>
+            <a:pPr marL="0" indent="0">
+              <a:buNone/>
+            </a:pPr>
+            <a:r>
+              <a:rPr dirty="0"/>
+              <a:t>What changed between 2024 and 2025?</a:t>
+            </a:r>
+          </a:p>
+          <a:p>
+            <a:pPr marL="0" indent="0">
+              <a:buNone/>
+            </a:pPr>
+            <a:r>
+              <a:rPr dirty="0"/>
+              <a:t>→ git diff. Done.</a:t>
+            </a:r>
+          </a:p>
+        </p:txBody>
+      </p:sp>
+    </p:spTree>
+  </p:cSld>
+  <p:clrMapOvr>
+    <a:masterClrMapping/>
+  </p:clrMapOvr>
+</p:sld>
+</file>
+
+<file path=ppt/slides/slide7.xml><?xml version="1.0" encoding="utf-8"?>
+<p:sld xmlns:a="http://schemas.openxmlformats.org/drawingml/2006/main" xmlns:r="http://schemas.openxmlformats.org/officeDocument/2006/relationships" xmlns:p="http://schemas.openxmlformats.org/presentationml/2006/main">
+  <p:cSld>
+    <p:spTree>
+      <p:nvGrpSpPr>
+        <p:cNvPr id="1" name="">
+          <a:extLst>
+            <a:ext uri="{FF2B5EF4-FFF2-40B4-BE49-F238E27FC236}">
+              <a16:creationId xmlns:a16="http://schemas.microsoft.com/office/drawing/2014/main" id="{B71B1559-2902-1535-A939-2080D145EE65}"/>
+            </a:ext>
+          </a:extLst>
+        </p:cNvPr>
+        <p:cNvGrpSpPr/>
+        <p:nvPr/>
+      </p:nvGrpSpPr>
+      <p:grpSpPr>
+        <a:xfrm>
+          <a:off x="0" y="0"/>
+          <a:ext cx="0" cy="0"/>
+          <a:chOff x="0" y="0"/>
+          <a:chExt cx="0" cy="0"/>
+        </a:xfrm>
+      </p:grpSpPr>
+      <p:pic>
+        <p:nvPicPr>
+          <p:cNvPr id="5" name="Picture 4" descr="Logo-SBB-Card | dravetsuisse">
+            <a:extLst>
+              <a:ext uri="{FF2B5EF4-FFF2-40B4-BE49-F238E27FC236}">
+                <a16:creationId xmlns:a16="http://schemas.microsoft.com/office/drawing/2014/main" id="{FD3D38D0-5DA1-C810-10E8-2861ED21C56E}"/>
+              </a:ext>
+            </a:extLst>
+          </p:cNvPr>
+          <p:cNvPicPr>
+            <a:picLocks noChangeAspect="1"/>
+          </p:cNvPicPr>
+          <p:nvPr/>
+        </p:nvPicPr>
+        <p:blipFill>
+          <a:blip r:embed="rId2"/>
+          <a:stretch>
+            <a:fillRect/>
+          </a:stretch>
+        </p:blipFill>
+        <p:spPr>
+          <a:xfrm>
+            <a:off x="8705678" y="1465010"/>
+            <a:ext cx="3169166" cy="1963990"/>
+          </a:xfrm>
+          <a:prstGeom prst="rect">
+            <a:avLst/>
+          </a:prstGeom>
+        </p:spPr>
+      </p:pic>
+      <p:sp>
+        <p:nvSpPr>
+          <p:cNvPr id="2" name="Title 1">
+            <a:extLst>
+              <a:ext uri="{FF2B5EF4-FFF2-40B4-BE49-F238E27FC236}">
+                <a16:creationId xmlns:a16="http://schemas.microsoft.com/office/drawing/2014/main" id="{1BAF577E-F098-62FD-8EC5-C3B422EF70DF}"/>
+              </a:ext>
+            </a:extLst>
+          </p:cNvPr>
+          <p:cNvSpPr>
+            <a:spLocks noGrp="1"/>
+          </p:cNvSpPr>
+          <p:nvPr>
+            <p:ph type="title"/>
+          </p:nvPr>
+        </p:nvSpPr>
+        <p:spPr/>
+        <p:txBody>
+          <a:bodyPr/>
+          <a:lstStyle/>
+          <a:p>
+            <a:r>
+              <a:rPr dirty="0"/>
+              <a:t>Proof of Concept: BS-KI (Switzerland)</a:t>
+            </a:r>
+          </a:p>
+        </p:txBody>
+      </p:sp>
+      <p:sp>
+        <p:nvSpPr>
+          <p:cNvPr id="3" name="Content Placeholder 2">
+            <a:extLst>
+              <a:ext uri="{FF2B5EF4-FFF2-40B4-BE49-F238E27FC236}">
+                <a16:creationId xmlns:a16="http://schemas.microsoft.com/office/drawing/2014/main" id="{E21CC123-C6B1-89A4-A905-BA6260D4B2C6}"/>
+              </a:ext>
+            </a:extLst>
+          </p:cNvPr>
+          <p:cNvSpPr>
+            <a:spLocks noGrp="1"/>
+          </p:cNvSpPr>
+          <p:nvPr>
+            <p:ph idx="1"/>
+          </p:nvPr>
+        </p:nvSpPr>
+        <p:spPr>
+          <a:xfrm>
+            <a:off x="838199" y="3555517"/>
+            <a:ext cx="10515600" cy="2951849"/>
+          </a:xfrm>
+        </p:spPr>
+        <p:txBody>
+          <a:bodyPr>
+            <a:normAutofit fontScale="55000" lnSpcReduction="20000"/>
+          </a:bodyPr>
+          <a:lstStyle/>
+          <a:p>
+            <a:pPr marL="0" indent="0" algn="ctr">
+              <a:buNone/>
+            </a:pPr>
+            <a:endParaRPr lang="de-DE" sz="3600" dirty="0"/>
+          </a:p>
+          <a:p>
+            <a:pPr marL="0" indent="0" algn="ctr">
+              <a:buNone/>
+            </a:pPr>
+            <a:endParaRPr lang="en-DE" sz="3600" dirty="0"/>
+          </a:p>
+          <a:p>
+            <a:pPr marL="0" indent="0" algn="ctr">
+              <a:buNone/>
+            </a:pPr>
+            <a:endParaRPr lang="de-DE" sz="3600" dirty="0"/>
+          </a:p>
+          <a:p>
+            <a:pPr marL="0" indent="0" algn="ctr">
+              <a:buNone/>
+            </a:pPr>
+            <a:r>
+              <a:rPr sz="5100" dirty="0" err="1"/>
+              <a:t>Branchenstandard</a:t>
+            </a:r>
+            <a:r>
+              <a:rPr sz="5100" dirty="0"/>
+              <a:t> </a:t>
+            </a:r>
+            <a:r>
+              <a:rPr sz="5100" dirty="0" err="1"/>
+              <a:t>Kundeninformation</a:t>
+            </a:r>
+            <a:endParaRPr lang="de-DE" sz="5100" dirty="0"/>
+          </a:p>
+          <a:p>
+            <a:pPr marL="0" indent="0" algn="ctr">
+              <a:buNone/>
+            </a:pPr>
+            <a:r>
+              <a:rPr lang="de-DE" sz="3600" dirty="0"/>
+              <a:t>(National Standard </a:t>
+            </a:r>
+            <a:r>
+              <a:rPr lang="de-DE" sz="3600" dirty="0" err="1"/>
+              <a:t>for</a:t>
+            </a:r>
+            <a:r>
+              <a:rPr lang="de-DE" sz="3600" dirty="0"/>
+              <a:t> Passenger Information)</a:t>
+            </a:r>
+            <a:endParaRPr sz="3600" dirty="0"/>
+          </a:p>
+          <a:p>
+            <a:pPr marL="0" indent="0" algn="ctr">
+              <a:buNone/>
+            </a:pPr>
+            <a:endParaRPr lang="de-DE" sz="3600" dirty="0"/>
+          </a:p>
+          <a:p>
+            <a:pPr marL="0" indent="0" algn="ctr">
+              <a:buNone/>
+            </a:pPr>
+            <a:r>
+              <a:rPr sz="5800" dirty="0"/>
+              <a:t>44 rules × 6 channels × 4 transport modes</a:t>
+            </a:r>
+            <a:endParaRPr lang="de-DE" sz="5800" dirty="0"/>
+          </a:p>
+          <a:p>
+            <a:pPr marL="0" indent="0" algn="ctr">
+              <a:buNone/>
+            </a:pPr>
+            <a:r>
+              <a:rPr lang="en-GB" sz="3600" dirty="0"/>
+              <a:t>P</a:t>
+            </a:r>
+            <a:r>
+              <a:rPr lang="en-DE" sz="3600" dirty="0"/>
+              <a:t>lus referenced annexes and documents</a:t>
+            </a:r>
+            <a:endParaRPr lang="de-DE" sz="3600" dirty="0"/>
+          </a:p>
+          <a:p>
+            <a:pPr algn="ctr"/>
+            <a:endParaRPr dirty="0"/>
+          </a:p>
+        </p:txBody>
+      </p:sp>
+      <p:pic>
+        <p:nvPicPr>
+          <p:cNvPr id="6" name="Picture 5" descr="Document documents - free Icon PNG, SVG">
+            <a:extLst>
+              <a:ext uri="{FF2B5EF4-FFF2-40B4-BE49-F238E27FC236}">
+                <a16:creationId xmlns:a16="http://schemas.microsoft.com/office/drawing/2014/main" id="{85AE58B8-A259-14E9-33B6-5C5F8F230D71}"/>
+              </a:ext>
+            </a:extLst>
+          </p:cNvPr>
+          <p:cNvPicPr>
+            <a:picLocks noChangeAspect="1"/>
+          </p:cNvPicPr>
+          <p:nvPr/>
+        </p:nvPicPr>
+        <p:blipFill>
+          <a:blip r:embed="rId3"/>
+          <a:stretch>
+            <a:fillRect/>
+          </a:stretch>
+        </p:blipFill>
+        <p:spPr>
+          <a:xfrm>
+            <a:off x="700138" y="1690688"/>
+            <a:ext cx="1660002" cy="1660002"/>
+          </a:xfrm>
+          <a:prstGeom prst="rect">
+            <a:avLst/>
+          </a:prstGeom>
+        </p:spPr>
+      </p:pic>
+      <p:pic>
+        <p:nvPicPr>
+          <p:cNvPr id="7" name="Picture 6" descr="Document documents - free Icon PNG, SVG">
+            <a:extLst>
+              <a:ext uri="{FF2B5EF4-FFF2-40B4-BE49-F238E27FC236}">
+                <a16:creationId xmlns:a16="http://schemas.microsoft.com/office/drawing/2014/main" id="{DEF7E1EB-87DF-F48C-0E26-2933E65EC6A7}"/>
+              </a:ext>
+            </a:extLst>
+          </p:cNvPr>
+          <p:cNvPicPr>
+            <a:picLocks noChangeAspect="1"/>
+          </p:cNvPicPr>
+          <p:nvPr/>
+        </p:nvPicPr>
+        <p:blipFill>
+          <a:blip r:embed="rId3"/>
+          <a:stretch>
+            <a:fillRect/>
+          </a:stretch>
+        </p:blipFill>
+        <p:spPr>
+          <a:xfrm>
+            <a:off x="3005532" y="2784306"/>
+            <a:ext cx="1660002" cy="1660002"/>
+          </a:xfrm>
+          <a:prstGeom prst="rect">
+            <a:avLst/>
+          </a:prstGeom>
+        </p:spPr>
+      </p:pic>
+      <p:pic>
+        <p:nvPicPr>
+          <p:cNvPr id="8" name="Picture 7" descr="Document documents - free Icon PNG, SVG">
+            <a:extLst>
+              <a:ext uri="{FF2B5EF4-FFF2-40B4-BE49-F238E27FC236}">
+                <a16:creationId xmlns:a16="http://schemas.microsoft.com/office/drawing/2014/main" id="{90160351-00AC-9D83-DB09-86D3E1E1BD44}"/>
+              </a:ext>
+            </a:extLst>
+          </p:cNvPr>
+          <p:cNvPicPr>
+            <a:picLocks noChangeAspect="1"/>
+          </p:cNvPicPr>
+          <p:nvPr/>
+        </p:nvPicPr>
+        <p:blipFill>
+          <a:blip r:embed="rId3"/>
+          <a:stretch>
+            <a:fillRect/>
+          </a:stretch>
+        </p:blipFill>
+        <p:spPr>
+          <a:xfrm>
+            <a:off x="5295852" y="1552991"/>
+            <a:ext cx="1660002" cy="1660002"/>
+          </a:xfrm>
+          <a:prstGeom prst="rect">
+            <a:avLst/>
+          </a:prstGeom>
+        </p:spPr>
+      </p:pic>
+      <p:pic>
+        <p:nvPicPr>
+          <p:cNvPr id="9" name="Picture 8" descr="Document documents - free Icon PNG, SVG">
+            <a:extLst>
+              <a:ext uri="{FF2B5EF4-FFF2-40B4-BE49-F238E27FC236}">
+                <a16:creationId xmlns:a16="http://schemas.microsoft.com/office/drawing/2014/main" id="{A1A42A46-2812-7D8F-0536-7B8063BD42F6}"/>
+              </a:ext>
+            </a:extLst>
+          </p:cNvPr>
+          <p:cNvPicPr>
+            <a:picLocks noChangeAspect="1"/>
+          </p:cNvPicPr>
+          <p:nvPr/>
+        </p:nvPicPr>
+        <p:blipFill>
+          <a:blip r:embed="rId3"/>
+          <a:stretch>
+            <a:fillRect/>
+          </a:stretch>
+        </p:blipFill>
+        <p:spPr>
+          <a:xfrm>
+            <a:off x="7616320" y="2784306"/>
+            <a:ext cx="1660002" cy="1660002"/>
+          </a:xfrm>
+          <a:prstGeom prst="rect">
+            <a:avLst/>
+          </a:prstGeom>
+        </p:spPr>
+      </p:pic>
+      <p:sp>
+        <p:nvSpPr>
+          <p:cNvPr id="10" name="Right Arrow 9">
+            <a:extLst>
+              <a:ext uri="{FF2B5EF4-FFF2-40B4-BE49-F238E27FC236}">
+                <a16:creationId xmlns:a16="http://schemas.microsoft.com/office/drawing/2014/main" id="{29A1551A-2F34-3D21-EA3A-E0A1B43E5C0C}"/>
+              </a:ext>
+            </a:extLst>
+          </p:cNvPr>
+          <p:cNvSpPr/>
+          <p:nvPr/>
+        </p:nvSpPr>
+        <p:spPr>
+          <a:xfrm>
+            <a:off x="2174789" y="2131495"/>
+            <a:ext cx="3311611" cy="389194"/>
+          </a:xfrm>
+          <a:prstGeom prst="rightArrow">
+            <a:avLst/>
+          </a:prstGeom>
+        </p:spPr>
+        <p:style>
+          <a:lnRef idx="2">
+            <a:schemeClr val="accent1">
+              <a:shade val="15000"/>
+            </a:schemeClr>
+          </a:lnRef>
+          <a:fillRef idx="1">
+            <a:schemeClr val="accent1"/>
+          </a:fillRef>
+          <a:effectRef idx="0">
+            <a:schemeClr val="accent1"/>
+          </a:effectRef>
+          <a:fontRef idx="minor">
+            <a:schemeClr val="lt1"/>
+          </a:fontRef>
+        </p:style>
+        <p:txBody>
+          <a:bodyPr rtlCol="0" anchor="ctr"/>
+          <a:lstStyle/>
+          <a:p>
+            <a:pPr algn="ctr"/>
+            <a:endParaRPr lang="de-DE"/>
+          </a:p>
+        </p:txBody>
+      </p:sp>
+      <p:sp>
+        <p:nvSpPr>
+          <p:cNvPr id="11" name="Right Arrow 10">
+            <a:extLst>
+              <a:ext uri="{FF2B5EF4-FFF2-40B4-BE49-F238E27FC236}">
+                <a16:creationId xmlns:a16="http://schemas.microsoft.com/office/drawing/2014/main" id="{E0AFF2FE-68CD-C401-3C29-89B5875CE0DA}"/>
+              </a:ext>
+            </a:extLst>
+          </p:cNvPr>
+          <p:cNvSpPr/>
+          <p:nvPr/>
+        </p:nvSpPr>
+        <p:spPr>
+          <a:xfrm rot="1070166">
+            <a:off x="2163897" y="2811901"/>
+            <a:ext cx="1037878" cy="389194"/>
+          </a:xfrm>
+          <a:prstGeom prst="rightArrow">
+            <a:avLst/>
+          </a:prstGeom>
+          <a:solidFill>
+            <a:srgbClr val="FF0000"/>
+          </a:solidFill>
+        </p:spPr>
+        <p:style>
+          <a:lnRef idx="2">
+            <a:schemeClr val="accent1">
+              <a:shade val="15000"/>
+            </a:schemeClr>
+          </a:lnRef>
+          <a:fillRef idx="1">
+            <a:schemeClr val="accent1"/>
+          </a:fillRef>
+          <a:effectRef idx="0">
+            <a:schemeClr val="accent1"/>
+          </a:effectRef>
+          <a:fontRef idx="minor">
+            <a:schemeClr val="lt1"/>
+          </a:fontRef>
+        </p:style>
+        <p:txBody>
+          <a:bodyPr rtlCol="0" anchor="ctr"/>
+          <a:lstStyle/>
+          <a:p>
+            <a:pPr algn="ctr"/>
+            <a:endParaRPr lang="de-DE"/>
+          </a:p>
+        </p:txBody>
+      </p:sp>
+      <p:sp>
+        <p:nvSpPr>
+          <p:cNvPr id="12" name="Right Arrow 11">
+            <a:extLst>
+              <a:ext uri="{FF2B5EF4-FFF2-40B4-BE49-F238E27FC236}">
+                <a16:creationId xmlns:a16="http://schemas.microsoft.com/office/drawing/2014/main" id="{4998DFF4-E328-FD4B-4EE6-08C11C5FA076}"/>
+              </a:ext>
+            </a:extLst>
+          </p:cNvPr>
+          <p:cNvSpPr/>
+          <p:nvPr/>
+        </p:nvSpPr>
+        <p:spPr>
+          <a:xfrm rot="9965467">
+            <a:off x="4470679" y="2893913"/>
+            <a:ext cx="1037878" cy="389194"/>
+          </a:xfrm>
+          <a:prstGeom prst="rightArrow">
+            <a:avLst/>
+          </a:prstGeom>
+          <a:solidFill>
+            <a:srgbClr val="92D050"/>
+          </a:solidFill>
+        </p:spPr>
+        <p:style>
+          <a:lnRef idx="2">
+            <a:schemeClr val="accent1">
+              <a:shade val="15000"/>
+            </a:schemeClr>
+          </a:lnRef>
+          <a:fillRef idx="1">
+            <a:schemeClr val="accent1"/>
+          </a:fillRef>
+          <a:effectRef idx="0">
+            <a:schemeClr val="accent1"/>
+          </a:effectRef>
+          <a:fontRef idx="minor">
+            <a:schemeClr val="lt1"/>
+          </a:fontRef>
+        </p:style>
+        <p:txBody>
+          <a:bodyPr rtlCol="0" anchor="ctr"/>
+          <a:lstStyle/>
+          <a:p>
+            <a:pPr algn="ctr"/>
+            <a:endParaRPr lang="de-DE"/>
+          </a:p>
+        </p:txBody>
+      </p:sp>
+      <p:sp>
+        <p:nvSpPr>
+          <p:cNvPr id="13" name="Right Arrow 12">
+            <a:extLst>
+              <a:ext uri="{FF2B5EF4-FFF2-40B4-BE49-F238E27FC236}">
+                <a16:creationId xmlns:a16="http://schemas.microsoft.com/office/drawing/2014/main" id="{EB89A13B-8D8B-8D5C-8450-68F2F4FBD0D6}"/>
+              </a:ext>
+            </a:extLst>
+          </p:cNvPr>
+          <p:cNvSpPr/>
+          <p:nvPr/>
+        </p:nvSpPr>
+        <p:spPr>
+          <a:xfrm>
+            <a:off x="6819025" y="2925086"/>
+            <a:ext cx="1037878" cy="389194"/>
+          </a:xfrm>
+          <a:prstGeom prst="rightArrow">
+            <a:avLst/>
+          </a:prstGeom>
+        </p:spPr>
+        <p:style>
+          <a:lnRef idx="2">
+            <a:schemeClr val="accent1">
+              <a:shade val="15000"/>
+            </a:schemeClr>
+          </a:lnRef>
+          <a:fillRef idx="1">
+            <a:schemeClr val="accent1"/>
+          </a:fillRef>
+          <a:effectRef idx="0">
+            <a:schemeClr val="accent1"/>
+          </a:effectRef>
+          <a:fontRef idx="minor">
+            <a:schemeClr val="lt1"/>
+          </a:fontRef>
+        </p:style>
+        <p:txBody>
+          <a:bodyPr rtlCol="0" anchor="ctr"/>
+          <a:lstStyle/>
+          <a:p>
+            <a:pPr algn="ctr"/>
+            <a:endParaRPr lang="de-DE"/>
+          </a:p>
+        </p:txBody>
+      </p:sp>
+      <p:sp>
+        <p:nvSpPr>
+          <p:cNvPr id="14" name="Right Arrow 13">
+            <a:extLst>
+              <a:ext uri="{FF2B5EF4-FFF2-40B4-BE49-F238E27FC236}">
+                <a16:creationId xmlns:a16="http://schemas.microsoft.com/office/drawing/2014/main" id="{527E9953-8AC8-01B6-E7F8-F2B3FD82E5FF}"/>
+              </a:ext>
+            </a:extLst>
+          </p:cNvPr>
+          <p:cNvSpPr/>
+          <p:nvPr/>
+        </p:nvSpPr>
+        <p:spPr>
+          <a:xfrm rot="10800000">
+            <a:off x="4440194" y="3565643"/>
+            <a:ext cx="3311611" cy="389194"/>
+          </a:xfrm>
+          <a:prstGeom prst="rightArrow">
+            <a:avLst/>
+          </a:prstGeom>
+          <a:solidFill>
+            <a:schemeClr val="accent2"/>
+          </a:solidFill>
+        </p:spPr>
+        <p:style>
+          <a:lnRef idx="2">
+            <a:schemeClr val="accent1">
+              <a:shade val="15000"/>
+            </a:schemeClr>
+          </a:lnRef>
+          <a:fillRef idx="1">
+            <a:schemeClr val="accent1"/>
+          </a:fillRef>
+          <a:effectRef idx="0">
+            <a:schemeClr val="accent1"/>
+          </a:effectRef>
+          <a:fontRef idx="minor">
+            <a:schemeClr val="lt1"/>
+          </a:fontRef>
+        </p:style>
+        <p:txBody>
+          <a:bodyPr rtlCol="0" anchor="ctr"/>
+          <a:lstStyle/>
+          <a:p>
+            <a:pPr algn="ctr"/>
+            <a:endParaRPr lang="de-DE"/>
+          </a:p>
+        </p:txBody>
+      </p:sp>
+    </p:spTree>
+    <p:extLst>
+      <p:ext uri="{BB962C8B-B14F-4D97-AF65-F5344CB8AC3E}">
+        <p14:creationId xmlns:p14="http://schemas.microsoft.com/office/powerpoint/2010/main" val="2931017613"/>
+      </p:ext>
+    </p:extLst>
+  </p:cSld>
+  <p:clrMapOvr>
+    <a:masterClrMapping/>
+  </p:clrMapOvr>
+</p:sld>
+</file>
+
+<file path=ppt/slides/slide8.xml><?xml version="1.0" encoding="utf-8"?>
 <p:sld xmlns:a="http://schemas.openxmlformats.org/drawingml/2006/main" xmlns:r="http://schemas.openxmlformats.org/officeDocument/2006/relationships" xmlns:p="http://schemas.openxmlformats.org/presentationml/2006/main">
   <p:cSld>
     <p:spTree>
@@ -4640,425 +5865,6 @@
           </a:prstGeom>
         </p:spPr>
       </p:pic>
-    </p:spTree>
-  </p:cSld>
-  <p:clrMapOvr>
-    <a:masterClrMapping/>
-  </p:clrMapOvr>
-</p:sld>
-</file>
-
-<file path=ppt/slides/slide7.xml><?xml version="1.0" encoding="utf-8"?>
-<p:sld xmlns:a="http://schemas.openxmlformats.org/drawingml/2006/main" xmlns:r="http://schemas.openxmlformats.org/officeDocument/2006/relationships" xmlns:p="http://schemas.openxmlformats.org/presentationml/2006/main">
-  <p:cSld>
-    <p:spTree>
-      <p:nvGrpSpPr>
-        <p:cNvPr id="1" name=""/>
-        <p:cNvGrpSpPr/>
-        <p:nvPr/>
-      </p:nvGrpSpPr>
-      <p:grpSpPr>
-        <a:xfrm>
-          <a:off x="0" y="0"/>
-          <a:ext cx="0" cy="0"/>
-          <a:chOff x="0" y="0"/>
-          <a:chExt cx="0" cy="0"/>
-        </a:xfrm>
-      </p:grpSpPr>
-      <p:sp>
-        <p:nvSpPr>
-          <p:cNvPr id="2" name="Title 1"/>
-          <p:cNvSpPr>
-            <a:spLocks noGrp="1"/>
-          </p:cNvSpPr>
-          <p:nvPr>
-            <p:ph type="title"/>
-          </p:nvPr>
-        </p:nvSpPr>
-        <p:spPr/>
-        <p:txBody>
-          <a:bodyPr/>
-          <a:lstStyle/>
-          <a:p>
-            <a:r>
-              <a:t>Next Steps: Establishing the Standard</a:t>
-            </a:r>
-          </a:p>
-        </p:txBody>
-      </p:sp>
-      <p:sp>
-        <p:nvSpPr>
-          <p:cNvPr id="3" name="Content Placeholder 2"/>
-          <p:cNvSpPr>
-            <a:spLocks noGrp="1"/>
-          </p:cNvSpPr>
-          <p:nvPr>
-            <p:ph idx="1"/>
-          </p:nvPr>
-        </p:nvSpPr>
-        <p:spPr>
-          <a:xfrm>
-            <a:off x="838200" y="1825625"/>
-            <a:ext cx="10515600" cy="3611348"/>
-          </a:xfrm>
-        </p:spPr>
-        <p:txBody>
-          <a:bodyPr>
-            <a:normAutofit fontScale="77500" lnSpcReduction="20000"/>
-          </a:bodyPr>
-          <a:lstStyle/>
-          <a:p>
-            <a:pPr marL="0" indent="0">
-              <a:buNone/>
-            </a:pPr>
-            <a:r>
-              <a:rPr dirty="0"/>
-              <a:t>1. Start with IT/ITS regulations</a:t>
-            </a:r>
-            <a:r>
-              <a:rPr lang="de-DE" dirty="0"/>
-              <a:t> </a:t>
-            </a:r>
-            <a:r>
-              <a:rPr dirty="0"/>
-              <a:t>(already structured, digital-native)</a:t>
-            </a:r>
-            <a:endParaRPr lang="de-DE" dirty="0"/>
-          </a:p>
-          <a:p>
-            <a:pPr marL="0" indent="0">
-              <a:buNone/>
-            </a:pPr>
-            <a:r>
-              <a:rPr lang="de-DE" dirty="0"/>
-              <a:t>	- </a:t>
-            </a:r>
-            <a:r>
-              <a:rPr lang="de-DE" dirty="0" err="1"/>
-              <a:t>Verify</a:t>
-            </a:r>
-            <a:r>
-              <a:rPr lang="de-DE" dirty="0"/>
-              <a:t> </a:t>
-            </a:r>
-            <a:r>
-              <a:rPr lang="de-DE" dirty="0" err="1"/>
-              <a:t>automated</a:t>
-            </a:r>
-            <a:r>
-              <a:rPr lang="de-DE" dirty="0"/>
-              <a:t> </a:t>
-            </a:r>
-            <a:r>
-              <a:rPr lang="de-DE" dirty="0" err="1"/>
-              <a:t>creation</a:t>
-            </a:r>
-            <a:r>
-              <a:rPr lang="de-DE" dirty="0"/>
-              <a:t> </a:t>
-            </a:r>
-            <a:r>
-              <a:rPr lang="de-DE" dirty="0" err="1"/>
-              <a:t>of</a:t>
-            </a:r>
-            <a:r>
-              <a:rPr lang="de-DE" dirty="0"/>
-              <a:t> </a:t>
-            </a:r>
-            <a:r>
-              <a:rPr lang="de-DE" dirty="0" err="1"/>
-              <a:t>schemata</a:t>
-            </a:r>
-            <a:r>
-              <a:rPr lang="de-DE" dirty="0"/>
-              <a:t> </a:t>
-            </a:r>
-            <a:r>
-              <a:rPr lang="de-DE" dirty="0" err="1"/>
-              <a:t>with</a:t>
-            </a:r>
-            <a:r>
-              <a:rPr lang="de-DE" dirty="0"/>
-              <a:t> </a:t>
-            </a:r>
-            <a:r>
-              <a:rPr lang="de-DE" dirty="0" err="1"/>
-              <a:t>governance</a:t>
-            </a:r>
-            <a:r>
-              <a:rPr lang="de-DE" dirty="0"/>
-              <a:t> </a:t>
-            </a:r>
-            <a:r>
-              <a:rPr lang="de-DE" dirty="0" err="1"/>
-              <a:t>owners</a:t>
-            </a:r>
-            <a:endParaRPr dirty="0"/>
-          </a:p>
-          <a:p>
-            <a:endParaRPr dirty="0"/>
-          </a:p>
-          <a:p>
-            <a:pPr marL="0" indent="0">
-              <a:buNone/>
-            </a:pPr>
-            <a:r>
-              <a:rPr dirty="0"/>
-              <a:t>2. Web editor that behaves like Word</a:t>
-            </a:r>
-            <a:r>
-              <a:rPr lang="de-DE" dirty="0"/>
-              <a:t> </a:t>
-            </a:r>
-            <a:r>
-              <a:rPr dirty="0"/>
-              <a:t>(low learning curve for </a:t>
-            </a:r>
-            <a:r>
-              <a:rPr lang="de-DE" dirty="0"/>
-              <a:t>non </a:t>
-            </a:r>
-            <a:r>
-              <a:rPr lang="de-DE" dirty="0" err="1"/>
-              <a:t>technical</a:t>
-            </a:r>
-            <a:r>
-              <a:rPr lang="de-DE" dirty="0"/>
-              <a:t> </a:t>
-            </a:r>
-            <a:r>
-              <a:rPr dirty="0"/>
-              <a:t>governance owners)</a:t>
-            </a:r>
-          </a:p>
-          <a:p>
-            <a:endParaRPr dirty="0"/>
-          </a:p>
-          <a:p>
-            <a:pPr marL="0" indent="0">
-              <a:buNone/>
-            </a:pPr>
-            <a:r>
-              <a:rPr lang="de-DE" dirty="0"/>
-              <a:t>3.</a:t>
-            </a:r>
-            <a:r>
-              <a:rPr dirty="0"/>
-              <a:t> Import existing governance documents</a:t>
-            </a:r>
-            <a:endParaRPr lang="de-DE" dirty="0"/>
-          </a:p>
-          <a:p>
-            <a:pPr marL="0" indent="0">
-              <a:buNone/>
-            </a:pPr>
-            <a:r>
-              <a:rPr lang="de-DE" dirty="0"/>
-              <a:t>	</a:t>
-            </a:r>
-            <a:r>
-              <a:rPr dirty="0"/>
-              <a:t>→ validate → publish as OSCAL</a:t>
-            </a:r>
-          </a:p>
-          <a:p>
-            <a:endParaRPr dirty="0"/>
-          </a:p>
-          <a:p>
-            <a:pPr marL="0" indent="0">
-              <a:buNone/>
-            </a:pPr>
-            <a:r>
-              <a:rPr dirty="0"/>
-              <a:t>4. Expand: safety regulations, cross-border (TSI),</a:t>
-            </a:r>
-            <a:r>
-              <a:rPr lang="de-DE" dirty="0"/>
-              <a:t> </a:t>
-            </a:r>
-            <a:r>
-              <a:rPr dirty="0"/>
-              <a:t>operational rules</a:t>
-            </a:r>
-          </a:p>
-          <a:p>
-            <a:endParaRPr dirty="0"/>
-          </a:p>
-          <a:p>
-            <a:pPr marL="0" indent="0" algn="ctr">
-              <a:buNone/>
-            </a:pPr>
-            <a:endParaRPr sz="3600" dirty="0"/>
-          </a:p>
-        </p:txBody>
-      </p:sp>
-      <p:sp>
-        <p:nvSpPr>
-          <p:cNvPr id="4" name="TextBox 3">
-            <a:extLst>
-              <a:ext uri="{FF2B5EF4-FFF2-40B4-BE49-F238E27FC236}">
-                <a16:creationId xmlns:a16="http://schemas.microsoft.com/office/drawing/2014/main" id="{646D0452-0439-E6B7-5E7E-A087D02FF2EA}"/>
-              </a:ext>
-            </a:extLst>
-          </p:cNvPr>
-          <p:cNvSpPr txBox="1"/>
-          <p:nvPr/>
-        </p:nvSpPr>
-        <p:spPr>
-          <a:xfrm>
-            <a:off x="976184" y="5436973"/>
-            <a:ext cx="9848335" cy="954107"/>
-          </a:xfrm>
-          <a:prstGeom prst="rect">
-            <a:avLst/>
-          </a:prstGeom>
-          <a:noFill/>
-        </p:spPr>
-        <p:txBody>
-          <a:bodyPr wrap="square" rtlCol="0">
-            <a:spAutoFit/>
-          </a:bodyPr>
-          <a:lstStyle/>
-          <a:p>
-            <a:pPr algn="ctr"/>
-            <a:r>
-              <a:rPr lang="en-GB" sz="2800" dirty="0"/>
-              <a:t>Little change in workflow. Massive gain in usability.</a:t>
-            </a:r>
-          </a:p>
-          <a:p>
-            <a:pPr algn="ctr"/>
-            <a:r>
-              <a:rPr lang="en-GB" sz="2800" dirty="0"/>
-              <a:t>→ Cross-railway interoperability (DB / SBB / ÖBB / SCNF / …)</a:t>
-            </a:r>
-          </a:p>
-        </p:txBody>
-      </p:sp>
-    </p:spTree>
-  </p:cSld>
-  <p:clrMapOvr>
-    <a:masterClrMapping/>
-  </p:clrMapOvr>
-</p:sld>
-</file>
-
-<file path=ppt/slides/slide8.xml><?xml version="1.0" encoding="utf-8"?>
-<p:sld xmlns:a="http://schemas.openxmlformats.org/drawingml/2006/main" xmlns:r="http://schemas.openxmlformats.org/officeDocument/2006/relationships" xmlns:p="http://schemas.openxmlformats.org/presentationml/2006/main" show="0">
-  <p:cSld>
-    <p:spTree>
-      <p:nvGrpSpPr>
-        <p:cNvPr id="1" name=""/>
-        <p:cNvGrpSpPr/>
-        <p:nvPr/>
-      </p:nvGrpSpPr>
-      <p:grpSpPr>
-        <a:xfrm>
-          <a:off x="0" y="0"/>
-          <a:ext cx="0" cy="0"/>
-          <a:chOff x="0" y="0"/>
-          <a:chExt cx="0" cy="0"/>
-        </a:xfrm>
-      </p:grpSpPr>
-      <p:sp>
-        <p:nvSpPr>
-          <p:cNvPr id="2" name="Title 1"/>
-          <p:cNvSpPr>
-            <a:spLocks noGrp="1"/>
-          </p:cNvSpPr>
-          <p:nvPr>
-            <p:ph type="title"/>
-          </p:nvPr>
-        </p:nvSpPr>
-        <p:spPr/>
-        <p:txBody>
-          <a:bodyPr/>
-          <a:lstStyle/>
-          <a:p>
-            <a:r>
-              <a:t>The Vision</a:t>
-            </a:r>
-          </a:p>
-        </p:txBody>
-      </p:sp>
-      <p:sp>
-        <p:nvSpPr>
-          <p:cNvPr id="3" name="Content Placeholder 2"/>
-          <p:cNvSpPr>
-            <a:spLocks noGrp="1"/>
-          </p:cNvSpPr>
-          <p:nvPr>
-            <p:ph idx="1"/>
-          </p:nvPr>
-        </p:nvSpPr>
-        <p:spPr/>
-        <p:txBody>
-          <a:bodyPr>
-            <a:normAutofit fontScale="85000" lnSpcReduction="20000"/>
-          </a:bodyPr>
-          <a:lstStyle/>
-          <a:p>
-            <a:r>
-              <a:rPr dirty="0"/>
-              <a:t>┌──────────────┐     ┌─────────────┐     ┌──────────────┐</a:t>
-            </a:r>
-          </a:p>
-          <a:p>
-            <a:r>
-              <a:rPr dirty="0"/>
-              <a:t>│ Web Editor   │ ──► │ OSCAL4Rail  │ ──► │ PDF (view)   │</a:t>
-            </a:r>
-          </a:p>
-          <a:p>
-            <a:r>
-              <a:rPr dirty="0"/>
-              <a:t>│ (looks like  │     │ (canonical  │     │ API (machine)│</a:t>
-            </a:r>
-          </a:p>
-          <a:p>
-            <a:r>
-              <a:rPr dirty="0"/>
-              <a:t>│  Word)       │     │  source)    │     │ Diff/Change  │</a:t>
-            </a:r>
-          </a:p>
-          <a:p>
-            <a:r>
-              <a:rPr dirty="0"/>
-              <a:t>└──────────────┘     └─────────────┘     └──────────────┘</a:t>
-            </a:r>
-          </a:p>
-          <a:p>
-            <a:endParaRPr dirty="0"/>
-          </a:p>
-          <a:p>
-            <a:r>
-              <a:rPr dirty="0"/>
-              <a:t>Governance owners keep writing like they always have.</a:t>
-            </a:r>
-          </a:p>
-          <a:p>
-            <a:r>
-              <a:rPr dirty="0"/>
-              <a:t>But the output is structured, versioned, machine-readable.</a:t>
-            </a:r>
-          </a:p>
-          <a:p>
-            <a:endParaRPr dirty="0"/>
-          </a:p>
-          <a:p>
-            <a:r>
-              <a:rPr dirty="0"/>
-              <a:t>→ Automated compliance checks</a:t>
-            </a:r>
-          </a:p>
-          <a:p>
-            <a:r>
-              <a:rPr dirty="0"/>
-              <a:t>→ Bridge to ACA: contracts validated against regulations</a:t>
-            </a:r>
-          </a:p>
-        </p:txBody>
-      </p:sp>
     </p:spTree>
   </p:cSld>
   <p:clrMapOvr>
@@ -5091,76 +5897,252 @@
             <a:spLocks noGrp="1"/>
           </p:cNvSpPr>
           <p:nvPr>
-            <p:ph type="ctrTitle"/>
+            <p:ph type="title"/>
           </p:nvPr>
         </p:nvSpPr>
         <p:spPr/>
         <p:txBody>
-          <a:bodyPr anchor="t"/>
-          <a:lstStyle/>
-          <a:p>
-            <a:r>
-              <a:rPr dirty="0"/>
-              <a:t>OSCAL4Rail</a:t>
-            </a:r>
-          </a:p>
-        </p:txBody>
-      </p:sp>
-      <p:sp>
-        <p:nvSpPr>
-          <p:cNvPr id="3" name="Subtitle 2"/>
-          <p:cNvSpPr>
-            <a:spLocks noGrp="1"/>
-          </p:cNvSpPr>
-          <p:nvPr>
-            <p:ph type="subTitle" idx="1"/>
+          <a:bodyPr/>
+          <a:lstStyle/>
+          <a:p>
+            <a:r>
+              <a:t>Next Steps: Establishing the Standard</a:t>
+            </a:r>
+          </a:p>
+        </p:txBody>
+      </p:sp>
+      <p:sp>
+        <p:nvSpPr>
+          <p:cNvPr id="3" name="Content Placeholder 2"/>
+          <p:cNvSpPr>
+            <a:spLocks noGrp="1"/>
+          </p:cNvSpPr>
+          <p:nvPr>
+            <p:ph idx="1"/>
           </p:nvPr>
         </p:nvSpPr>
         <p:spPr>
           <a:xfrm>
-            <a:off x="1731818" y="2601119"/>
-            <a:ext cx="9144000" cy="3134518"/>
+            <a:off x="838200" y="1825625"/>
+            <a:ext cx="10515600" cy="3611348"/>
           </a:xfrm>
         </p:spPr>
         <p:txBody>
           <a:bodyPr>
-            <a:normAutofit lnSpcReduction="10000"/>
+            <a:noAutofit/>
           </a:bodyPr>
           <a:lstStyle/>
           <a:p>
-            <a:r>
-              <a:rPr dirty="0"/>
-              <a:t>Machine-readable governance for railways.</a:t>
-            </a:r>
-          </a:p>
-          <a:p>
-            <a:endParaRPr dirty="0"/>
-          </a:p>
-          <a:p>
-            <a:r>
-              <a:rPr dirty="0"/>
-              <a:t>Who makes the rules? Humans.</a:t>
-            </a:r>
-          </a:p>
-          <a:p>
-            <a:r>
-              <a:rPr dirty="0"/>
-              <a:t>How we publish, version, and compare them?</a:t>
-            </a:r>
-          </a:p>
-          <a:p>
-            <a:r>
-              <a:rPr dirty="0"/>
-              <a:t>That's a machine's job.</a:t>
-            </a:r>
-          </a:p>
-          <a:p>
-            <a:endParaRPr dirty="0"/>
-          </a:p>
-          <a:p>
-            <a:r>
-              <a:rPr dirty="0"/>
-              <a:t>Starting today.</a:t>
+            <a:pPr marL="0" indent="0">
+              <a:buNone/>
+            </a:pPr>
+            <a:r>
+              <a:rPr sz="2000" dirty="0"/>
+              <a:t>1. Start with IT/ITS regulations</a:t>
+            </a:r>
+            <a:r>
+              <a:rPr lang="de-DE" sz="2000" dirty="0"/>
+              <a:t> </a:t>
+            </a:r>
+            <a:r>
+              <a:rPr sz="2000" dirty="0"/>
+              <a:t>(already structured, digital-native)</a:t>
+            </a:r>
+            <a:endParaRPr lang="de-DE" sz="2000" dirty="0"/>
+          </a:p>
+          <a:p>
+            <a:pPr marL="0" indent="0">
+              <a:buNone/>
+            </a:pPr>
+            <a:r>
+              <a:rPr lang="de-DE" sz="2000" dirty="0"/>
+              <a:t>	- </a:t>
+            </a:r>
+            <a:r>
+              <a:rPr lang="de-DE" sz="2000" dirty="0" err="1"/>
+              <a:t>Verify</a:t>
+            </a:r>
+            <a:r>
+              <a:rPr lang="de-DE" sz="2000" dirty="0"/>
+              <a:t> </a:t>
+            </a:r>
+            <a:r>
+              <a:rPr lang="de-DE" sz="2000" dirty="0" err="1"/>
+              <a:t>automated</a:t>
+            </a:r>
+            <a:r>
+              <a:rPr lang="de-DE" sz="2000" dirty="0"/>
+              <a:t> </a:t>
+            </a:r>
+            <a:r>
+              <a:rPr lang="de-DE" sz="2000" dirty="0" err="1"/>
+              <a:t>creation</a:t>
+            </a:r>
+            <a:r>
+              <a:rPr lang="de-DE" sz="2000" dirty="0"/>
+              <a:t> </a:t>
+            </a:r>
+            <a:r>
+              <a:rPr lang="de-DE" sz="2000" dirty="0" err="1"/>
+              <a:t>of</a:t>
+            </a:r>
+            <a:r>
+              <a:rPr lang="de-DE" sz="2000" dirty="0"/>
+              <a:t> </a:t>
+            </a:r>
+            <a:r>
+              <a:rPr lang="de-DE" sz="2000" dirty="0" err="1"/>
+              <a:t>schemata</a:t>
+            </a:r>
+            <a:r>
+              <a:rPr lang="de-DE" sz="2000" dirty="0"/>
+              <a:t> </a:t>
+            </a:r>
+            <a:r>
+              <a:rPr lang="de-DE" sz="2000" dirty="0" err="1"/>
+              <a:t>with</a:t>
+            </a:r>
+            <a:r>
+              <a:rPr lang="de-DE" sz="2000" dirty="0"/>
+              <a:t> </a:t>
+            </a:r>
+            <a:r>
+              <a:rPr lang="de-DE" sz="2000" dirty="0" err="1"/>
+              <a:t>governance</a:t>
+            </a:r>
+            <a:r>
+              <a:rPr lang="de-DE" sz="2000" dirty="0"/>
+              <a:t> </a:t>
+            </a:r>
+            <a:r>
+              <a:rPr lang="de-DE" sz="2000" dirty="0" err="1"/>
+              <a:t>owners</a:t>
+            </a:r>
+            <a:endParaRPr sz="2000" dirty="0"/>
+          </a:p>
+          <a:p>
+            <a:endParaRPr sz="2000" dirty="0"/>
+          </a:p>
+          <a:p>
+            <a:pPr marL="0" indent="0">
+              <a:buNone/>
+            </a:pPr>
+            <a:r>
+              <a:rPr lang="de-DE" sz="2000" dirty="0"/>
+              <a:t>2.</a:t>
+            </a:r>
+            <a:r>
+              <a:rPr sz="2000" dirty="0"/>
+              <a:t> Import existing governance documents</a:t>
+            </a:r>
+            <a:endParaRPr lang="de-DE" sz="2000" dirty="0"/>
+          </a:p>
+          <a:p>
+            <a:pPr marL="0" indent="0">
+              <a:buNone/>
+            </a:pPr>
+            <a:r>
+              <a:rPr lang="de-DE" sz="2000" dirty="0"/>
+              <a:t>	</a:t>
+            </a:r>
+            <a:r>
+              <a:rPr sz="2000" dirty="0"/>
+              <a:t>→ validate → publish as OSCAL</a:t>
+            </a:r>
+          </a:p>
+          <a:p>
+            <a:endParaRPr sz="2000" dirty="0"/>
+          </a:p>
+          <a:p>
+            <a:pPr marL="0" indent="0">
+              <a:buNone/>
+            </a:pPr>
+            <a:r>
+              <a:rPr lang="de-DE" sz="2000" dirty="0"/>
+              <a:t>3</a:t>
+            </a:r>
+            <a:r>
+              <a:rPr sz="2000" dirty="0"/>
+              <a:t>. Expand: safety regulations, cross-border (TSI),</a:t>
+            </a:r>
+            <a:r>
+              <a:rPr lang="de-DE" sz="2000" dirty="0"/>
+              <a:t> </a:t>
+            </a:r>
+            <a:r>
+              <a:rPr sz="2000" dirty="0"/>
+              <a:t>operational rules</a:t>
+            </a:r>
+            <a:endParaRPr lang="de-DE" sz="2000" dirty="0"/>
+          </a:p>
+          <a:p>
+            <a:pPr marL="0" indent="0">
+              <a:buNone/>
+            </a:pPr>
+            <a:endParaRPr lang="en-DE" sz="2000" dirty="0"/>
+          </a:p>
+          <a:p>
+            <a:pPr marL="0" indent="0">
+              <a:buNone/>
+            </a:pPr>
+            <a:r>
+              <a:rPr lang="en-DE" sz="2000" dirty="0"/>
+              <a:t>4. </a:t>
+            </a:r>
+            <a:r>
+              <a:rPr lang="en-GB" sz="2000" dirty="0"/>
+              <a:t>F</a:t>
+            </a:r>
+            <a:r>
+              <a:rPr lang="en-DE" sz="2000" dirty="0"/>
+              <a:t>ind easy tools for non technical governance Owners to participate to create structured rules</a:t>
+            </a:r>
+            <a:endParaRPr sz="2000" dirty="0"/>
+          </a:p>
+          <a:p>
+            <a:endParaRPr sz="2000" dirty="0"/>
+          </a:p>
+        </p:txBody>
+      </p:sp>
+      <p:sp>
+        <p:nvSpPr>
+          <p:cNvPr id="4" name="TextBox 3">
+            <a:extLst>
+              <a:ext uri="{FF2B5EF4-FFF2-40B4-BE49-F238E27FC236}">
+                <a16:creationId xmlns:a16="http://schemas.microsoft.com/office/drawing/2014/main" id="{646D0452-0439-E6B7-5E7E-A087D02FF2EA}"/>
+              </a:ext>
+            </a:extLst>
+          </p:cNvPr>
+          <p:cNvSpPr txBox="1"/>
+          <p:nvPr/>
+        </p:nvSpPr>
+        <p:spPr>
+          <a:xfrm>
+            <a:off x="926757" y="5696465"/>
+            <a:ext cx="9848335" cy="954107"/>
+          </a:xfrm>
+          <a:prstGeom prst="rect">
+            <a:avLst/>
+          </a:prstGeom>
+          <a:noFill/>
+        </p:spPr>
+        <p:txBody>
+          <a:bodyPr wrap="square" rtlCol="0">
+            <a:spAutoFit/>
+          </a:bodyPr>
+          <a:lstStyle/>
+          <a:p>
+            <a:pPr algn="ctr"/>
+            <a:r>
+              <a:rPr lang="en-GB" sz="2800" dirty="0"/>
+              <a:t>Little change in workflow. Massive gain in usability.</a:t>
+            </a:r>
+          </a:p>
+          <a:p>
+            <a:pPr algn="ctr"/>
+            <a:r>
+              <a:rPr lang="en-GB" sz="2800" dirty="0"/>
+              <a:t>→ Cross-railway interoperability (DB / SBB / ÖBB / SCNF / …)</a:t>
             </a:r>
           </a:p>
         </p:txBody>
@@ -5489,6 +6471,18 @@
 </file>
 
 <file path=customXml/item1.xml><?xml version="1.0" encoding="utf-8"?>
+<p:properties xmlns:p="http://schemas.microsoft.com/office/2006/metadata/properties" xmlns:xsi="http://www.w3.org/2001/XMLSchema-instance" xmlns:pc="http://schemas.microsoft.com/office/infopath/2007/PartnerControls">
+  <documentManagement>
+    <Copyright xmlns="b106c448-c3d1-41cc-8fd9-3acb307364b4" xsi:nil="true"/>
+    <lcf76f155ced4ddcb4097134ff3c332f xmlns="b106c448-c3d1-41cc-8fd9-3acb307364b4">
+      <Terms xmlns="http://schemas.microsoft.com/office/infopath/2007/PartnerControls"/>
+    </lcf76f155ced4ddcb4097134ff3c332f>
+    <TaxCatchAll xmlns="b043894e-b4c8-44d0-9690-d7947297ac19" xsi:nil="true"/>
+  </documentManagement>
+</p:properties>
+</file>
+
+<file path=customXml/item2.xml><?xml version="1.0" encoding="utf-8"?>
 <ct:contentTypeSchema xmlns:ct="http://schemas.microsoft.com/office/2006/metadata/contentType" xmlns:ma="http://schemas.microsoft.com/office/2006/metadata/properties/metaAttributes" ct:_="" ma:_="" ma:contentTypeName="Dokument" ma:contentTypeID="0x010100C5895299445B8C4DB378BBB718B1F939" ma:contentTypeVersion="18" ma:contentTypeDescription="Ein neues Dokument erstellen." ma:contentTypeScope="" ma:versionID="ca18c32604eb9eb075bdd5b520f76d7f">
   <xsd:schema xmlns:xsd="http://www.w3.org/2001/XMLSchema" xmlns:xs="http://www.w3.org/2001/XMLSchema" xmlns:p="http://schemas.microsoft.com/office/2006/metadata/properties" xmlns:ns2="b106c448-c3d1-41cc-8fd9-3acb307364b4" xmlns:ns3="b043894e-b4c8-44d0-9690-d7947297ac19" targetNamespace="http://schemas.microsoft.com/office/2006/metadata/properties" ma:root="true" ma:fieldsID="0e0a0918b2fa3636e306fde1bc5c258b" ns2:_="" ns3:_="">
     <xsd:import namespace="b106c448-c3d1-41cc-8fd9-3acb307364b4"/>
@@ -5733,18 +6727,6 @@
 </ct:contentTypeSchema>
 </file>
 
-<file path=customXml/item2.xml><?xml version="1.0" encoding="utf-8"?>
-<p:properties xmlns:p="http://schemas.microsoft.com/office/2006/metadata/properties" xmlns:xsi="http://www.w3.org/2001/XMLSchema-instance" xmlns:pc="http://schemas.microsoft.com/office/infopath/2007/PartnerControls">
-  <documentManagement>
-    <Copyright xmlns="b106c448-c3d1-41cc-8fd9-3acb307364b4" xsi:nil="true"/>
-    <lcf76f155ced4ddcb4097134ff3c332f xmlns="b106c448-c3d1-41cc-8fd9-3acb307364b4">
-      <Terms xmlns="http://schemas.microsoft.com/office/infopath/2007/PartnerControls"/>
-    </lcf76f155ced4ddcb4097134ff3c332f>
-    <TaxCatchAll xmlns="b043894e-b4c8-44d0-9690-d7947297ac19" xsi:nil="true"/>
-  </documentManagement>
-</p:properties>
-</file>
-
 <file path=customXml/item3.xml><?xml version="1.0" encoding="utf-8"?>
 <?mso-contentType ?>
 <FormTemplates xmlns="http://schemas.microsoft.com/sharepoint/v3/contenttype/forms">
@@ -5755,6 +6737,23 @@
 </file>
 
 <file path=customXml/itemProps1.xml><?xml version="1.0" encoding="utf-8"?>
+<ds:datastoreItem xmlns:ds="http://schemas.openxmlformats.org/officeDocument/2006/customXml" ds:itemID="{B6D2420F-AFAE-4394-AC5D-D74FCC39CD53}">
+  <ds:schemaRefs>
+    <ds:schemaRef ds:uri="http://schemas.microsoft.com/office/infopath/2007/PartnerControls"/>
+    <ds:schemaRef ds:uri="http://www.w3.org/XML/1998/namespace"/>
+    <ds:schemaRef ds:uri="http://schemas.microsoft.com/office/2006/metadata/properties"/>
+    <ds:schemaRef ds:uri="http://purl.org/dc/elements/1.1/"/>
+    <ds:schemaRef ds:uri="http://schemas.openxmlformats.org/package/2006/metadata/core-properties"/>
+    <ds:schemaRef ds:uri="b043894e-b4c8-44d0-9690-d7947297ac19"/>
+    <ds:schemaRef ds:uri="http://schemas.microsoft.com/office/2006/documentManagement/types"/>
+    <ds:schemaRef ds:uri="b106c448-c3d1-41cc-8fd9-3acb307364b4"/>
+    <ds:schemaRef ds:uri="http://purl.org/dc/dcmitype/"/>
+    <ds:schemaRef ds:uri="http://purl.org/dc/terms/"/>
+  </ds:schemaRefs>
+</ds:datastoreItem>
+</file>
+
+<file path=customXml/itemProps2.xml><?xml version="1.0" encoding="utf-8"?>
 <ds:datastoreItem xmlns:ds="http://schemas.openxmlformats.org/officeDocument/2006/customXml" ds:itemID="{0BED3A9D-D1E4-45EA-8B49-CB6F60C2A98A}">
   <ds:schemaRefs>
     <ds:schemaRef ds:uri="http://schemas.microsoft.com/office/2006/metadata/contentType"/>
@@ -5773,23 +6772,6 @@
 </ds:datastoreItem>
 </file>
 
-<file path=customXml/itemProps2.xml><?xml version="1.0" encoding="utf-8"?>
-<ds:datastoreItem xmlns:ds="http://schemas.openxmlformats.org/officeDocument/2006/customXml" ds:itemID="{B6D2420F-AFAE-4394-AC5D-D74FCC39CD53}">
-  <ds:schemaRefs>
-    <ds:schemaRef ds:uri="http://schemas.microsoft.com/office/infopath/2007/PartnerControls"/>
-    <ds:schemaRef ds:uri="http://www.w3.org/XML/1998/namespace"/>
-    <ds:schemaRef ds:uri="http://schemas.microsoft.com/office/2006/metadata/properties"/>
-    <ds:schemaRef ds:uri="http://purl.org/dc/elements/1.1/"/>
-    <ds:schemaRef ds:uri="http://schemas.openxmlformats.org/package/2006/metadata/core-properties"/>
-    <ds:schemaRef ds:uri="b043894e-b4c8-44d0-9690-d7947297ac19"/>
-    <ds:schemaRef ds:uri="http://schemas.microsoft.com/office/2006/documentManagement/types"/>
-    <ds:schemaRef ds:uri="b106c448-c3d1-41cc-8fd9-3acb307364b4"/>
-    <ds:schemaRef ds:uri="http://purl.org/dc/dcmitype/"/>
-    <ds:schemaRef ds:uri="http://purl.org/dc/terms/"/>
-  </ds:schemaRefs>
-</ds:datastoreItem>
-</file>
-
 <file path=customXml/itemProps3.xml><?xml version="1.0" encoding="utf-8"?>
 <ds:datastoreItem xmlns:ds="http://schemas.openxmlformats.org/officeDocument/2006/customXml" ds:itemID="{47CF5FD6-43E2-4C9A-9372-C9D60EE1772B}">
   <ds:schemaRefs>
